--- a/decks/drop-no-presentation-marques.pptx
+++ b/decks/drop-no-presentation-marques.pptx
@@ -15,9 +15,11 @@
     <p:sldId id="263" r:id="rId9"/>
     <p:sldId id="264" r:id="rId10"/>
     <p:sldId id="265" r:id="rId11"/>
+    <p:sldId id="266" r:id="rId12"/>
+    <p:sldId id="267" r:id="rId13"/>
   </p:sldIdLst>
   <p:notesMasterIdLst>
-    <p:notesMasterId r:id="rId12"/>
+    <p:notesMasterId r:id="rId14"/>
   </p:notesMasterIdLst>
   <p:sldSz cx="9144000" cy="5143500"/>
   <p:notesSz cx="5143500" cy="9144000"/>
@@ -623,6 +625,182 @@
             <a:fld id="{F7021451-1387-4CA6-816F-3879F97B5CBC}" type="slidenum">
               <a:rPr lang="en-US"/>
               <a:t>10</a:t>
+            </a:fld>
+            <a:endParaRPr lang="en-US"/>
+          </a:p>
+        </p:txBody>
+      </p:sp>
+    </p:spTree>
+    <p:extLst>
+      <p:ext uri="{BB962C8B-B14F-4D97-AF65-F5344CB8AC3E}">
+        <p14:creationId xmlns:p14="http://schemas.microsoft.com/office/powerpoint/2010/main" val="1024086991"/>
+      </p:ext>
+    </p:extLst>
+  </p:cSld>
+  <p:clrMapOvr>
+    <a:masterClrMapping/>
+  </p:clrMapOvr>
+</p:notes>
+</file>
+
+<file path=ppt/notesSlides/notesSlide11.xml><?xml version="1.0" encoding="utf-8"?>
+<p:notes xmlns:a="http://schemas.openxmlformats.org/drawingml/2006/main" xmlns:r="http://schemas.openxmlformats.org/officeDocument/2006/relationships" xmlns:p="http://schemas.openxmlformats.org/presentationml/2006/main">
+  <p:cSld>
+    <p:spTree>
+      <p:nvGrpSpPr>
+        <p:cNvPr id="1" name=""/>
+        <p:cNvGrpSpPr/>
+        <p:nvPr/>
+      </p:nvGrpSpPr>
+      <p:grpSpPr>
+        <a:xfrm>
+          <a:off x="0" y="0"/>
+          <a:ext cx="0" cy="0"/>
+          <a:chOff x="0" y="0"/>
+          <a:chExt cx="0" cy="0"/>
+        </a:xfrm>
+      </p:grpSpPr>
+      <p:sp>
+        <p:nvSpPr>
+          <p:cNvPr id="2" name="Slide Image Placeholder 1"/>
+          <p:cNvSpPr>
+            <a:spLocks noGrp="1" noRot="1" noChangeAspect="1"/>
+          </p:cNvSpPr>
+          <p:nvPr>
+            <p:ph type="sldImg"/>
+          </p:nvPr>
+        </p:nvSpPr>
+        <p:spPr/>
+      </p:sp>
+      <p:sp>
+        <p:nvSpPr>
+          <p:cNvPr id="3" name="Notes Placeholder 2"/>
+          <p:cNvSpPr>
+            <a:spLocks noGrp="1"/>
+          </p:cNvSpPr>
+          <p:nvPr>
+            <p:ph type="body" idx="1"/>
+          </p:nvPr>
+        </p:nvSpPr>
+        <p:spPr/>
+        <p:txBody>
+          <a:bodyPr/>
+          <a:lstStyle/>
+          <a:p>
+            <a:r>
+              <a:rPr lang="en-US" dirty="0"/>
+              <a:t/>
+            </a:r>
+            <a:endParaRPr lang="en-US" dirty="0"/>
+          </a:p>
+        </p:txBody>
+      </p:sp>
+      <p:sp>
+        <p:nvSpPr>
+          <p:cNvPr id="4" name="Slide Number Placeholder 3"/>
+          <p:cNvSpPr>
+            <a:spLocks noGrp="1"/>
+          </p:cNvSpPr>
+          <p:nvPr>
+            <p:ph type="sldNum" sz="quarter" idx="10"/>
+          </p:nvPr>
+        </p:nvSpPr>
+        <p:spPr/>
+        <p:txBody>
+          <a:bodyPr/>
+          <a:lstStyle/>
+          <a:p>
+            <a:fld id="{F7021451-1387-4CA6-816F-3879F97B5CBC}" type="slidenum">
+              <a:rPr lang="en-US"/>
+              <a:t>11</a:t>
+            </a:fld>
+            <a:endParaRPr lang="en-US"/>
+          </a:p>
+        </p:txBody>
+      </p:sp>
+    </p:spTree>
+    <p:extLst>
+      <p:ext uri="{BB962C8B-B14F-4D97-AF65-F5344CB8AC3E}">
+        <p14:creationId xmlns:p14="http://schemas.microsoft.com/office/powerpoint/2010/main" val="1024086991"/>
+      </p:ext>
+    </p:extLst>
+  </p:cSld>
+  <p:clrMapOvr>
+    <a:masterClrMapping/>
+  </p:clrMapOvr>
+</p:notes>
+</file>
+
+<file path=ppt/notesSlides/notesSlide12.xml><?xml version="1.0" encoding="utf-8"?>
+<p:notes xmlns:a="http://schemas.openxmlformats.org/drawingml/2006/main" xmlns:r="http://schemas.openxmlformats.org/officeDocument/2006/relationships" xmlns:p="http://schemas.openxmlformats.org/presentationml/2006/main">
+  <p:cSld>
+    <p:spTree>
+      <p:nvGrpSpPr>
+        <p:cNvPr id="1" name=""/>
+        <p:cNvGrpSpPr/>
+        <p:nvPr/>
+      </p:nvGrpSpPr>
+      <p:grpSpPr>
+        <a:xfrm>
+          <a:off x="0" y="0"/>
+          <a:ext cx="0" cy="0"/>
+          <a:chOff x="0" y="0"/>
+          <a:chExt cx="0" cy="0"/>
+        </a:xfrm>
+      </p:grpSpPr>
+      <p:sp>
+        <p:nvSpPr>
+          <p:cNvPr id="2" name="Slide Image Placeholder 1"/>
+          <p:cNvSpPr>
+            <a:spLocks noGrp="1" noRot="1" noChangeAspect="1"/>
+          </p:cNvSpPr>
+          <p:nvPr>
+            <p:ph type="sldImg"/>
+          </p:nvPr>
+        </p:nvSpPr>
+        <p:spPr/>
+      </p:sp>
+      <p:sp>
+        <p:nvSpPr>
+          <p:cNvPr id="3" name="Notes Placeholder 2"/>
+          <p:cNvSpPr>
+            <a:spLocks noGrp="1"/>
+          </p:cNvSpPr>
+          <p:nvPr>
+            <p:ph type="body" idx="1"/>
+          </p:nvPr>
+        </p:nvSpPr>
+        <p:spPr/>
+        <p:txBody>
+          <a:bodyPr/>
+          <a:lstStyle/>
+          <a:p>
+            <a:r>
+              <a:rPr lang="en-US" dirty="0"/>
+              <a:t/>
+            </a:r>
+            <a:endParaRPr lang="en-US" dirty="0"/>
+          </a:p>
+        </p:txBody>
+      </p:sp>
+      <p:sp>
+        <p:nvSpPr>
+          <p:cNvPr id="4" name="Slide Number Placeholder 3"/>
+          <p:cNvSpPr>
+            <a:spLocks noGrp="1"/>
+          </p:cNvSpPr>
+          <p:nvPr>
+            <p:ph type="sldNum" sz="quarter" idx="10"/>
+          </p:nvPr>
+        </p:nvSpPr>
+        <p:spPr/>
+        <p:txBody>
+          <a:bodyPr/>
+          <a:lstStyle/>
+          <a:p>
+            <a:fld id="{F7021451-1387-4CA6-816F-3879F97B5CBC}" type="slidenum">
+              <a:rPr lang="en-US"/>
+              <a:t>12</a:t>
             </a:fld>
             <a:endParaRPr lang="en-US"/>
           </a:p>
@@ -1849,7 +2027,7 @@
                 <a:ea typeface="Calibri" pitchFamily="34" charset="-122"/>
                 <a:cs typeface="Calibri" pitchFamily="34" charset="-120"/>
               </a:rPr>
-              <a:t>Brand-direct  ·  sealed-bid  ·  une révélation, jeudi 18h</a:t>
+              <a:t>Brand-direct  ·  sealed-bid  ·  une révélation, jeudi 18h CET</a:t>
             </a:r>
             <a:endParaRPr lang="en-US" sz="1100" dirty="0"/>
           </a:p>
@@ -1891,6 +2069,1238 @@
 <file path=ppt/slides/slide10.xml><?xml version="1.0" encoding="utf-8"?>
 <p:sld xmlns:a="http://schemas.openxmlformats.org/drawingml/2006/main" xmlns:r="http://schemas.openxmlformats.org/officeDocument/2006/relationships" xmlns:p="http://schemas.openxmlformats.org/presentationml/2006/main">
   <p:cSld name="Slide 10">
+    <p:bg>
+      <p:bgPr>
+        <a:solidFill>
+          <a:srgbClr val="FAFAF7"/>
+        </a:solidFill>
+      </p:bgPr>
+    </p:bg>
+    <p:spTree>
+      <p:nvGrpSpPr>
+        <p:cNvPr id="1" name=""/>
+        <p:cNvGrpSpPr/>
+        <p:nvPr/>
+      </p:nvGrpSpPr>
+      <p:grpSpPr>
+        <a:xfrm>
+          <a:off x="0" y="0"/>
+          <a:ext cx="0" cy="0"/>
+          <a:chOff x="0" y="0"/>
+          <a:chExt cx="0" cy="0"/>
+        </a:xfrm>
+      </p:grpSpPr>
+      <p:sp>
+        <p:nvSpPr>
+          <p:cNvPr id="2" name="Text 0"/>
+          <p:cNvSpPr/>
+          <p:nvPr/>
+        </p:nvSpPr>
+        <p:spPr>
+          <a:xfrm>
+            <a:off x="457200" y="457200"/>
+            <a:ext cx="6400800" cy="228600"/>
+          </a:xfrm>
+          <a:prstGeom prst="rect">
+            <a:avLst/>
+          </a:prstGeom>
+          <a:noFill/>
+          <a:ln/>
+        </p:spPr>
+        <p:txBody>
+          <a:bodyPr wrap="square" lIns="0" tIns="0" rIns="0" bIns="0" rtlCol="0" anchor="ctr"/>
+          <a:lstStyle/>
+          <a:p>
+            <a:pPr indent="0" marL="0">
+              <a:buNone/>
+            </a:pPr>
+            <a:r>
+              <a:rPr lang="en-US" sz="900" spc="400" kern="0" dirty="0">
+                <a:solidFill>
+                  <a:srgbClr val="6B6B6B"/>
+                </a:solidFill>
+                <a:latin typeface="Calibri" pitchFamily="34" charset="0"/>
+                <a:ea typeface="Calibri" pitchFamily="34" charset="-122"/>
+                <a:cs typeface="Calibri" pitchFamily="34" charset="-120"/>
+              </a:rPr>
+              <a:t>TARIFICATION</a:t>
+            </a:r>
+            <a:endParaRPr lang="en-US" sz="900" dirty="0"/>
+          </a:p>
+        </p:txBody>
+      </p:sp>
+      <p:sp>
+        <p:nvSpPr>
+          <p:cNvPr id="3" name="Shape 1"/>
+          <p:cNvSpPr/>
+          <p:nvPr/>
+        </p:nvSpPr>
+        <p:spPr>
+          <a:xfrm>
+            <a:off x="457200" y="777240"/>
+            <a:ext cx="8229600" cy="0"/>
+          </a:xfrm>
+          <a:prstGeom prst="line">
+            <a:avLst/>
+          </a:prstGeom>
+          <a:noFill/>
+          <a:ln w="9525">
+            <a:solidFill>
+              <a:srgbClr val="D6D2C7"/>
+            </a:solidFill>
+            <a:prstDash val="solid"/>
+          </a:ln>
+        </p:spPr>
+      </p:sp>
+      <p:sp>
+        <p:nvSpPr>
+          <p:cNvPr id="4" name="Text 2"/>
+          <p:cNvSpPr/>
+          <p:nvPr/>
+        </p:nvSpPr>
+        <p:spPr>
+          <a:xfrm>
+            <a:off x="457200" y="1097280"/>
+            <a:ext cx="8229600" cy="1463040"/>
+          </a:xfrm>
+          <a:prstGeom prst="rect">
+            <a:avLst/>
+          </a:prstGeom>
+          <a:noFill/>
+          <a:ln/>
+        </p:spPr>
+        <p:txBody>
+          <a:bodyPr wrap="square" lIns="0" tIns="0" rIns="0" bIns="0" rtlCol="0" anchor="ctr"/>
+          <a:lstStyle/>
+          <a:p>
+            <a:pPr indent="0" marL="0">
+              <a:buNone/>
+            </a:pPr>
+            <a:r>
+              <a:rPr lang="en-US" sz="9000" i="1" spc="-100" kern="0" dirty="0">
+                <a:solidFill>
+                  <a:srgbClr val="0A0A0A"/>
+                </a:solidFill>
+                <a:latin typeface="Georgia" pitchFamily="34" charset="0"/>
+                <a:ea typeface="Georgia" pitchFamily="34" charset="-122"/>
+                <a:cs typeface="Georgia" pitchFamily="34" charset="-120"/>
+              </a:rPr>
+              <a:t>12 %  +  5 €</a:t>
+            </a:r>
+            <a:endParaRPr lang="en-US" sz="9000" dirty="0"/>
+          </a:p>
+        </p:txBody>
+      </p:sp>
+      <p:sp>
+        <p:nvSpPr>
+          <p:cNvPr id="5" name="Text 3"/>
+          <p:cNvSpPr/>
+          <p:nvPr/>
+        </p:nvSpPr>
+        <p:spPr>
+          <a:xfrm>
+            <a:off x="457200" y="2697480"/>
+            <a:ext cx="8229600" cy="457200"/>
+          </a:xfrm>
+          <a:prstGeom prst="rect">
+            <a:avLst/>
+          </a:prstGeom>
+          <a:noFill/>
+          <a:ln/>
+        </p:spPr>
+        <p:txBody>
+          <a:bodyPr wrap="square" lIns="0" tIns="0" rIns="0" bIns="0" rtlCol="0" anchor="ctr"/>
+          <a:lstStyle/>
+          <a:p>
+            <a:pPr indent="0" marL="0">
+              <a:buNone/>
+            </a:pPr>
+            <a:r>
+              <a:rPr lang="en-US" sz="2000" i="1" dirty="0">
+                <a:solidFill>
+                  <a:srgbClr val="6B6B6B"/>
+                </a:solidFill>
+                <a:latin typeface="Georgia" pitchFamily="34" charset="0"/>
+                <a:ea typeface="Georgia" pitchFamily="34" charset="-122"/>
+                <a:cs typeface="Georgia" pitchFamily="34" charset="-120"/>
+              </a:rPr>
+              <a:t>par pièce vendue, jusqu’à 10 000 €.</a:t>
+            </a:r>
+            <a:endParaRPr lang="en-US" sz="2000" dirty="0"/>
+          </a:p>
+        </p:txBody>
+      </p:sp>
+      <p:sp>
+        <p:nvSpPr>
+          <p:cNvPr id="6" name="Text 4"/>
+          <p:cNvSpPr/>
+          <p:nvPr/>
+        </p:nvSpPr>
+        <p:spPr>
+          <a:xfrm>
+            <a:off x="457200" y="3108960"/>
+            <a:ext cx="8229600" cy="274320"/>
+          </a:xfrm>
+          <a:prstGeom prst="rect">
+            <a:avLst/>
+          </a:prstGeom>
+          <a:noFill/>
+          <a:ln/>
+        </p:spPr>
+        <p:txBody>
+          <a:bodyPr wrap="square" lIns="0" tIns="0" rIns="0" bIns="0" rtlCol="0" anchor="ctr"/>
+          <a:lstStyle/>
+          <a:p>
+            <a:pPr indent="0" marL="0">
+              <a:buNone/>
+            </a:pPr>
+            <a:r>
+              <a:rPr lang="en-US" sz="1100" i="1" dirty="0">
+                <a:solidFill>
+                  <a:srgbClr val="6B6B6B"/>
+                </a:solidFill>
+                <a:latin typeface="Calibri" pitchFamily="34" charset="0"/>
+                <a:ea typeface="Calibri" pitchFamily="34" charset="-122"/>
+                <a:cs typeface="Calibri" pitchFamily="34" charset="-120"/>
+              </a:rPr>
+              <a:t>Au-delà de 10 000 €, tarif sur mesure (logistique concierge incluse).</a:t>
+            </a:r>
+            <a:endParaRPr lang="en-US" sz="1100" dirty="0"/>
+          </a:p>
+        </p:txBody>
+      </p:sp>
+      <p:sp>
+        <p:nvSpPr>
+          <p:cNvPr id="7" name="Shape 5"/>
+          <p:cNvSpPr/>
+          <p:nvPr/>
+        </p:nvSpPr>
+        <p:spPr>
+          <a:xfrm>
+            <a:off x="457200" y="3520440"/>
+            <a:ext cx="8229600" cy="0"/>
+          </a:xfrm>
+          <a:prstGeom prst="line">
+            <a:avLst/>
+          </a:prstGeom>
+          <a:noFill/>
+          <a:ln w="9525">
+            <a:solidFill>
+              <a:srgbClr val="D6D2C7"/>
+            </a:solidFill>
+            <a:prstDash val="solid"/>
+          </a:ln>
+        </p:spPr>
+      </p:sp>
+      <p:sp>
+        <p:nvSpPr>
+          <p:cNvPr id="8" name="Text 6"/>
+          <p:cNvSpPr/>
+          <p:nvPr/>
+        </p:nvSpPr>
+        <p:spPr>
+          <a:xfrm>
+            <a:off x="457200" y="3657600"/>
+            <a:ext cx="8229600" cy="256032"/>
+          </a:xfrm>
+          <a:prstGeom prst="rect">
+            <a:avLst/>
+          </a:prstGeom>
+          <a:noFill/>
+          <a:ln/>
+        </p:spPr>
+        <p:txBody>
+          <a:bodyPr wrap="square" lIns="0" tIns="0" rIns="0" bIns="0" rtlCol="0" anchor="ctr"/>
+          <a:lstStyle/>
+          <a:p>
+            <a:pPr indent="0" marL="0">
+              <a:buNone/>
+            </a:pPr>
+            <a:r>
+              <a:rPr lang="en-US" sz="900" b="1" spc="500" kern="0" dirty="0">
+                <a:solidFill>
+                  <a:srgbClr val="6B6B6B"/>
+                </a:solidFill>
+                <a:latin typeface="Calibri" pitchFamily="34" charset="0"/>
+                <a:ea typeface="Calibri" pitchFamily="34" charset="-122"/>
+                <a:cs typeface="Calibri" pitchFamily="34" charset="-120"/>
+              </a:rPr>
+              <a:t>INCLUS  ·  AUCUN FRAIS ADDITIONNEL</a:t>
+            </a:r>
+            <a:endParaRPr lang="en-US" sz="900" dirty="0"/>
+          </a:p>
+        </p:txBody>
+      </p:sp>
+      <p:sp>
+        <p:nvSpPr>
+          <p:cNvPr id="9" name="Text 7"/>
+          <p:cNvSpPr/>
+          <p:nvPr/>
+        </p:nvSpPr>
+        <p:spPr>
+          <a:xfrm>
+            <a:off x="457200" y="3913632"/>
+            <a:ext cx="4023360" cy="237744"/>
+          </a:xfrm>
+          <a:prstGeom prst="rect">
+            <a:avLst/>
+          </a:prstGeom>
+          <a:noFill/>
+          <a:ln/>
+        </p:spPr>
+        <p:txBody>
+          <a:bodyPr wrap="square" lIns="0" tIns="0" rIns="0" bIns="0" rtlCol="0" anchor="ctr"/>
+          <a:lstStyle/>
+          <a:p>
+            <a:pPr indent="0" marL="0">
+              <a:buNone/>
+            </a:pPr>
+            <a:r>
+              <a:rPr lang="en-US" sz="1100" dirty="0">
+                <a:solidFill>
+                  <a:srgbClr val="0A0A0A"/>
+                </a:solidFill>
+                <a:latin typeface="Calibri" pitchFamily="34" charset="0"/>
+                <a:ea typeface="Calibri" pitchFamily="34" charset="-122"/>
+                <a:cs typeface="Calibri" pitchFamily="34" charset="-120"/>
+              </a:rPr>
+              <a:t>KYC acheteurs · Stripe Identity</a:t>
+            </a:r>
+            <a:endParaRPr lang="en-US" sz="1100" dirty="0"/>
+          </a:p>
+        </p:txBody>
+      </p:sp>
+      <p:sp>
+        <p:nvSpPr>
+          <p:cNvPr id="10" name="Text 8"/>
+          <p:cNvSpPr/>
+          <p:nvPr/>
+        </p:nvSpPr>
+        <p:spPr>
+          <a:xfrm>
+            <a:off x="457200" y="4169664"/>
+            <a:ext cx="4023360" cy="237744"/>
+          </a:xfrm>
+          <a:prstGeom prst="rect">
+            <a:avLst/>
+          </a:prstGeom>
+          <a:noFill/>
+          <a:ln/>
+        </p:spPr>
+        <p:txBody>
+          <a:bodyPr wrap="square" lIns="0" tIns="0" rIns="0" bIns="0" rtlCol="0" anchor="ctr"/>
+          <a:lstStyle/>
+          <a:p>
+            <a:pPr indent="0" marL="0">
+              <a:buNone/>
+            </a:pPr>
+            <a:r>
+              <a:rPr lang="en-US" sz="1100" dirty="0">
+                <a:solidFill>
+                  <a:srgbClr val="0A0A0A"/>
+                </a:solidFill>
+                <a:latin typeface="Calibri" pitchFamily="34" charset="0"/>
+                <a:ea typeface="Calibri" pitchFamily="34" charset="-122"/>
+                <a:cs typeface="Calibri" pitchFamily="34" charset="-120"/>
+              </a:rPr>
+              <a:t>Paiement · pré-auth, capture, remboursements</a:t>
+            </a:r>
+            <a:endParaRPr lang="en-US" sz="1100" dirty="0"/>
+          </a:p>
+        </p:txBody>
+      </p:sp>
+      <p:sp>
+        <p:nvSpPr>
+          <p:cNvPr id="11" name="Text 9"/>
+          <p:cNvSpPr/>
+          <p:nvPr/>
+        </p:nvSpPr>
+        <p:spPr>
+          <a:xfrm>
+            <a:off x="457200" y="4425696"/>
+            <a:ext cx="4023360" cy="237744"/>
+          </a:xfrm>
+          <a:prstGeom prst="rect">
+            <a:avLst/>
+          </a:prstGeom>
+          <a:noFill/>
+          <a:ln/>
+        </p:spPr>
+        <p:txBody>
+          <a:bodyPr wrap="square" lIns="0" tIns="0" rIns="0" bIns="0" rtlCol="0" anchor="ctr"/>
+          <a:lstStyle/>
+          <a:p>
+            <a:pPr indent="0" marL="0">
+              <a:buNone/>
+            </a:pPr>
+            <a:r>
+              <a:rPr lang="en-US" sz="1100" dirty="0">
+                <a:solidFill>
+                  <a:srgbClr val="0A0A0A"/>
+                </a:solidFill>
+                <a:latin typeface="Calibri" pitchFamily="34" charset="0"/>
+                <a:ea typeface="Calibri" pitchFamily="34" charset="-122"/>
+                <a:cs typeface="Calibri" pitchFamily="34" charset="-120"/>
+              </a:rPr>
+              <a:t>Logistique premium · DHL Express ou Malca-Amit</a:t>
+            </a:r>
+            <a:endParaRPr lang="en-US" sz="1100" dirty="0"/>
+          </a:p>
+        </p:txBody>
+      </p:sp>
+      <p:sp>
+        <p:nvSpPr>
+          <p:cNvPr id="12" name="Text 10"/>
+          <p:cNvSpPr/>
+          <p:nvPr/>
+        </p:nvSpPr>
+        <p:spPr>
+          <a:xfrm>
+            <a:off x="4617720" y="3913632"/>
+            <a:ext cx="4023360" cy="237744"/>
+          </a:xfrm>
+          <a:prstGeom prst="rect">
+            <a:avLst/>
+          </a:prstGeom>
+          <a:noFill/>
+          <a:ln/>
+        </p:spPr>
+        <p:txBody>
+          <a:bodyPr wrap="square" lIns="0" tIns="0" rIns="0" bIns="0" rtlCol="0" anchor="ctr"/>
+          <a:lstStyle/>
+          <a:p>
+            <a:pPr indent="0" marL="0">
+              <a:buNone/>
+            </a:pPr>
+            <a:r>
+              <a:rPr lang="en-US" sz="1100" dirty="0">
+                <a:solidFill>
+                  <a:srgbClr val="0A0A0A"/>
+                </a:solidFill>
+                <a:latin typeface="Calibri" pitchFamily="34" charset="0"/>
+                <a:ea typeface="Calibri" pitchFamily="34" charset="-122"/>
+                <a:cs typeface="Calibri" pitchFamily="34" charset="-120"/>
+              </a:rPr>
+              <a:t>Support client · Crisp chat + email</a:t>
+            </a:r>
+            <a:endParaRPr lang="en-US" sz="1100" dirty="0"/>
+          </a:p>
+        </p:txBody>
+      </p:sp>
+      <p:sp>
+        <p:nvSpPr>
+          <p:cNvPr id="13" name="Text 11"/>
+          <p:cNvSpPr/>
+          <p:nvPr/>
+        </p:nvSpPr>
+        <p:spPr>
+          <a:xfrm>
+            <a:off x="4617720" y="4169664"/>
+            <a:ext cx="4023360" cy="237744"/>
+          </a:xfrm>
+          <a:prstGeom prst="rect">
+            <a:avLst/>
+          </a:prstGeom>
+          <a:noFill/>
+          <a:ln/>
+        </p:spPr>
+        <p:txBody>
+          <a:bodyPr wrap="square" lIns="0" tIns="0" rIns="0" bIns="0" rtlCol="0" anchor="ctr"/>
+          <a:lstStyle/>
+          <a:p>
+            <a:pPr indent="0" marL="0">
+              <a:buNone/>
+            </a:pPr>
+            <a:r>
+              <a:rPr lang="en-US" sz="1100" dirty="0">
+                <a:solidFill>
+                  <a:srgbClr val="0A0A0A"/>
+                </a:solidFill>
+                <a:latin typeface="Calibri" pitchFamily="34" charset="0"/>
+                <a:ea typeface="Calibri" pitchFamily="34" charset="-122"/>
+                <a:cs typeface="Calibri" pitchFamily="34" charset="-120"/>
+              </a:rPr>
+              <a:t>Communication · newsletter, PR, réseaux</a:t>
+            </a:r>
+            <a:endParaRPr lang="en-US" sz="1100" dirty="0"/>
+          </a:p>
+        </p:txBody>
+      </p:sp>
+      <p:sp>
+        <p:nvSpPr>
+          <p:cNvPr id="14" name="Text 12"/>
+          <p:cNvSpPr/>
+          <p:nvPr/>
+        </p:nvSpPr>
+        <p:spPr>
+          <a:xfrm>
+            <a:off x="457200" y="4800600"/>
+            <a:ext cx="1371600" cy="274320"/>
+          </a:xfrm>
+          <a:prstGeom prst="rect">
+            <a:avLst/>
+          </a:prstGeom>
+          <a:noFill/>
+          <a:ln/>
+        </p:spPr>
+        <p:txBody>
+          <a:bodyPr wrap="square" lIns="0" tIns="0" rIns="0" bIns="0" rtlCol="0" anchor="ctr"/>
+          <a:lstStyle/>
+          <a:p>
+            <a:pPr indent="0" marL="0">
+              <a:buNone/>
+            </a:pPr>
+            <a:r>
+              <a:rPr lang="en-US" sz="1100" i="1" dirty="0">
+                <a:solidFill>
+                  <a:srgbClr val="0A0A0A"/>
+                </a:solidFill>
+                <a:latin typeface="Georgia" pitchFamily="34" charset="0"/>
+                <a:ea typeface="Georgia" pitchFamily="34" charset="-122"/>
+                <a:cs typeface="Georgia" pitchFamily="34" charset="-120"/>
+              </a:rPr>
+              <a:t>Drop №</a:t>
+            </a:r>
+            <a:endParaRPr lang="en-US" sz="1100" dirty="0"/>
+          </a:p>
+        </p:txBody>
+      </p:sp>
+      <p:sp>
+        <p:nvSpPr>
+          <p:cNvPr id="15" name="Text 13"/>
+          <p:cNvSpPr/>
+          <p:nvPr/>
+        </p:nvSpPr>
+        <p:spPr>
+          <a:xfrm>
+            <a:off x="8321040" y="4800600"/>
+            <a:ext cx="731520" cy="228600"/>
+          </a:xfrm>
+          <a:prstGeom prst="rect">
+            <a:avLst/>
+          </a:prstGeom>
+          <a:noFill/>
+          <a:ln/>
+        </p:spPr>
+        <p:txBody>
+          <a:bodyPr wrap="square" lIns="0" tIns="0" rIns="0" bIns="0" rtlCol="0" anchor="ctr"/>
+          <a:lstStyle/>
+          <a:p>
+            <a:pPr algn="r" indent="0" marL="0">
+              <a:buNone/>
+            </a:pPr>
+            <a:r>
+              <a:rPr lang="en-US" sz="900" i="1" dirty="0">
+                <a:solidFill>
+                  <a:srgbClr val="6B6B6B"/>
+                </a:solidFill>
+                <a:latin typeface="Georgia" pitchFamily="34" charset="0"/>
+                <a:ea typeface="Georgia" pitchFamily="34" charset="-122"/>
+                <a:cs typeface="Georgia" pitchFamily="34" charset="-120"/>
+              </a:rPr>
+              <a:t>№ 10 / 12</a:t>
+            </a:r>
+            <a:endParaRPr lang="en-US" sz="900" dirty="0"/>
+          </a:p>
+        </p:txBody>
+      </p:sp>
+    </p:spTree>
+  </p:cSld>
+  <p:clrMapOvr>
+    <a:masterClrMapping/>
+  </p:clrMapOvr>
+</p:sld>
+</file>
+
+<file path=ppt/slides/slide11.xml><?xml version="1.0" encoding="utf-8"?>
+<p:sld xmlns:a="http://schemas.openxmlformats.org/drawingml/2006/main" xmlns:r="http://schemas.openxmlformats.org/officeDocument/2006/relationships" xmlns:p="http://schemas.openxmlformats.org/presentationml/2006/main">
+  <p:cSld name="Slide 11">
+    <p:bg>
+      <p:bgPr>
+        <a:solidFill>
+          <a:srgbClr val="FAFAF7"/>
+        </a:solidFill>
+      </p:bgPr>
+    </p:bg>
+    <p:spTree>
+      <p:nvGrpSpPr>
+        <p:cNvPr id="1" name=""/>
+        <p:cNvGrpSpPr/>
+        <p:nvPr/>
+      </p:nvGrpSpPr>
+      <p:grpSpPr>
+        <a:xfrm>
+          <a:off x="0" y="0"/>
+          <a:ext cx="0" cy="0"/>
+          <a:chOff x="0" y="0"/>
+          <a:chExt cx="0" cy="0"/>
+        </a:xfrm>
+      </p:grpSpPr>
+      <p:sp>
+        <p:nvSpPr>
+          <p:cNvPr id="2" name="Text 0"/>
+          <p:cNvSpPr/>
+          <p:nvPr/>
+        </p:nvSpPr>
+        <p:spPr>
+          <a:xfrm>
+            <a:off x="457200" y="457200"/>
+            <a:ext cx="6400800" cy="228600"/>
+          </a:xfrm>
+          <a:prstGeom prst="rect">
+            <a:avLst/>
+          </a:prstGeom>
+          <a:noFill/>
+          <a:ln/>
+        </p:spPr>
+        <p:txBody>
+          <a:bodyPr wrap="square" lIns="0" tIns="0" rIns="0" bIns="0" rtlCol="0" anchor="ctr"/>
+          <a:lstStyle/>
+          <a:p>
+            <a:pPr indent="0" marL="0">
+              <a:buNone/>
+            </a:pPr>
+            <a:r>
+              <a:rPr lang="en-US" sz="900" spc="400" kern="0" dirty="0">
+                <a:solidFill>
+                  <a:srgbClr val="6B6B6B"/>
+                </a:solidFill>
+                <a:latin typeface="Calibri" pitchFamily="34" charset="0"/>
+                <a:ea typeface="Calibri" pitchFamily="34" charset="-122"/>
+                <a:cs typeface="Calibri" pitchFamily="34" charset="-120"/>
+              </a:rPr>
+              <a:t>POSITIONNEMENT</a:t>
+            </a:r>
+            <a:endParaRPr lang="en-US" sz="900" dirty="0"/>
+          </a:p>
+        </p:txBody>
+      </p:sp>
+      <p:sp>
+        <p:nvSpPr>
+          <p:cNvPr id="3" name="Shape 1"/>
+          <p:cNvSpPr/>
+          <p:nvPr/>
+        </p:nvSpPr>
+        <p:spPr>
+          <a:xfrm>
+            <a:off x="457200" y="777240"/>
+            <a:ext cx="8229600" cy="0"/>
+          </a:xfrm>
+          <a:prstGeom prst="line">
+            <a:avLst/>
+          </a:prstGeom>
+          <a:noFill/>
+          <a:ln w="9525">
+            <a:solidFill>
+              <a:srgbClr val="D6D2C7"/>
+            </a:solidFill>
+            <a:prstDash val="solid"/>
+          </a:ln>
+        </p:spPr>
+      </p:sp>
+      <p:sp>
+        <p:nvSpPr>
+          <p:cNvPr id="4" name="Text 2"/>
+          <p:cNvSpPr/>
+          <p:nvPr/>
+        </p:nvSpPr>
+        <p:spPr>
+          <a:xfrm>
+            <a:off x="457200" y="1005840"/>
+            <a:ext cx="8229600" cy="640080"/>
+          </a:xfrm>
+          <a:prstGeom prst="rect">
+            <a:avLst/>
+          </a:prstGeom>
+          <a:noFill/>
+          <a:ln/>
+        </p:spPr>
+        <p:txBody>
+          <a:bodyPr wrap="square" lIns="0" tIns="0" rIns="0" bIns="0" rtlCol="0" anchor="ctr"/>
+          <a:lstStyle/>
+          <a:p>
+            <a:pPr indent="0" marL="0">
+              <a:buNone/>
+            </a:pPr>
+            <a:r>
+              <a:rPr lang="en-US" sz="2800" i="1" dirty="0">
+                <a:solidFill>
+                  <a:srgbClr val="0A0A0A"/>
+                </a:solidFill>
+                <a:latin typeface="Georgia" pitchFamily="34" charset="0"/>
+                <a:ea typeface="Georgia" pitchFamily="34" charset="-122"/>
+                <a:cs typeface="Georgia" pitchFamily="34" charset="-120"/>
+              </a:rPr>
+              <a:t>Pour les pièces qu’on n’a pas encore vues.</a:t>
+            </a:r>
+            <a:endParaRPr lang="en-US" sz="2800" dirty="0"/>
+          </a:p>
+        </p:txBody>
+      </p:sp>
+      <p:sp>
+        <p:nvSpPr>
+          <p:cNvPr id="5" name="Text 3"/>
+          <p:cNvSpPr/>
+          <p:nvPr/>
+        </p:nvSpPr>
+        <p:spPr>
+          <a:xfrm>
+            <a:off x="457200" y="1691640"/>
+            <a:ext cx="8229600" cy="502920"/>
+          </a:xfrm>
+          <a:prstGeom prst="rect">
+            <a:avLst/>
+          </a:prstGeom>
+          <a:noFill/>
+          <a:ln/>
+        </p:spPr>
+        <p:txBody>
+          <a:bodyPr wrap="square" lIns="0" tIns="0" rIns="0" bIns="0" rtlCol="0" anchor="ctr"/>
+          <a:lstStyle/>
+          <a:p>
+            <a:pPr indent="0" marL="0">
+              <a:buNone/>
+            </a:pPr>
+            <a:r>
+              <a:rPr lang="en-US" sz="1300" i="1" dirty="0">
+                <a:solidFill>
+                  <a:srgbClr val="6B6B6B"/>
+                </a:solidFill>
+                <a:latin typeface="Calibri" pitchFamily="34" charset="0"/>
+                <a:ea typeface="Calibri" pitchFamily="34" charset="-122"/>
+                <a:cs typeface="Calibri" pitchFamily="34" charset="-120"/>
+              </a:rPr>
+              <a:t>Les références émergentes, les éditions limitées, les premières sorties. Quand le marché ne sait pas encore quoi en penser.</a:t>
+            </a:r>
+            <a:endParaRPr lang="en-US" sz="1300" dirty="0"/>
+          </a:p>
+        </p:txBody>
+      </p:sp>
+      <p:sp>
+        <p:nvSpPr>
+          <p:cNvPr id="6" name="Text 4"/>
+          <p:cNvSpPr/>
+          <p:nvPr/>
+        </p:nvSpPr>
+        <p:spPr>
+          <a:xfrm>
+            <a:off x="457200" y="2468880"/>
+            <a:ext cx="4023360" cy="274320"/>
+          </a:xfrm>
+          <a:prstGeom prst="rect">
+            <a:avLst/>
+          </a:prstGeom>
+          <a:noFill/>
+          <a:ln/>
+        </p:spPr>
+        <p:txBody>
+          <a:bodyPr wrap="square" lIns="0" tIns="0" rIns="0" bIns="0" rtlCol="0" anchor="ctr"/>
+          <a:lstStyle/>
+          <a:p>
+            <a:pPr indent="0" marL="0">
+              <a:buNone/>
+            </a:pPr>
+            <a:r>
+              <a:rPr lang="en-US" sz="1000" b="1" spc="300" kern="0" dirty="0">
+                <a:solidFill>
+                  <a:srgbClr val="C9A96E"/>
+                </a:solidFill>
+                <a:latin typeface="Calibri" pitchFamily="34" charset="0"/>
+                <a:ea typeface="Calibri" pitchFamily="34" charset="-122"/>
+                <a:cs typeface="Calibri" pitchFamily="34" charset="-120"/>
+              </a:rPr>
+              <a:t>IDÉAL POUR</a:t>
+            </a:r>
+            <a:endParaRPr lang="en-US" sz="1000" dirty="0"/>
+          </a:p>
+        </p:txBody>
+      </p:sp>
+      <p:sp>
+        <p:nvSpPr>
+          <p:cNvPr id="7" name="Shape 5"/>
+          <p:cNvSpPr/>
+          <p:nvPr/>
+        </p:nvSpPr>
+        <p:spPr>
+          <a:xfrm>
+            <a:off x="457200" y="2788920"/>
+            <a:ext cx="4023360" cy="0"/>
+          </a:xfrm>
+          <a:prstGeom prst="line">
+            <a:avLst/>
+          </a:prstGeom>
+          <a:noFill/>
+          <a:ln w="9525">
+            <a:solidFill>
+              <a:srgbClr val="C9A96E"/>
+            </a:solidFill>
+            <a:prstDash val="solid"/>
+          </a:ln>
+        </p:spPr>
+      </p:sp>
+      <p:sp>
+        <p:nvSpPr>
+          <p:cNvPr id="8" name="Text 6"/>
+          <p:cNvSpPr/>
+          <p:nvPr/>
+        </p:nvSpPr>
+        <p:spPr>
+          <a:xfrm>
+            <a:off x="457200" y="2971800"/>
+            <a:ext cx="4023360" cy="365760"/>
+          </a:xfrm>
+          <a:prstGeom prst="rect">
+            <a:avLst/>
+          </a:prstGeom>
+          <a:noFill/>
+          <a:ln/>
+        </p:spPr>
+        <p:txBody>
+          <a:bodyPr wrap="square" lIns="0" tIns="0" rIns="0" bIns="0" rtlCol="0" anchor="ctr"/>
+          <a:lstStyle/>
+          <a:p>
+            <a:pPr indent="0" marL="0">
+              <a:buNone/>
+            </a:pPr>
+            <a:r>
+              <a:rPr lang="en-US" sz="1200" dirty="0">
+                <a:solidFill>
+                  <a:srgbClr val="0A0A0A"/>
+                </a:solidFill>
+                <a:latin typeface="Calibri" pitchFamily="34" charset="0"/>
+                <a:ea typeface="Calibri" pitchFamily="34" charset="-122"/>
+                <a:cs typeface="Calibri" pitchFamily="34" charset="-120"/>
+              </a:rPr>
+              <a:t>Nouvelles références indé, jamais commercialisées</a:t>
+            </a:r>
+            <a:endParaRPr lang="en-US" sz="1200" dirty="0"/>
+          </a:p>
+        </p:txBody>
+      </p:sp>
+      <p:sp>
+        <p:nvSpPr>
+          <p:cNvPr id="9" name="Text 7"/>
+          <p:cNvSpPr/>
+          <p:nvPr/>
+        </p:nvSpPr>
+        <p:spPr>
+          <a:xfrm>
+            <a:off x="457200" y="3355848"/>
+            <a:ext cx="4023360" cy="365760"/>
+          </a:xfrm>
+          <a:prstGeom prst="rect">
+            <a:avLst/>
+          </a:prstGeom>
+          <a:noFill/>
+          <a:ln/>
+        </p:spPr>
+        <p:txBody>
+          <a:bodyPr wrap="square" lIns="0" tIns="0" rIns="0" bIns="0" rtlCol="0" anchor="ctr"/>
+          <a:lstStyle/>
+          <a:p>
+            <a:pPr indent="0" marL="0">
+              <a:buNone/>
+            </a:pPr>
+            <a:r>
+              <a:rPr lang="en-US" sz="1200" dirty="0">
+                <a:solidFill>
+                  <a:srgbClr val="0A0A0A"/>
+                </a:solidFill>
+                <a:latin typeface="Calibri" pitchFamily="34" charset="0"/>
+                <a:ea typeface="Calibri" pitchFamily="34" charset="-122"/>
+                <a:cs typeface="Calibri" pitchFamily="34" charset="-120"/>
+              </a:rPr>
+              <a:t>Prototypes prêts à industrialiser, à valider en demande</a:t>
+            </a:r>
+            <a:endParaRPr lang="en-US" sz="1200" dirty="0"/>
+          </a:p>
+        </p:txBody>
+      </p:sp>
+      <p:sp>
+        <p:nvSpPr>
+          <p:cNvPr id="10" name="Text 8"/>
+          <p:cNvSpPr/>
+          <p:nvPr/>
+        </p:nvSpPr>
+        <p:spPr>
+          <a:xfrm>
+            <a:off x="457200" y="3739896"/>
+            <a:ext cx="4023360" cy="365760"/>
+          </a:xfrm>
+          <a:prstGeom prst="rect">
+            <a:avLst/>
+          </a:prstGeom>
+          <a:noFill/>
+          <a:ln/>
+        </p:spPr>
+        <p:txBody>
+          <a:bodyPr wrap="square" lIns="0" tIns="0" rIns="0" bIns="0" rtlCol="0" anchor="ctr"/>
+          <a:lstStyle/>
+          <a:p>
+            <a:pPr indent="0" marL="0">
+              <a:buNone/>
+            </a:pPr>
+            <a:r>
+              <a:rPr lang="en-US" sz="1200" dirty="0">
+                <a:solidFill>
+                  <a:srgbClr val="0A0A0A"/>
+                </a:solidFill>
+                <a:latin typeface="Calibri" pitchFamily="34" charset="0"/>
+                <a:ea typeface="Calibri" pitchFamily="34" charset="-122"/>
+                <a:cs typeface="Calibri" pitchFamily="34" charset="-120"/>
+              </a:rPr>
+              <a:t>Éditions anniversaire, capsules, collaborations</a:t>
+            </a:r>
+            <a:endParaRPr lang="en-US" sz="1200" dirty="0"/>
+          </a:p>
+        </p:txBody>
+      </p:sp>
+      <p:sp>
+        <p:nvSpPr>
+          <p:cNvPr id="11" name="Text 9"/>
+          <p:cNvSpPr/>
+          <p:nvPr/>
+        </p:nvSpPr>
+        <p:spPr>
+          <a:xfrm>
+            <a:off x="457200" y="4123944"/>
+            <a:ext cx="4023360" cy="365760"/>
+          </a:xfrm>
+          <a:prstGeom prst="rect">
+            <a:avLst/>
+          </a:prstGeom>
+          <a:noFill/>
+          <a:ln/>
+        </p:spPr>
+        <p:txBody>
+          <a:bodyPr wrap="square" lIns="0" tIns="0" rIns="0" bIns="0" rtlCol="0" anchor="ctr"/>
+          <a:lstStyle/>
+          <a:p>
+            <a:pPr indent="0" marL="0">
+              <a:buNone/>
+            </a:pPr>
+            <a:r>
+              <a:rPr lang="en-US" sz="1200" dirty="0">
+                <a:solidFill>
+                  <a:srgbClr val="0A0A0A"/>
+                </a:solidFill>
+                <a:latin typeface="Calibri" pitchFamily="34" charset="0"/>
+                <a:ea typeface="Calibri" pitchFamily="34" charset="-122"/>
+                <a:cs typeface="Calibri" pitchFamily="34" charset="-120"/>
+              </a:rPr>
+              <a:t>Productions ≤ 50 pièces, prix unitaire ≥ 3 000 €</a:t>
+            </a:r>
+            <a:endParaRPr lang="en-US" sz="1200" dirty="0"/>
+          </a:p>
+        </p:txBody>
+      </p:sp>
+      <p:sp>
+        <p:nvSpPr>
+          <p:cNvPr id="12" name="Text 10"/>
+          <p:cNvSpPr/>
+          <p:nvPr/>
+        </p:nvSpPr>
+        <p:spPr>
+          <a:xfrm>
+            <a:off x="4663440" y="2468880"/>
+            <a:ext cx="4023360" cy="274320"/>
+          </a:xfrm>
+          <a:prstGeom prst="rect">
+            <a:avLst/>
+          </a:prstGeom>
+          <a:noFill/>
+          <a:ln/>
+        </p:spPr>
+        <p:txBody>
+          <a:bodyPr wrap="square" lIns="0" tIns="0" rIns="0" bIns="0" rtlCol="0" anchor="ctr"/>
+          <a:lstStyle/>
+          <a:p>
+            <a:pPr indent="0" marL="0">
+              <a:buNone/>
+            </a:pPr>
+            <a:r>
+              <a:rPr lang="en-US" sz="1000" b="1" spc="300" kern="0" dirty="0">
+                <a:solidFill>
+                  <a:srgbClr val="6B6B6B"/>
+                </a:solidFill>
+                <a:latin typeface="Calibri" pitchFamily="34" charset="0"/>
+                <a:ea typeface="Calibri" pitchFamily="34" charset="-122"/>
+                <a:cs typeface="Calibri" pitchFamily="34" charset="-120"/>
+              </a:rPr>
+              <a:t>HORS SCOPE</a:t>
+            </a:r>
+            <a:endParaRPr lang="en-US" sz="1000" dirty="0"/>
+          </a:p>
+        </p:txBody>
+      </p:sp>
+      <p:sp>
+        <p:nvSpPr>
+          <p:cNvPr id="13" name="Shape 11"/>
+          <p:cNvSpPr/>
+          <p:nvPr/>
+        </p:nvSpPr>
+        <p:spPr>
+          <a:xfrm>
+            <a:off x="4663440" y="2788920"/>
+            <a:ext cx="4023360" cy="0"/>
+          </a:xfrm>
+          <a:prstGeom prst="line">
+            <a:avLst/>
+          </a:prstGeom>
+          <a:noFill/>
+          <a:ln w="9525">
+            <a:solidFill>
+              <a:srgbClr val="6B6B6B"/>
+            </a:solidFill>
+            <a:prstDash val="solid"/>
+          </a:ln>
+        </p:spPr>
+      </p:sp>
+      <p:sp>
+        <p:nvSpPr>
+          <p:cNvPr id="14" name="Text 12"/>
+          <p:cNvSpPr/>
+          <p:nvPr/>
+        </p:nvSpPr>
+        <p:spPr>
+          <a:xfrm>
+            <a:off x="4663440" y="2971800"/>
+            <a:ext cx="4023360" cy="365760"/>
+          </a:xfrm>
+          <a:prstGeom prst="rect">
+            <a:avLst/>
+          </a:prstGeom>
+          <a:noFill/>
+          <a:ln/>
+        </p:spPr>
+        <p:txBody>
+          <a:bodyPr wrap="square" lIns="0" tIns="0" rIns="0" bIns="0" rtlCol="0" anchor="ctr"/>
+          <a:lstStyle/>
+          <a:p>
+            <a:pPr indent="0" marL="0">
+              <a:buNone/>
+            </a:pPr>
+            <a:r>
+              <a:rPr lang="en-US" sz="1200" dirty="0">
+                <a:solidFill>
+                  <a:srgbClr val="0A0A0A"/>
+                </a:solidFill>
+                <a:latin typeface="Calibri" pitchFamily="34" charset="0"/>
+                <a:ea typeface="Calibri" pitchFamily="34" charset="-122"/>
+                <a:cs typeface="Calibri" pitchFamily="34" charset="-120"/>
+              </a:rPr>
+              <a:t>Catalogue récurrent à prix déjà établi</a:t>
+            </a:r>
+            <a:endParaRPr lang="en-US" sz="1200" dirty="0"/>
+          </a:p>
+        </p:txBody>
+      </p:sp>
+      <p:sp>
+        <p:nvSpPr>
+          <p:cNvPr id="15" name="Text 13"/>
+          <p:cNvSpPr/>
+          <p:nvPr/>
+        </p:nvSpPr>
+        <p:spPr>
+          <a:xfrm>
+            <a:off x="4663440" y="3355848"/>
+            <a:ext cx="4023360" cy="365760"/>
+          </a:xfrm>
+          <a:prstGeom prst="rect">
+            <a:avLst/>
+          </a:prstGeom>
+          <a:noFill/>
+          <a:ln/>
+        </p:spPr>
+        <p:txBody>
+          <a:bodyPr wrap="square" lIns="0" tIns="0" rIns="0" bIns="0" rtlCol="0" anchor="ctr"/>
+          <a:lstStyle/>
+          <a:p>
+            <a:pPr indent="0" marL="0">
+              <a:buNone/>
+            </a:pPr>
+            <a:r>
+              <a:rPr lang="en-US" sz="1200" dirty="0">
+                <a:solidFill>
+                  <a:srgbClr val="0A0A0A"/>
+                </a:solidFill>
+                <a:latin typeface="Calibri" pitchFamily="34" charset="0"/>
+                <a:ea typeface="Calibri" pitchFamily="34" charset="-122"/>
+                <a:cs typeface="Calibri" pitchFamily="34" charset="-120"/>
+              </a:rPr>
+              <a:t>Pièces sous 3 000 € (économie de la livraison tendue)</a:t>
+            </a:r>
+            <a:endParaRPr lang="en-US" sz="1200" dirty="0"/>
+          </a:p>
+        </p:txBody>
+      </p:sp>
+      <p:sp>
+        <p:nvSpPr>
+          <p:cNvPr id="16" name="Text 14"/>
+          <p:cNvSpPr/>
+          <p:nvPr/>
+        </p:nvSpPr>
+        <p:spPr>
+          <a:xfrm>
+            <a:off x="4663440" y="3739896"/>
+            <a:ext cx="4023360" cy="365760"/>
+          </a:xfrm>
+          <a:prstGeom prst="rect">
+            <a:avLst/>
+          </a:prstGeom>
+          <a:noFill/>
+          <a:ln/>
+        </p:spPr>
+        <p:txBody>
+          <a:bodyPr wrap="square" lIns="0" tIns="0" rIns="0" bIns="0" rtlCol="0" anchor="ctr"/>
+          <a:lstStyle/>
+          <a:p>
+            <a:pPr indent="0" marL="0">
+              <a:buNone/>
+            </a:pPr>
+            <a:r>
+              <a:rPr lang="en-US" sz="1200" dirty="0">
+                <a:solidFill>
+                  <a:srgbClr val="0A0A0A"/>
+                </a:solidFill>
+                <a:latin typeface="Calibri" pitchFamily="34" charset="0"/>
+                <a:ea typeface="Calibri" pitchFamily="34" charset="-122"/>
+                <a:cs typeface="Calibri" pitchFamily="34" charset="-120"/>
+              </a:rPr>
+              <a:t>Marché secondaire de revente (brand-direct only)</a:t>
+            </a:r>
+            <a:endParaRPr lang="en-US" sz="1200" dirty="0"/>
+          </a:p>
+        </p:txBody>
+      </p:sp>
+      <p:sp>
+        <p:nvSpPr>
+          <p:cNvPr id="17" name="Text 15"/>
+          <p:cNvSpPr/>
+          <p:nvPr/>
+        </p:nvSpPr>
+        <p:spPr>
+          <a:xfrm>
+            <a:off x="4663440" y="4123944"/>
+            <a:ext cx="4023360" cy="365760"/>
+          </a:xfrm>
+          <a:prstGeom prst="rect">
+            <a:avLst/>
+          </a:prstGeom>
+          <a:noFill/>
+          <a:ln/>
+        </p:spPr>
+        <p:txBody>
+          <a:bodyPr wrap="square" lIns="0" tIns="0" rIns="0" bIns="0" rtlCol="0" anchor="ctr"/>
+          <a:lstStyle/>
+          <a:p>
+            <a:pPr indent="0" marL="0">
+              <a:buNone/>
+            </a:pPr>
+            <a:r>
+              <a:rPr lang="en-US" sz="1200" dirty="0">
+                <a:solidFill>
+                  <a:srgbClr val="0A0A0A"/>
+                </a:solidFill>
+                <a:latin typeface="Calibri" pitchFamily="34" charset="0"/>
+                <a:ea typeface="Calibri" pitchFamily="34" charset="-122"/>
+                <a:cs typeface="Calibri" pitchFamily="34" charset="-120"/>
+              </a:rPr>
+              <a:t>Catégories non-horlogères (bijoux et art en v2)</a:t>
+            </a:r>
+            <a:endParaRPr lang="en-US" sz="1200" dirty="0"/>
+          </a:p>
+        </p:txBody>
+      </p:sp>
+      <p:sp>
+        <p:nvSpPr>
+          <p:cNvPr id="18" name="Text 16"/>
+          <p:cNvSpPr/>
+          <p:nvPr/>
+        </p:nvSpPr>
+        <p:spPr>
+          <a:xfrm>
+            <a:off x="457200" y="4800600"/>
+            <a:ext cx="1371600" cy="274320"/>
+          </a:xfrm>
+          <a:prstGeom prst="rect">
+            <a:avLst/>
+          </a:prstGeom>
+          <a:noFill/>
+          <a:ln/>
+        </p:spPr>
+        <p:txBody>
+          <a:bodyPr wrap="square" lIns="0" tIns="0" rIns="0" bIns="0" rtlCol="0" anchor="ctr"/>
+          <a:lstStyle/>
+          <a:p>
+            <a:pPr indent="0" marL="0">
+              <a:buNone/>
+            </a:pPr>
+            <a:r>
+              <a:rPr lang="en-US" sz="1100" i="1" dirty="0">
+                <a:solidFill>
+                  <a:srgbClr val="0A0A0A"/>
+                </a:solidFill>
+                <a:latin typeface="Georgia" pitchFamily="34" charset="0"/>
+                <a:ea typeface="Georgia" pitchFamily="34" charset="-122"/>
+                <a:cs typeface="Georgia" pitchFamily="34" charset="-120"/>
+              </a:rPr>
+              <a:t>Drop №</a:t>
+            </a:r>
+            <a:endParaRPr lang="en-US" sz="1100" dirty="0"/>
+          </a:p>
+        </p:txBody>
+      </p:sp>
+      <p:sp>
+        <p:nvSpPr>
+          <p:cNvPr id="19" name="Text 17"/>
+          <p:cNvSpPr/>
+          <p:nvPr/>
+        </p:nvSpPr>
+        <p:spPr>
+          <a:xfrm>
+            <a:off x="8321040" y="4800600"/>
+            <a:ext cx="731520" cy="228600"/>
+          </a:xfrm>
+          <a:prstGeom prst="rect">
+            <a:avLst/>
+          </a:prstGeom>
+          <a:noFill/>
+          <a:ln/>
+        </p:spPr>
+        <p:txBody>
+          <a:bodyPr wrap="square" lIns="0" tIns="0" rIns="0" bIns="0" rtlCol="0" anchor="ctr"/>
+          <a:lstStyle/>
+          <a:p>
+            <a:pPr algn="r" indent="0" marL="0">
+              <a:buNone/>
+            </a:pPr>
+            <a:r>
+              <a:rPr lang="en-US" sz="900" i="1" dirty="0">
+                <a:solidFill>
+                  <a:srgbClr val="6B6B6B"/>
+                </a:solidFill>
+                <a:latin typeface="Georgia" pitchFamily="34" charset="0"/>
+                <a:ea typeface="Georgia" pitchFamily="34" charset="-122"/>
+                <a:cs typeface="Georgia" pitchFamily="34" charset="-120"/>
+              </a:rPr>
+              <a:t>№ 11 / 12</a:t>
+            </a:r>
+            <a:endParaRPr lang="en-US" sz="900" dirty="0"/>
+          </a:p>
+        </p:txBody>
+      </p:sp>
+    </p:spTree>
+  </p:cSld>
+  <p:clrMapOvr>
+    <a:masterClrMapping/>
+  </p:clrMapOvr>
+</p:sld>
+</file>
+
+<file path=ppt/slides/slide12.xml><?xml version="1.0" encoding="utf-8"?>
+<p:sld xmlns:a="http://schemas.openxmlformats.org/drawingml/2006/main" xmlns:r="http://schemas.openxmlformats.org/officeDocument/2006/relationships" xmlns:p="http://schemas.openxmlformats.org/presentationml/2006/main">
+  <p:cSld name="Slide 12">
     <p:bg>
       <p:bgPr>
         <a:solidFill>
@@ -2194,7 +3604,32 @@
       </p:sp>
       <p:sp>
         <p:nvSpPr>
-          <p:cNvPr id="10" name="Text 8"/>
+          <p:cNvPr id="10" name="Shape 8"/>
+          <p:cNvSpPr/>
+          <p:nvPr/>
+        </p:nvSpPr>
+        <p:spPr>
+          <a:xfrm>
+            <a:off x="8549640" y="502920"/>
+            <a:ext cx="73152" cy="73152"/>
+          </a:xfrm>
+          <a:prstGeom prst="ellipse">
+            <a:avLst/>
+          </a:prstGeom>
+          <a:solidFill>
+            <a:srgbClr val="C9A96E"/>
+          </a:solidFill>
+          <a:ln w="12700">
+            <a:solidFill>
+              <a:srgbClr val="C9A96E"/>
+            </a:solidFill>
+            <a:prstDash val="solid"/>
+          </a:ln>
+        </p:spPr>
+      </p:sp>
+      <p:sp>
+        <p:nvSpPr>
+          <p:cNvPr id="11" name="Text 9"/>
           <p:cNvSpPr/>
           <p:nvPr/>
         </p:nvSpPr>
@@ -2272,7 +3707,7 @@
         <p:spPr>
           <a:xfrm>
             <a:off x="457200" y="457200"/>
-            <a:ext cx="5486400" cy="228600"/>
+            <a:ext cx="6400800" cy="228600"/>
           </a:xfrm>
           <a:prstGeom prst="rect">
             <a:avLst/>
@@ -2888,7 +4323,7 @@
                 <a:ea typeface="Georgia" pitchFamily="34" charset="-122"/>
                 <a:cs typeface="Georgia" pitchFamily="34" charset="-120"/>
               </a:rPr>
-              <a:t>№ 02 / 10</a:t>
+              <a:t>№ 02 / 12</a:t>
             </a:r>
             <a:endParaRPr lang="en-US" sz="900" dirty="0"/>
           </a:p>
@@ -2935,7 +4370,7 @@
         <p:spPr>
           <a:xfrm>
             <a:off x="457200" y="457200"/>
-            <a:ext cx="5486400" cy="228600"/>
+            <a:ext cx="6400800" cy="228600"/>
           </a:xfrm>
           <a:prstGeom prst="rect">
             <a:avLst/>
@@ -3629,7 +5064,7 @@
                 <a:ea typeface="Georgia" pitchFamily="34" charset="-122"/>
                 <a:cs typeface="Georgia" pitchFamily="34" charset="-120"/>
               </a:rPr>
-              <a:t>№ 03 / 10</a:t>
+              <a:t>№ 03 / 12</a:t>
             </a:r>
             <a:endParaRPr lang="en-US" sz="900" dirty="0"/>
           </a:p>
@@ -3676,7 +5111,7 @@
         <p:spPr>
           <a:xfrm>
             <a:off x="457200" y="457200"/>
-            <a:ext cx="5486400" cy="228600"/>
+            <a:ext cx="6400800" cy="228600"/>
           </a:xfrm>
           <a:prstGeom prst="rect">
             <a:avLst/>
@@ -3700,7 +5135,7 @@
                 <a:ea typeface="Calibri" pitchFamily="34" charset="-122"/>
                 <a:cs typeface="Calibri" pitchFamily="34" charset="-120"/>
               </a:rPr>
-              <a:t>CE QUE VOUS APPRENEZ</a:t>
+              <a:t>VOTRE PARCOURS</a:t>
             </a:r>
             <a:endParaRPr lang="en-US" sz="900" dirty="0"/>
           </a:p>
@@ -3738,7 +5173,7 @@
         <p:spPr>
           <a:xfrm>
             <a:off x="457200" y="1005840"/>
-            <a:ext cx="8229600" cy="548640"/>
+            <a:ext cx="8229600" cy="502920"/>
           </a:xfrm>
           <a:prstGeom prst="rect">
             <a:avLst/>
@@ -3762,7 +5197,7 @@
                 <a:ea typeface="Georgia" pitchFamily="34" charset="-122"/>
                 <a:cs typeface="Georgia" pitchFamily="34" charset="-120"/>
               </a:rPr>
-              <a:t>Trois données qu’aucune étude ne vous donnera.</a:t>
+              <a:t>Du premier appel au paiement, sept étapes.</a:t>
             </a:r>
             <a:endParaRPr lang="en-US" sz="2600" dirty="0"/>
           </a:p>
@@ -3776,110 +5211,32 @@
         </p:nvSpPr>
         <p:spPr>
           <a:xfrm>
-            <a:off x="457200" y="1920240"/>
-            <a:ext cx="731520" cy="868680"/>
-          </a:xfrm>
-          <a:prstGeom prst="rect">
-            <a:avLst/>
-          </a:prstGeom>
-          <a:noFill/>
-          <a:ln/>
-        </p:spPr>
-        <p:txBody>
-          <a:bodyPr wrap="square" lIns="0" tIns="0" rIns="0" bIns="0" rtlCol="0" anchor="ctr"/>
-          <a:lstStyle/>
-          <a:p>
-            <a:pPr indent="0" marL="0">
-              <a:buNone/>
-            </a:pPr>
-            <a:r>
-              <a:rPr lang="en-US" sz="3200" i="1" dirty="0">
-                <a:solidFill>
-                  <a:srgbClr val="C9A96E"/>
-                </a:solidFill>
-                <a:latin typeface="Georgia" pitchFamily="34" charset="0"/>
-                <a:ea typeface="Georgia" pitchFamily="34" charset="-122"/>
-                <a:cs typeface="Georgia" pitchFamily="34" charset="-120"/>
-              </a:rPr>
-              <a:t>01</a:t>
-            </a:r>
-            <a:endParaRPr lang="en-US" sz="3200" dirty="0"/>
-          </a:p>
-        </p:txBody>
-      </p:sp>
-      <p:sp>
-        <p:nvSpPr>
-          <p:cNvPr id="6" name="Text 4"/>
-          <p:cNvSpPr/>
-          <p:nvPr/>
-        </p:nvSpPr>
-        <p:spPr>
-          <a:xfrm>
-            <a:off x="1280160" y="1993392"/>
-            <a:ext cx="7406640" cy="320040"/>
-          </a:xfrm>
-          <a:prstGeom prst="rect">
-            <a:avLst/>
-          </a:prstGeom>
-          <a:noFill/>
-          <a:ln/>
-        </p:spPr>
-        <p:txBody>
-          <a:bodyPr wrap="square" lIns="0" tIns="0" rIns="0" bIns="0" rtlCol="0" anchor="ctr"/>
-          <a:lstStyle/>
-          <a:p>
-            <a:pPr indent="0" marL="0">
-              <a:buNone/>
-            </a:pPr>
-            <a:r>
-              <a:rPr lang="en-US" sz="1300" b="1" spc="200" kern="0" dirty="0">
-                <a:solidFill>
-                  <a:srgbClr val="0A0A0A"/>
+            <a:off x="457200" y="1554480"/>
+            <a:ext cx="8229600" cy="274320"/>
+          </a:xfrm>
+          <a:prstGeom prst="rect">
+            <a:avLst/>
+          </a:prstGeom>
+          <a:noFill/>
+          <a:ln/>
+        </p:spPr>
+        <p:txBody>
+          <a:bodyPr wrap="square" lIns="0" tIns="0" rIns="0" bIns="0" rtlCol="0" anchor="ctr"/>
+          <a:lstStyle/>
+          <a:p>
+            <a:pPr indent="0" marL="0">
+              <a:buNone/>
+            </a:pPr>
+            <a:r>
+              <a:rPr lang="en-US" sz="1100" i="1" dirty="0">
+                <a:solidFill>
+                  <a:srgbClr val="6B6B6B"/>
                 </a:solidFill>
                 <a:latin typeface="Calibri" pitchFamily="34" charset="0"/>
                 <a:ea typeface="Calibri" pitchFamily="34" charset="-122"/>
                 <a:cs typeface="Calibri" pitchFamily="34" charset="-120"/>
               </a:rPr>
-              <a:t>Le prix de marché vrai</a:t>
-            </a:r>
-            <a:endParaRPr lang="en-US" sz="1300" dirty="0"/>
-          </a:p>
-        </p:txBody>
-      </p:sp>
-      <p:sp>
-        <p:nvSpPr>
-          <p:cNvPr id="7" name="Text 5"/>
-          <p:cNvSpPr/>
-          <p:nvPr/>
-        </p:nvSpPr>
-        <p:spPr>
-          <a:xfrm>
-            <a:off x="1280160" y="2304288"/>
-            <a:ext cx="7406640" cy="457200"/>
-          </a:xfrm>
-          <a:prstGeom prst="rect">
-            <a:avLst/>
-          </a:prstGeom>
-          <a:noFill/>
-          <a:ln/>
-        </p:spPr>
-        <p:txBody>
-          <a:bodyPr wrap="square" lIns="0" tIns="0" rIns="0" bIns="0" rtlCol="0" anchor="ctr"/>
-          <a:lstStyle/>
-          <a:p>
-            <a:pPr indent="0" marL="0">
-              <a:buNone/>
-            </a:pPr>
-            <a:r>
-              <a:rPr lang="en-US" sz="1100" dirty="0">
-                <a:solidFill>
-                  <a:srgbClr val="6B6B6B"/>
-                </a:solidFill>
-                <a:latin typeface="Calibri" pitchFamily="34" charset="0"/>
-                <a:ea typeface="Calibri" pitchFamily="34" charset="-122"/>
-                <a:cs typeface="Calibri" pitchFamily="34" charset="-120"/>
-              </a:rPr>
-              <a:t>Ce que les N collectionneurs les plus motivés sont prêts à payer aujourd’hui. Pas une moyenne, pas un sondage. Un chiffre.</a:t>
+              <a:t>Quatre semaines pour préparer, cinq jours pour vendre, deux semaines pour encaisser.</a:t>
             </a:r>
             <a:endParaRPr lang="en-US" sz="1100" dirty="0"/>
           </a:p>
@@ -3887,20 +5244,20 @@
       </p:sp>
       <p:sp>
         <p:nvSpPr>
-          <p:cNvPr id="8" name="Shape 6"/>
-          <p:cNvSpPr/>
-          <p:nvPr/>
-        </p:nvSpPr>
-        <p:spPr>
-          <a:xfrm>
-            <a:off x="457200" y="2743200"/>
-            <a:ext cx="8229600" cy="0"/>
+          <p:cNvPr id="6" name="Shape 4"/>
+          <p:cNvSpPr/>
+          <p:nvPr/>
+        </p:nvSpPr>
+        <p:spPr>
+          <a:xfrm>
+            <a:off x="1045029" y="3017520"/>
+            <a:ext cx="7053943" cy="0"/>
           </a:xfrm>
           <a:prstGeom prst="line">
             <a:avLst/>
           </a:prstGeom>
           <a:noFill/>
-          <a:ln w="9525">
+          <a:ln w="12700">
             <a:solidFill>
               <a:srgbClr val="D6D2C7"/>
             </a:solidFill>
@@ -3910,69 +5267,94 @@
       </p:sp>
       <p:sp>
         <p:nvSpPr>
-          <p:cNvPr id="9" name="Text 7"/>
-          <p:cNvSpPr/>
-          <p:nvPr/>
-        </p:nvSpPr>
-        <p:spPr>
-          <a:xfrm>
-            <a:off x="457200" y="2788920"/>
-            <a:ext cx="731520" cy="868680"/>
-          </a:xfrm>
-          <a:prstGeom prst="rect">
-            <a:avLst/>
-          </a:prstGeom>
-          <a:noFill/>
-          <a:ln/>
-        </p:spPr>
-        <p:txBody>
-          <a:bodyPr wrap="square" lIns="0" tIns="0" rIns="0" bIns="0" rtlCol="0" anchor="ctr"/>
-          <a:lstStyle/>
-          <a:p>
-            <a:pPr indent="0" marL="0">
-              <a:buNone/>
-            </a:pPr>
-            <a:r>
-              <a:rPr lang="en-US" sz="3200" i="1" dirty="0">
-                <a:solidFill>
-                  <a:srgbClr val="C9A96E"/>
+          <p:cNvPr id="7" name="Shape 5"/>
+          <p:cNvSpPr/>
+          <p:nvPr/>
+        </p:nvSpPr>
+        <p:spPr>
+          <a:xfrm>
+            <a:off x="981021" y="2953512"/>
+            <a:ext cx="128016" cy="128016"/>
+          </a:xfrm>
+          <a:prstGeom prst="ellipse">
+            <a:avLst/>
+          </a:prstGeom>
+          <a:solidFill>
+            <a:srgbClr val="C9A96E"/>
+          </a:solidFill>
+          <a:ln w="12700">
+            <a:solidFill>
+              <a:srgbClr val="C9A96E"/>
+            </a:solidFill>
+            <a:prstDash val="solid"/>
+          </a:ln>
+        </p:spPr>
+      </p:sp>
+      <p:sp>
+        <p:nvSpPr>
+          <p:cNvPr id="8" name="Text 6"/>
+          <p:cNvSpPr/>
+          <p:nvPr/>
+        </p:nvSpPr>
+        <p:spPr>
+          <a:xfrm>
+            <a:off x="457200" y="2240280"/>
+            <a:ext cx="1175657" cy="320040"/>
+          </a:xfrm>
+          <a:prstGeom prst="rect">
+            <a:avLst/>
+          </a:prstGeom>
+          <a:noFill/>
+          <a:ln/>
+        </p:spPr>
+        <p:txBody>
+          <a:bodyPr wrap="square" lIns="0" tIns="0" rIns="0" bIns="0" rtlCol="0" anchor="ctr"/>
+          <a:lstStyle/>
+          <a:p>
+            <a:pPr algn="ctr" indent="0" marL="0">
+              <a:buNone/>
+            </a:pPr>
+            <a:r>
+              <a:rPr lang="en-US" sz="1300" i="1" dirty="0">
+                <a:solidFill>
+                  <a:srgbClr val="6B6B6B"/>
                 </a:solidFill>
                 <a:latin typeface="Georgia" pitchFamily="34" charset="0"/>
                 <a:ea typeface="Georgia" pitchFamily="34" charset="-122"/>
                 <a:cs typeface="Georgia" pitchFamily="34" charset="-120"/>
               </a:rPr>
-              <a:t>02</a:t>
-            </a:r>
-            <a:endParaRPr lang="en-US" sz="3200" dirty="0"/>
-          </a:p>
-        </p:txBody>
-      </p:sp>
-      <p:sp>
-        <p:nvSpPr>
-          <p:cNvPr id="10" name="Text 8"/>
-          <p:cNvSpPr/>
-          <p:nvPr/>
-        </p:nvSpPr>
-        <p:spPr>
-          <a:xfrm>
-            <a:off x="1280160" y="2862072"/>
-            <a:ext cx="7406640" cy="320040"/>
-          </a:xfrm>
-          <a:prstGeom prst="rect">
-            <a:avLst/>
-          </a:prstGeom>
-          <a:noFill/>
-          <a:ln/>
-        </p:spPr>
-        <p:txBody>
-          <a:bodyPr wrap="square" lIns="0" tIns="0" rIns="0" bIns="0" rtlCol="0" anchor="ctr"/>
-          <a:lstStyle/>
-          <a:p>
-            <a:pPr indent="0" marL="0">
-              <a:buNone/>
-            </a:pPr>
-            <a:r>
-              <a:rPr lang="en-US" sz="1300" b="1" spc="200" kern="0" dirty="0">
+              <a:t>J - 30</a:t>
+            </a:r>
+            <a:endParaRPr lang="en-US" sz="1300" dirty="0"/>
+          </a:p>
+        </p:txBody>
+      </p:sp>
+      <p:sp>
+        <p:nvSpPr>
+          <p:cNvPr id="9" name="Text 7"/>
+          <p:cNvSpPr/>
+          <p:nvPr/>
+        </p:nvSpPr>
+        <p:spPr>
+          <a:xfrm>
+            <a:off x="457200" y="3200400"/>
+            <a:ext cx="1175657" cy="365760"/>
+          </a:xfrm>
+          <a:prstGeom prst="rect">
+            <a:avLst/>
+          </a:prstGeom>
+          <a:noFill/>
+          <a:ln/>
+        </p:spPr>
+        <p:txBody>
+          <a:bodyPr wrap="square" lIns="0" tIns="0" rIns="0" bIns="0" rtlCol="0" anchor="ctr"/>
+          <a:lstStyle/>
+          <a:p>
+            <a:pPr algn="ctr" indent="0" marL="0">
+              <a:buNone/>
+            </a:pPr>
+            <a:r>
+              <a:rPr lang="en-US" sz="1100" b="1" dirty="0">
                 <a:solidFill>
                   <a:srgbClr val="0A0A0A"/>
                 </a:solidFill>
@@ -3980,38 +5362,38 @@
                 <a:ea typeface="Calibri" pitchFamily="34" charset="-122"/>
                 <a:cs typeface="Calibri" pitchFamily="34" charset="-120"/>
               </a:rPr>
-              <a:t>La profondeur de demande</a:t>
-            </a:r>
-            <a:endParaRPr lang="en-US" sz="1300" dirty="0"/>
-          </a:p>
-        </p:txBody>
-      </p:sp>
-      <p:sp>
-        <p:nvSpPr>
-          <p:cNvPr id="11" name="Text 9"/>
-          <p:cNvSpPr/>
-          <p:nvPr/>
-        </p:nvSpPr>
-        <p:spPr>
-          <a:xfrm>
-            <a:off x="1280160" y="3172968"/>
-            <a:ext cx="7406640" cy="457200"/>
-          </a:xfrm>
-          <a:prstGeom prst="rect">
-            <a:avLst/>
-          </a:prstGeom>
-          <a:noFill/>
-          <a:ln/>
-        </p:spPr>
-        <p:txBody>
-          <a:bodyPr wrap="square" lIns="0" tIns="0" rIns="0" bIns="0" rtlCol="0" anchor="ctr"/>
-          <a:lstStyle/>
-          <a:p>
-            <a:pPr indent="0" marL="0">
-              <a:buNone/>
-            </a:pPr>
-            <a:r>
-              <a:rPr lang="en-US" sz="1100" dirty="0">
+              <a:t>Brief</a:t>
+            </a:r>
+            <a:endParaRPr lang="en-US" sz="1100" dirty="0"/>
+          </a:p>
+        </p:txBody>
+      </p:sp>
+      <p:sp>
+        <p:nvSpPr>
+          <p:cNvPr id="10" name="Text 8"/>
+          <p:cNvSpPr/>
+          <p:nvPr/>
+        </p:nvSpPr>
+        <p:spPr>
+          <a:xfrm>
+            <a:off x="457200" y="3611880"/>
+            <a:ext cx="1175657" cy="822960"/>
+          </a:xfrm>
+          <a:prstGeom prst="rect">
+            <a:avLst/>
+          </a:prstGeom>
+          <a:noFill/>
+          <a:ln/>
+        </p:spPr>
+        <p:txBody>
+          <a:bodyPr wrap="square" lIns="0" tIns="0" rIns="0" bIns="0" rtlCol="0" anchor="t"/>
+          <a:lstStyle/>
+          <a:p>
+            <a:pPr algn="ctr" indent="0" marL="0">
+              <a:buNone/>
+            </a:pPr>
+            <a:r>
+              <a:rPr lang="en-US" sz="900" dirty="0">
                 <a:solidFill>
                   <a:srgbClr val="6B6B6B"/>
                 </a:solidFill>
@@ -4019,30 +5401,32 @@
                 <a:ea typeface="Calibri" pitchFamily="34" charset="-122"/>
                 <a:cs typeface="Calibri" pitchFamily="34" charset="-120"/>
               </a:rPr>
-              <a:t>Combien d’offres reçues au total, leur distribution, l’écart entre la première et la N-ième. Indicateur direct pour les prochaines références.</a:t>
-            </a:r>
-            <a:endParaRPr lang="en-US" sz="1100" dirty="0"/>
-          </a:p>
-        </p:txBody>
-      </p:sp>
-      <p:sp>
-        <p:nvSpPr>
-          <p:cNvPr id="12" name="Shape 10"/>
-          <p:cNvSpPr/>
-          <p:nvPr/>
-        </p:nvSpPr>
-        <p:spPr>
-          <a:xfrm>
-            <a:off x="457200" y="3611880"/>
-            <a:ext cx="8229600" cy="0"/>
-          </a:xfrm>
-          <a:prstGeom prst="line">
-            <a:avLst/>
-          </a:prstGeom>
-          <a:noFill/>
-          <a:ln w="9525">
+              <a:t>Premier appel, exploration.</a:t>
+            </a:r>
+            <a:endParaRPr lang="en-US" sz="900" dirty="0"/>
+          </a:p>
+        </p:txBody>
+      </p:sp>
+      <p:sp>
+        <p:nvSpPr>
+          <p:cNvPr id="11" name="Shape 9"/>
+          <p:cNvSpPr/>
+          <p:nvPr/>
+        </p:nvSpPr>
+        <p:spPr>
+          <a:xfrm>
+            <a:off x="2156678" y="2953512"/>
+            <a:ext cx="128016" cy="128016"/>
+          </a:xfrm>
+          <a:prstGeom prst="ellipse">
+            <a:avLst/>
+          </a:prstGeom>
+          <a:solidFill>
+            <a:srgbClr val="C9A96E"/>
+          </a:solidFill>
+          <a:ln w="12700">
             <a:solidFill>
-              <a:srgbClr val="D6D2C7"/>
+              <a:srgbClr val="C9A96E"/>
             </a:solidFill>
             <a:prstDash val="solid"/>
           </a:ln>
@@ -4050,69 +5434,69 @@
       </p:sp>
       <p:sp>
         <p:nvSpPr>
-          <p:cNvPr id="13" name="Text 11"/>
-          <p:cNvSpPr/>
-          <p:nvPr/>
-        </p:nvSpPr>
-        <p:spPr>
-          <a:xfrm>
-            <a:off x="457200" y="3657600"/>
-            <a:ext cx="731520" cy="868680"/>
-          </a:xfrm>
-          <a:prstGeom prst="rect">
-            <a:avLst/>
-          </a:prstGeom>
-          <a:noFill/>
-          <a:ln/>
-        </p:spPr>
-        <p:txBody>
-          <a:bodyPr wrap="square" lIns="0" tIns="0" rIns="0" bIns="0" rtlCol="0" anchor="ctr"/>
-          <a:lstStyle/>
-          <a:p>
-            <a:pPr indent="0" marL="0">
-              <a:buNone/>
-            </a:pPr>
-            <a:r>
-              <a:rPr lang="en-US" sz="3200" i="1" dirty="0">
-                <a:solidFill>
-                  <a:srgbClr val="C9A96E"/>
+          <p:cNvPr id="12" name="Text 10"/>
+          <p:cNvSpPr/>
+          <p:nvPr/>
+        </p:nvSpPr>
+        <p:spPr>
+          <a:xfrm>
+            <a:off x="1632857" y="2240280"/>
+            <a:ext cx="1175657" cy="320040"/>
+          </a:xfrm>
+          <a:prstGeom prst="rect">
+            <a:avLst/>
+          </a:prstGeom>
+          <a:noFill/>
+          <a:ln/>
+        </p:spPr>
+        <p:txBody>
+          <a:bodyPr wrap="square" lIns="0" tIns="0" rIns="0" bIns="0" rtlCol="0" anchor="ctr"/>
+          <a:lstStyle/>
+          <a:p>
+            <a:pPr algn="ctr" indent="0" marL="0">
+              <a:buNone/>
+            </a:pPr>
+            <a:r>
+              <a:rPr lang="en-US" sz="1300" i="1" dirty="0">
+                <a:solidFill>
+                  <a:srgbClr val="6B6B6B"/>
                 </a:solidFill>
                 <a:latin typeface="Georgia" pitchFamily="34" charset="0"/>
                 <a:ea typeface="Georgia" pitchFamily="34" charset="-122"/>
                 <a:cs typeface="Georgia" pitchFamily="34" charset="-120"/>
               </a:rPr>
-              <a:t>03</a:t>
-            </a:r>
-            <a:endParaRPr lang="en-US" sz="3200" dirty="0"/>
-          </a:p>
-        </p:txBody>
-      </p:sp>
-      <p:sp>
-        <p:nvSpPr>
-          <p:cNvPr id="14" name="Text 12"/>
-          <p:cNvSpPr/>
-          <p:nvPr/>
-        </p:nvSpPr>
-        <p:spPr>
-          <a:xfrm>
-            <a:off x="1280160" y="3730752"/>
-            <a:ext cx="7406640" cy="320040"/>
-          </a:xfrm>
-          <a:prstGeom prst="rect">
-            <a:avLst/>
-          </a:prstGeom>
-          <a:noFill/>
-          <a:ln/>
-        </p:spPr>
-        <p:txBody>
-          <a:bodyPr wrap="square" lIns="0" tIns="0" rIns="0" bIns="0" rtlCol="0" anchor="ctr"/>
-          <a:lstStyle/>
-          <a:p>
-            <a:pPr indent="0" marL="0">
-              <a:buNone/>
-            </a:pPr>
-            <a:r>
-              <a:rPr lang="en-US" sz="1300" b="1" spc="200" kern="0" dirty="0">
+              <a:t>J - 21</a:t>
+            </a:r>
+            <a:endParaRPr lang="en-US" sz="1300" dirty="0"/>
+          </a:p>
+        </p:txBody>
+      </p:sp>
+      <p:sp>
+        <p:nvSpPr>
+          <p:cNvPr id="13" name="Text 11"/>
+          <p:cNvSpPr/>
+          <p:nvPr/>
+        </p:nvSpPr>
+        <p:spPr>
+          <a:xfrm>
+            <a:off x="1632857" y="3200400"/>
+            <a:ext cx="1175657" cy="365760"/>
+          </a:xfrm>
+          <a:prstGeom prst="rect">
+            <a:avLst/>
+          </a:prstGeom>
+          <a:noFill/>
+          <a:ln/>
+        </p:spPr>
+        <p:txBody>
+          <a:bodyPr wrap="square" lIns="0" tIns="0" rIns="0" bIns="0" rtlCol="0" anchor="ctr"/>
+          <a:lstStyle/>
+          <a:p>
+            <a:pPr algn="ctr" indent="0" marL="0">
+              <a:buNone/>
+            </a:pPr>
+            <a:r>
+              <a:rPr lang="en-US" sz="1100" b="1" dirty="0">
                 <a:solidFill>
                   <a:srgbClr val="0A0A0A"/>
                 </a:solidFill>
@@ -4120,38 +5504,38 @@
                 <a:ea typeface="Calibri" pitchFamily="34" charset="-122"/>
                 <a:cs typeface="Calibri" pitchFamily="34" charset="-120"/>
               </a:rPr>
-              <a:t>Le profil acheteur</a:t>
-            </a:r>
-            <a:endParaRPr lang="en-US" sz="1300" dirty="0"/>
-          </a:p>
-        </p:txBody>
-      </p:sp>
-      <p:sp>
-        <p:nvSpPr>
-          <p:cNvPr id="15" name="Text 13"/>
-          <p:cNvSpPr/>
-          <p:nvPr/>
-        </p:nvSpPr>
-        <p:spPr>
-          <a:xfrm>
-            <a:off x="1280160" y="4041648"/>
-            <a:ext cx="7406640" cy="457200"/>
-          </a:xfrm>
-          <a:prstGeom prst="rect">
-            <a:avLst/>
-          </a:prstGeom>
-          <a:noFill/>
-          <a:ln/>
-        </p:spPr>
-        <p:txBody>
-          <a:bodyPr wrap="square" lIns="0" tIns="0" rIns="0" bIns="0" rtlCol="0" anchor="ctr"/>
-          <a:lstStyle/>
-          <a:p>
-            <a:pPr indent="0" marL="0">
-              <a:buNone/>
-            </a:pPr>
-            <a:r>
-              <a:rPr lang="en-US" sz="1100" dirty="0">
+              <a:t>Contrat</a:t>
+            </a:r>
+            <a:endParaRPr lang="en-US" sz="1100" dirty="0"/>
+          </a:p>
+        </p:txBody>
+      </p:sp>
+      <p:sp>
+        <p:nvSpPr>
+          <p:cNvPr id="14" name="Text 12"/>
+          <p:cNvSpPr/>
+          <p:nvPr/>
+        </p:nvSpPr>
+        <p:spPr>
+          <a:xfrm>
+            <a:off x="1632857" y="3611880"/>
+            <a:ext cx="1175657" cy="822960"/>
+          </a:xfrm>
+          <a:prstGeom prst="rect">
+            <a:avLst/>
+          </a:prstGeom>
+          <a:noFill/>
+          <a:ln/>
+        </p:spPr>
+        <p:txBody>
+          <a:bodyPr wrap="square" lIns="0" tIns="0" rIns="0" bIns="0" rtlCol="0" anchor="t"/>
+          <a:lstStyle/>
+          <a:p>
+            <a:pPr algn="ctr" indent="0" marL="0">
+              <a:buNone/>
+            </a:pPr>
+            <a:r>
+              <a:rPr lang="en-US" sz="900" dirty="0">
                 <a:solidFill>
                   <a:srgbClr val="6B6B6B"/>
                 </a:solidFill>
@@ -4159,11 +5543,36 @@
                 <a:ea typeface="Calibri" pitchFamily="34" charset="-122"/>
                 <a:cs typeface="Calibri" pitchFamily="34" charset="-120"/>
               </a:rPr>
-              <a:t>Combien de collectionneurs ont KYC’d et bidé. Données enrichies (pays, segments, fidélité) sans coût d’acquisition pour vous.</a:t>
-            </a:r>
-            <a:endParaRPr lang="en-US" sz="1100" dirty="0"/>
-          </a:p>
-        </p:txBody>
+              <a:t>Onboarding, KYC entreprise.</a:t>
+            </a:r>
+            <a:endParaRPr lang="en-US" sz="900" dirty="0"/>
+          </a:p>
+        </p:txBody>
+      </p:sp>
+      <p:sp>
+        <p:nvSpPr>
+          <p:cNvPr id="15" name="Shape 13"/>
+          <p:cNvSpPr/>
+          <p:nvPr/>
+        </p:nvSpPr>
+        <p:spPr>
+          <a:xfrm>
+            <a:off x="3332335" y="2953512"/>
+            <a:ext cx="128016" cy="128016"/>
+          </a:xfrm>
+          <a:prstGeom prst="ellipse">
+            <a:avLst/>
+          </a:prstGeom>
+          <a:solidFill>
+            <a:srgbClr val="C9A96E"/>
+          </a:solidFill>
+          <a:ln w="12700">
+            <a:solidFill>
+              <a:srgbClr val="C9A96E"/>
+            </a:solidFill>
+            <a:prstDash val="solid"/>
+          </a:ln>
+        </p:spPr>
       </p:sp>
       <p:sp>
         <p:nvSpPr>
@@ -4173,32 +5582,71 @@
         </p:nvSpPr>
         <p:spPr>
           <a:xfrm>
-            <a:off x="457200" y="4800600"/>
-            <a:ext cx="1371600" cy="274320"/>
-          </a:xfrm>
-          <a:prstGeom prst="rect">
-            <a:avLst/>
-          </a:prstGeom>
-          <a:noFill/>
-          <a:ln/>
-        </p:spPr>
-        <p:txBody>
-          <a:bodyPr wrap="square" lIns="0" tIns="0" rIns="0" bIns="0" rtlCol="0" anchor="ctr"/>
-          <a:lstStyle/>
-          <a:p>
-            <a:pPr indent="0" marL="0">
-              <a:buNone/>
-            </a:pPr>
-            <a:r>
-              <a:rPr lang="en-US" sz="1100" i="1" dirty="0">
-                <a:solidFill>
-                  <a:srgbClr val="0A0A0A"/>
+            <a:off x="2808514" y="2240280"/>
+            <a:ext cx="1175657" cy="320040"/>
+          </a:xfrm>
+          <a:prstGeom prst="rect">
+            <a:avLst/>
+          </a:prstGeom>
+          <a:noFill/>
+          <a:ln/>
+        </p:spPr>
+        <p:txBody>
+          <a:bodyPr wrap="square" lIns="0" tIns="0" rIns="0" bIns="0" rtlCol="0" anchor="ctr"/>
+          <a:lstStyle/>
+          <a:p>
+            <a:pPr algn="ctr" indent="0" marL="0">
+              <a:buNone/>
+            </a:pPr>
+            <a:r>
+              <a:rPr lang="en-US" sz="1300" i="1" dirty="0">
+                <a:solidFill>
+                  <a:srgbClr val="6B6B6B"/>
                 </a:solidFill>
                 <a:latin typeface="Georgia" pitchFamily="34" charset="0"/>
                 <a:ea typeface="Georgia" pitchFamily="34" charset="-122"/>
                 <a:cs typeface="Georgia" pitchFamily="34" charset="-120"/>
               </a:rPr>
-              <a:t>Drop №</a:t>
+              <a:t>J - 14</a:t>
+            </a:r>
+            <a:endParaRPr lang="en-US" sz="1300" dirty="0"/>
+          </a:p>
+        </p:txBody>
+      </p:sp>
+      <p:sp>
+        <p:nvSpPr>
+          <p:cNvPr id="17" name="Text 15"/>
+          <p:cNvSpPr/>
+          <p:nvPr/>
+        </p:nvSpPr>
+        <p:spPr>
+          <a:xfrm>
+            <a:off x="2808514" y="3200400"/>
+            <a:ext cx="1175657" cy="365760"/>
+          </a:xfrm>
+          <a:prstGeom prst="rect">
+            <a:avLst/>
+          </a:prstGeom>
+          <a:noFill/>
+          <a:ln/>
+        </p:spPr>
+        <p:txBody>
+          <a:bodyPr wrap="square" lIns="0" tIns="0" rIns="0" bIns="0" rtlCol="0" anchor="ctr"/>
+          <a:lstStyle/>
+          <a:p>
+            <a:pPr algn="ctr" indent="0" marL="0">
+              <a:buNone/>
+            </a:pPr>
+            <a:r>
+              <a:rPr lang="en-US" sz="1100" b="1" dirty="0">
+                <a:solidFill>
+                  <a:srgbClr val="0A0A0A"/>
+                </a:solidFill>
+                <a:latin typeface="Calibri" pitchFamily="34" charset="0"/>
+                <a:ea typeface="Calibri" pitchFamily="34" charset="-122"/>
+                <a:cs typeface="Calibri" pitchFamily="34" charset="-120"/>
+              </a:rPr>
+              <a:t>Sélection</a:t>
             </a:r>
             <a:endParaRPr lang="en-US" sz="1100" dirty="0"/>
           </a:p>
@@ -4206,30 +5654,94 @@
       </p:sp>
       <p:sp>
         <p:nvSpPr>
-          <p:cNvPr id="17" name="Text 15"/>
-          <p:cNvSpPr/>
-          <p:nvPr/>
-        </p:nvSpPr>
-        <p:spPr>
-          <a:xfrm>
-            <a:off x="8321040" y="4800600"/>
-            <a:ext cx="731520" cy="228600"/>
-          </a:xfrm>
-          <a:prstGeom prst="rect">
-            <a:avLst/>
-          </a:prstGeom>
-          <a:noFill/>
-          <a:ln/>
-        </p:spPr>
-        <p:txBody>
-          <a:bodyPr wrap="square" lIns="0" tIns="0" rIns="0" bIns="0" rtlCol="0" anchor="ctr"/>
-          <a:lstStyle/>
-          <a:p>
-            <a:pPr algn="r" indent="0" marL="0">
-              <a:buNone/>
-            </a:pPr>
-            <a:r>
-              <a:rPr lang="en-US" sz="900" i="1" dirty="0">
+          <p:cNvPr id="18" name="Text 16"/>
+          <p:cNvSpPr/>
+          <p:nvPr/>
+        </p:nvSpPr>
+        <p:spPr>
+          <a:xfrm>
+            <a:off x="2808514" y="3611880"/>
+            <a:ext cx="1175657" cy="822960"/>
+          </a:xfrm>
+          <a:prstGeom prst="rect">
+            <a:avLst/>
+          </a:prstGeom>
+          <a:noFill/>
+          <a:ln/>
+        </p:spPr>
+        <p:txBody>
+          <a:bodyPr wrap="square" lIns="0" tIns="0" rIns="0" bIns="0" rtlCol="0" anchor="t"/>
+          <a:lstStyle/>
+          <a:p>
+            <a:pPr algn="ctr" indent="0" marL="0">
+              <a:buNone/>
+            </a:pPr>
+            <a:r>
+              <a:rPr lang="en-US" sz="900" dirty="0">
+                <a:solidFill>
+                  <a:srgbClr val="6B6B6B"/>
+                </a:solidFill>
+                <a:latin typeface="Calibri" pitchFamily="34" charset="0"/>
+                <a:ea typeface="Calibri" pitchFamily="34" charset="-122"/>
+                <a:cs typeface="Calibri" pitchFamily="34" charset="-120"/>
+              </a:rPr>
+              <a:t>Pièce, plancher, exemplaires.</a:t>
+            </a:r>
+            <a:endParaRPr lang="en-US" sz="900" dirty="0"/>
+          </a:p>
+        </p:txBody>
+      </p:sp>
+      <p:sp>
+        <p:nvSpPr>
+          <p:cNvPr id="19" name="Shape 17"/>
+          <p:cNvSpPr/>
+          <p:nvPr/>
+        </p:nvSpPr>
+        <p:spPr>
+          <a:xfrm>
+            <a:off x="4507992" y="2953512"/>
+            <a:ext cx="128016" cy="128016"/>
+          </a:xfrm>
+          <a:prstGeom prst="ellipse">
+            <a:avLst/>
+          </a:prstGeom>
+          <a:solidFill>
+            <a:srgbClr val="C9A96E"/>
+          </a:solidFill>
+          <a:ln w="12700">
+            <a:solidFill>
+              <a:srgbClr val="C9A96E"/>
+            </a:solidFill>
+            <a:prstDash val="solid"/>
+          </a:ln>
+        </p:spPr>
+      </p:sp>
+      <p:sp>
+        <p:nvSpPr>
+          <p:cNvPr id="20" name="Text 18"/>
+          <p:cNvSpPr/>
+          <p:nvPr/>
+        </p:nvSpPr>
+        <p:spPr>
+          <a:xfrm>
+            <a:off x="3984171" y="2240280"/>
+            <a:ext cx="1175657" cy="320040"/>
+          </a:xfrm>
+          <a:prstGeom prst="rect">
+            <a:avLst/>
+          </a:prstGeom>
+          <a:noFill/>
+          <a:ln/>
+        </p:spPr>
+        <p:txBody>
+          <a:bodyPr wrap="square" lIns="0" tIns="0" rIns="0" bIns="0" rtlCol="0" anchor="ctr"/>
+          <a:lstStyle/>
+          <a:p>
+            <a:pPr algn="ctr" indent="0" marL="0">
+              <a:buNone/>
+            </a:pPr>
+            <a:r>
+              <a:rPr lang="en-US" sz="1300" i="1" dirty="0">
                 <a:solidFill>
                   <a:srgbClr val="6B6B6B"/>
                 </a:solidFill>
@@ -4237,7 +5749,628 @@
                 <a:ea typeface="Georgia" pitchFamily="34" charset="-122"/>
                 <a:cs typeface="Georgia" pitchFamily="34" charset="-120"/>
               </a:rPr>
-              <a:t>№ 04 / 10</a:t>
+              <a:t>J - 7</a:t>
+            </a:r>
+            <a:endParaRPr lang="en-US" sz="1300" dirty="0"/>
+          </a:p>
+        </p:txBody>
+      </p:sp>
+      <p:sp>
+        <p:nvSpPr>
+          <p:cNvPr id="21" name="Text 19"/>
+          <p:cNvSpPr/>
+          <p:nvPr/>
+        </p:nvSpPr>
+        <p:spPr>
+          <a:xfrm>
+            <a:off x="3984171" y="3200400"/>
+            <a:ext cx="1175657" cy="365760"/>
+          </a:xfrm>
+          <a:prstGeom prst="rect">
+            <a:avLst/>
+          </a:prstGeom>
+          <a:noFill/>
+          <a:ln/>
+        </p:spPr>
+        <p:txBody>
+          <a:bodyPr wrap="square" lIns="0" tIns="0" rIns="0" bIns="0" rtlCol="0" anchor="ctr"/>
+          <a:lstStyle/>
+          <a:p>
+            <a:pPr algn="ctr" indent="0" marL="0">
+              <a:buNone/>
+            </a:pPr>
+            <a:r>
+              <a:rPr lang="en-US" sz="1100" b="1" dirty="0">
+                <a:solidFill>
+                  <a:srgbClr val="0A0A0A"/>
+                </a:solidFill>
+                <a:latin typeface="Calibri" pitchFamily="34" charset="0"/>
+                <a:ea typeface="Calibri" pitchFamily="34" charset="-122"/>
+                <a:cs typeface="Calibri" pitchFamily="34" charset="-120"/>
+              </a:rPr>
+              <a:t>Préparation</a:t>
+            </a:r>
+            <a:endParaRPr lang="en-US" sz="1100" dirty="0"/>
+          </a:p>
+        </p:txBody>
+      </p:sp>
+      <p:sp>
+        <p:nvSpPr>
+          <p:cNvPr id="22" name="Text 20"/>
+          <p:cNvSpPr/>
+          <p:nvPr/>
+        </p:nvSpPr>
+        <p:spPr>
+          <a:xfrm>
+            <a:off x="3984171" y="3611880"/>
+            <a:ext cx="1175657" cy="822960"/>
+          </a:xfrm>
+          <a:prstGeom prst="rect">
+            <a:avLst/>
+          </a:prstGeom>
+          <a:noFill/>
+          <a:ln/>
+        </p:spPr>
+        <p:txBody>
+          <a:bodyPr wrap="square" lIns="0" tIns="0" rIns="0" bIns="0" rtlCol="0" anchor="t"/>
+          <a:lstStyle/>
+          <a:p>
+            <a:pPr algn="ctr" indent="0" marL="0">
+              <a:buNone/>
+            </a:pPr>
+            <a:r>
+              <a:rPr lang="en-US" sz="900" dirty="0">
+                <a:solidFill>
+                  <a:srgbClr val="6B6B6B"/>
+                </a:solidFill>
+                <a:latin typeface="Calibri" pitchFamily="34" charset="0"/>
+                <a:ea typeface="Calibri" pitchFamily="34" charset="-122"/>
+                <a:cs typeface="Calibri" pitchFamily="34" charset="-120"/>
+              </a:rPr>
+              <a:t>Photos, story, packaging.</a:t>
+            </a:r>
+            <a:endParaRPr lang="en-US" sz="900" dirty="0"/>
+          </a:p>
+        </p:txBody>
+      </p:sp>
+      <p:sp>
+        <p:nvSpPr>
+          <p:cNvPr id="23" name="Shape 21"/>
+          <p:cNvSpPr/>
+          <p:nvPr/>
+        </p:nvSpPr>
+        <p:spPr>
+          <a:xfrm>
+            <a:off x="5683649" y="2953512"/>
+            <a:ext cx="128016" cy="128016"/>
+          </a:xfrm>
+          <a:prstGeom prst="ellipse">
+            <a:avLst/>
+          </a:prstGeom>
+          <a:solidFill>
+            <a:srgbClr val="C9A96E"/>
+          </a:solidFill>
+          <a:ln w="12700">
+            <a:solidFill>
+              <a:srgbClr val="C9A96E"/>
+            </a:solidFill>
+            <a:prstDash val="solid"/>
+          </a:ln>
+        </p:spPr>
+      </p:sp>
+      <p:sp>
+        <p:nvSpPr>
+          <p:cNvPr id="24" name="Text 22"/>
+          <p:cNvSpPr/>
+          <p:nvPr/>
+        </p:nvSpPr>
+        <p:spPr>
+          <a:xfrm>
+            <a:off x="5159829" y="2240280"/>
+            <a:ext cx="1175657" cy="320040"/>
+          </a:xfrm>
+          <a:prstGeom prst="rect">
+            <a:avLst/>
+          </a:prstGeom>
+          <a:noFill/>
+          <a:ln/>
+        </p:spPr>
+        <p:txBody>
+          <a:bodyPr wrap="square" lIns="0" tIns="0" rIns="0" bIns="0" rtlCol="0" anchor="ctr"/>
+          <a:lstStyle/>
+          <a:p>
+            <a:pPr algn="ctr" indent="0" marL="0">
+              <a:buNone/>
+            </a:pPr>
+            <a:r>
+              <a:rPr lang="en-US" sz="1300" i="1" dirty="0">
+                <a:solidFill>
+                  <a:srgbClr val="6B6B6B"/>
+                </a:solidFill>
+                <a:latin typeface="Georgia" pitchFamily="34" charset="0"/>
+                <a:ea typeface="Georgia" pitchFamily="34" charset="-122"/>
+                <a:cs typeface="Georgia" pitchFamily="34" charset="-120"/>
+              </a:rPr>
+              <a:t>J 0</a:t>
+            </a:r>
+            <a:endParaRPr lang="en-US" sz="1300" dirty="0"/>
+          </a:p>
+        </p:txBody>
+      </p:sp>
+      <p:sp>
+        <p:nvSpPr>
+          <p:cNvPr id="25" name="Text 23"/>
+          <p:cNvSpPr/>
+          <p:nvPr/>
+        </p:nvSpPr>
+        <p:spPr>
+          <a:xfrm>
+            <a:off x="5159829" y="3200400"/>
+            <a:ext cx="1175657" cy="365760"/>
+          </a:xfrm>
+          <a:prstGeom prst="rect">
+            <a:avLst/>
+          </a:prstGeom>
+          <a:noFill/>
+          <a:ln/>
+        </p:spPr>
+        <p:txBody>
+          <a:bodyPr wrap="square" lIns="0" tIns="0" rIns="0" bIns="0" rtlCol="0" anchor="ctr"/>
+          <a:lstStyle/>
+          <a:p>
+            <a:pPr algn="ctr" indent="0" marL="0">
+              <a:buNone/>
+            </a:pPr>
+            <a:r>
+              <a:rPr lang="en-US" sz="1100" b="1" dirty="0">
+                <a:solidFill>
+                  <a:srgbClr val="0A0A0A"/>
+                </a:solidFill>
+                <a:latin typeface="Calibri" pitchFamily="34" charset="0"/>
+                <a:ea typeface="Calibri" pitchFamily="34" charset="-122"/>
+                <a:cs typeface="Calibri" pitchFamily="34" charset="-120"/>
+              </a:rPr>
+              <a:t>Ouverture</a:t>
+            </a:r>
+            <a:endParaRPr lang="en-US" sz="1100" dirty="0"/>
+          </a:p>
+        </p:txBody>
+      </p:sp>
+      <p:sp>
+        <p:nvSpPr>
+          <p:cNvPr id="26" name="Text 24"/>
+          <p:cNvSpPr/>
+          <p:nvPr/>
+        </p:nvSpPr>
+        <p:spPr>
+          <a:xfrm>
+            <a:off x="5159829" y="3611880"/>
+            <a:ext cx="1175657" cy="822960"/>
+          </a:xfrm>
+          <a:prstGeom prst="rect">
+            <a:avLst/>
+          </a:prstGeom>
+          <a:noFill/>
+          <a:ln/>
+        </p:spPr>
+        <p:txBody>
+          <a:bodyPr wrap="square" lIns="0" tIns="0" rIns="0" bIns="0" rtlCol="0" anchor="t"/>
+          <a:lstStyle/>
+          <a:p>
+            <a:pPr algn="ctr" indent="0" marL="0">
+              <a:buNone/>
+            </a:pPr>
+            <a:r>
+              <a:rPr lang="en-US" sz="900" dirty="0">
+                <a:solidFill>
+                  <a:srgbClr val="6B6B6B"/>
+                </a:solidFill>
+                <a:latin typeface="Calibri" pitchFamily="34" charset="0"/>
+                <a:ea typeface="Calibri" pitchFamily="34" charset="-122"/>
+                <a:cs typeface="Calibri" pitchFamily="34" charset="-120"/>
+              </a:rPr>
+              <a:t>Jeudi 9h, drop public.</a:t>
+            </a:r>
+            <a:endParaRPr lang="en-US" sz="900" dirty="0"/>
+          </a:p>
+        </p:txBody>
+      </p:sp>
+      <p:sp>
+        <p:nvSpPr>
+          <p:cNvPr id="27" name="Shape 25"/>
+          <p:cNvSpPr/>
+          <p:nvPr/>
+        </p:nvSpPr>
+        <p:spPr>
+          <a:xfrm>
+            <a:off x="6859306" y="2953512"/>
+            <a:ext cx="128016" cy="128016"/>
+          </a:xfrm>
+          <a:prstGeom prst="ellipse">
+            <a:avLst/>
+          </a:prstGeom>
+          <a:solidFill>
+            <a:srgbClr val="C9A96E"/>
+          </a:solidFill>
+          <a:ln w="12700">
+            <a:solidFill>
+              <a:srgbClr val="C9A96E"/>
+            </a:solidFill>
+            <a:prstDash val="solid"/>
+          </a:ln>
+        </p:spPr>
+      </p:sp>
+      <p:sp>
+        <p:nvSpPr>
+          <p:cNvPr id="28" name="Text 26"/>
+          <p:cNvSpPr/>
+          <p:nvPr/>
+        </p:nvSpPr>
+        <p:spPr>
+          <a:xfrm>
+            <a:off x="6335486" y="2240280"/>
+            <a:ext cx="1175657" cy="320040"/>
+          </a:xfrm>
+          <a:prstGeom prst="rect">
+            <a:avLst/>
+          </a:prstGeom>
+          <a:noFill/>
+          <a:ln/>
+        </p:spPr>
+        <p:txBody>
+          <a:bodyPr wrap="square" lIns="0" tIns="0" rIns="0" bIns="0" rtlCol="0" anchor="ctr"/>
+          <a:lstStyle/>
+          <a:p>
+            <a:pPr algn="ctr" indent="0" marL="0">
+              <a:buNone/>
+            </a:pPr>
+            <a:r>
+              <a:rPr lang="en-US" sz="1300" i="1" dirty="0">
+                <a:solidFill>
+                  <a:srgbClr val="6B6B6B"/>
+                </a:solidFill>
+                <a:latin typeface="Georgia" pitchFamily="34" charset="0"/>
+                <a:ea typeface="Georgia" pitchFamily="34" charset="-122"/>
+                <a:cs typeface="Georgia" pitchFamily="34" charset="-120"/>
+              </a:rPr>
+              <a:t>J + 5</a:t>
+            </a:r>
+            <a:endParaRPr lang="en-US" sz="1300" dirty="0"/>
+          </a:p>
+        </p:txBody>
+      </p:sp>
+      <p:sp>
+        <p:nvSpPr>
+          <p:cNvPr id="29" name="Text 27"/>
+          <p:cNvSpPr/>
+          <p:nvPr/>
+        </p:nvSpPr>
+        <p:spPr>
+          <a:xfrm>
+            <a:off x="6335486" y="3200400"/>
+            <a:ext cx="1175657" cy="365760"/>
+          </a:xfrm>
+          <a:prstGeom prst="rect">
+            <a:avLst/>
+          </a:prstGeom>
+          <a:noFill/>
+          <a:ln/>
+        </p:spPr>
+        <p:txBody>
+          <a:bodyPr wrap="square" lIns="0" tIns="0" rIns="0" bIns="0" rtlCol="0" anchor="ctr"/>
+          <a:lstStyle/>
+          <a:p>
+            <a:pPr algn="ctr" indent="0" marL="0">
+              <a:buNone/>
+            </a:pPr>
+            <a:r>
+              <a:rPr lang="en-US" sz="1100" b="1" dirty="0">
+                <a:solidFill>
+                  <a:srgbClr val="0A0A0A"/>
+                </a:solidFill>
+                <a:latin typeface="Calibri" pitchFamily="34" charset="0"/>
+                <a:ea typeface="Calibri" pitchFamily="34" charset="-122"/>
+                <a:cs typeface="Calibri" pitchFamily="34" charset="-120"/>
+              </a:rPr>
+              <a:t>Révélation</a:t>
+            </a:r>
+            <a:endParaRPr lang="en-US" sz="1100" dirty="0"/>
+          </a:p>
+        </p:txBody>
+      </p:sp>
+      <p:sp>
+        <p:nvSpPr>
+          <p:cNvPr id="30" name="Text 28"/>
+          <p:cNvSpPr/>
+          <p:nvPr/>
+        </p:nvSpPr>
+        <p:spPr>
+          <a:xfrm>
+            <a:off x="6335486" y="3611880"/>
+            <a:ext cx="1175657" cy="822960"/>
+          </a:xfrm>
+          <a:prstGeom prst="rect">
+            <a:avLst/>
+          </a:prstGeom>
+          <a:noFill/>
+          <a:ln/>
+        </p:spPr>
+        <p:txBody>
+          <a:bodyPr wrap="square" lIns="0" tIns="0" rIns="0" bIns="0" rtlCol="0" anchor="t"/>
+          <a:lstStyle/>
+          <a:p>
+            <a:pPr algn="ctr" indent="0" marL="0">
+              <a:buNone/>
+            </a:pPr>
+            <a:r>
+              <a:rPr lang="en-US" sz="900" dirty="0">
+                <a:solidFill>
+                  <a:srgbClr val="6B6B6B"/>
+                </a:solidFill>
+                <a:latin typeface="Calibri" pitchFamily="34" charset="0"/>
+                <a:ea typeface="Calibri" pitchFamily="34" charset="-122"/>
+                <a:cs typeface="Calibri" pitchFamily="34" charset="-120"/>
+              </a:rPr>
+              <a:t>Jeudi 18h, clearing price.</a:t>
+            </a:r>
+            <a:endParaRPr lang="en-US" sz="900" dirty="0"/>
+          </a:p>
+        </p:txBody>
+      </p:sp>
+      <p:sp>
+        <p:nvSpPr>
+          <p:cNvPr id="31" name="Shape 29"/>
+          <p:cNvSpPr/>
+          <p:nvPr/>
+        </p:nvSpPr>
+        <p:spPr>
+          <a:xfrm>
+            <a:off x="8034963" y="2953512"/>
+            <a:ext cx="128016" cy="128016"/>
+          </a:xfrm>
+          <a:prstGeom prst="ellipse">
+            <a:avLst/>
+          </a:prstGeom>
+          <a:solidFill>
+            <a:srgbClr val="C9A96E"/>
+          </a:solidFill>
+          <a:ln w="12700">
+            <a:solidFill>
+              <a:srgbClr val="C9A96E"/>
+            </a:solidFill>
+            <a:prstDash val="solid"/>
+          </a:ln>
+        </p:spPr>
+      </p:sp>
+      <p:sp>
+        <p:nvSpPr>
+          <p:cNvPr id="32" name="Text 30"/>
+          <p:cNvSpPr/>
+          <p:nvPr/>
+        </p:nvSpPr>
+        <p:spPr>
+          <a:xfrm>
+            <a:off x="7511143" y="2240280"/>
+            <a:ext cx="1175657" cy="320040"/>
+          </a:xfrm>
+          <a:prstGeom prst="rect">
+            <a:avLst/>
+          </a:prstGeom>
+          <a:noFill/>
+          <a:ln/>
+        </p:spPr>
+        <p:txBody>
+          <a:bodyPr wrap="square" lIns="0" tIns="0" rIns="0" bIns="0" rtlCol="0" anchor="ctr"/>
+          <a:lstStyle/>
+          <a:p>
+            <a:pPr algn="ctr" indent="0" marL="0">
+              <a:buNone/>
+            </a:pPr>
+            <a:r>
+              <a:rPr lang="en-US" sz="1300" i="1" dirty="0">
+                <a:solidFill>
+                  <a:srgbClr val="6B6B6B"/>
+                </a:solidFill>
+                <a:latin typeface="Georgia" pitchFamily="34" charset="0"/>
+                <a:ea typeface="Georgia" pitchFamily="34" charset="-122"/>
+                <a:cs typeface="Georgia" pitchFamily="34" charset="-120"/>
+              </a:rPr>
+              <a:t>J + 19</a:t>
+            </a:r>
+            <a:endParaRPr lang="en-US" sz="1300" dirty="0"/>
+          </a:p>
+        </p:txBody>
+      </p:sp>
+      <p:sp>
+        <p:nvSpPr>
+          <p:cNvPr id="33" name="Text 31"/>
+          <p:cNvSpPr/>
+          <p:nvPr/>
+        </p:nvSpPr>
+        <p:spPr>
+          <a:xfrm>
+            <a:off x="7511143" y="3200400"/>
+            <a:ext cx="1175657" cy="365760"/>
+          </a:xfrm>
+          <a:prstGeom prst="rect">
+            <a:avLst/>
+          </a:prstGeom>
+          <a:noFill/>
+          <a:ln/>
+        </p:spPr>
+        <p:txBody>
+          <a:bodyPr wrap="square" lIns="0" tIns="0" rIns="0" bIns="0" rtlCol="0" anchor="ctr"/>
+          <a:lstStyle/>
+          <a:p>
+            <a:pPr algn="ctr" indent="0" marL="0">
+              <a:buNone/>
+            </a:pPr>
+            <a:r>
+              <a:rPr lang="en-US" sz="1100" b="1" dirty="0">
+                <a:solidFill>
+                  <a:srgbClr val="0A0A0A"/>
+                </a:solidFill>
+                <a:latin typeface="Calibri" pitchFamily="34" charset="0"/>
+                <a:ea typeface="Calibri" pitchFamily="34" charset="-122"/>
+                <a:cs typeface="Calibri" pitchFamily="34" charset="-120"/>
+              </a:rPr>
+              <a:t>Paiement</a:t>
+            </a:r>
+            <a:endParaRPr lang="en-US" sz="1100" dirty="0"/>
+          </a:p>
+        </p:txBody>
+      </p:sp>
+      <p:sp>
+        <p:nvSpPr>
+          <p:cNvPr id="34" name="Text 32"/>
+          <p:cNvSpPr/>
+          <p:nvPr/>
+        </p:nvSpPr>
+        <p:spPr>
+          <a:xfrm>
+            <a:off x="7511143" y="3611880"/>
+            <a:ext cx="1175657" cy="822960"/>
+          </a:xfrm>
+          <a:prstGeom prst="rect">
+            <a:avLst/>
+          </a:prstGeom>
+          <a:noFill/>
+          <a:ln/>
+        </p:spPr>
+        <p:txBody>
+          <a:bodyPr wrap="square" lIns="0" tIns="0" rIns="0" bIns="0" rtlCol="0" anchor="t"/>
+          <a:lstStyle/>
+          <a:p>
+            <a:pPr algn="ctr" indent="0" marL="0">
+              <a:buNone/>
+            </a:pPr>
+            <a:r>
+              <a:rPr lang="en-US" sz="900" dirty="0">
+                <a:solidFill>
+                  <a:srgbClr val="6B6B6B"/>
+                </a:solidFill>
+                <a:latin typeface="Calibri" pitchFamily="34" charset="0"/>
+                <a:ea typeface="Calibri" pitchFamily="34" charset="-122"/>
+                <a:cs typeface="Calibri" pitchFamily="34" charset="-120"/>
+              </a:rPr>
+              <a:t>Après rétractation 14j.</a:t>
+            </a:r>
+            <a:endParaRPr lang="en-US" sz="900" dirty="0"/>
+          </a:p>
+        </p:txBody>
+      </p:sp>
+      <p:sp>
+        <p:nvSpPr>
+          <p:cNvPr id="35" name="Text 33"/>
+          <p:cNvSpPr/>
+          <p:nvPr/>
+        </p:nvSpPr>
+        <p:spPr>
+          <a:xfrm>
+            <a:off x="457200" y="4572000"/>
+            <a:ext cx="8229600" cy="274320"/>
+          </a:xfrm>
+          <a:prstGeom prst="rect">
+            <a:avLst/>
+          </a:prstGeom>
+          <a:noFill/>
+          <a:ln/>
+        </p:spPr>
+        <p:txBody>
+          <a:bodyPr wrap="square" lIns="0" tIns="0" rIns="0" bIns="0" rtlCol="0" anchor="ctr"/>
+          <a:lstStyle/>
+          <a:p>
+            <a:pPr algn="ctr" indent="0" marL="0">
+              <a:buNone/>
+            </a:pPr>
+            <a:r>
+              <a:rPr lang="en-US" sz="1200" i="1" dirty="0">
+                <a:solidFill>
+                  <a:srgbClr val="C9A96E"/>
+                </a:solidFill>
+                <a:latin typeface="Georgia" pitchFamily="34" charset="0"/>
+                <a:ea typeface="Georgia" pitchFamily="34" charset="-122"/>
+                <a:cs typeface="Georgia" pitchFamily="34" charset="-120"/>
+              </a:rPr>
+              <a:t>Livraison concierge entre J + 5 et J + 10, vous expédiez à Drop No., nous coordonnons la remise finale.</a:t>
+            </a:r>
+            <a:endParaRPr lang="en-US" sz="1200" dirty="0"/>
+          </a:p>
+        </p:txBody>
+      </p:sp>
+      <p:sp>
+        <p:nvSpPr>
+          <p:cNvPr id="36" name="Text 34"/>
+          <p:cNvSpPr/>
+          <p:nvPr/>
+        </p:nvSpPr>
+        <p:spPr>
+          <a:xfrm>
+            <a:off x="457200" y="4800600"/>
+            <a:ext cx="1371600" cy="274320"/>
+          </a:xfrm>
+          <a:prstGeom prst="rect">
+            <a:avLst/>
+          </a:prstGeom>
+          <a:noFill/>
+          <a:ln/>
+        </p:spPr>
+        <p:txBody>
+          <a:bodyPr wrap="square" lIns="0" tIns="0" rIns="0" bIns="0" rtlCol="0" anchor="ctr"/>
+          <a:lstStyle/>
+          <a:p>
+            <a:pPr indent="0" marL="0">
+              <a:buNone/>
+            </a:pPr>
+            <a:r>
+              <a:rPr lang="en-US" sz="1100" i="1" dirty="0">
+                <a:solidFill>
+                  <a:srgbClr val="0A0A0A"/>
+                </a:solidFill>
+                <a:latin typeface="Georgia" pitchFamily="34" charset="0"/>
+                <a:ea typeface="Georgia" pitchFamily="34" charset="-122"/>
+                <a:cs typeface="Georgia" pitchFamily="34" charset="-120"/>
+              </a:rPr>
+              <a:t>Drop №</a:t>
+            </a:r>
+            <a:endParaRPr lang="en-US" sz="1100" dirty="0"/>
+          </a:p>
+        </p:txBody>
+      </p:sp>
+      <p:sp>
+        <p:nvSpPr>
+          <p:cNvPr id="37" name="Text 35"/>
+          <p:cNvSpPr/>
+          <p:nvPr/>
+        </p:nvSpPr>
+        <p:spPr>
+          <a:xfrm>
+            <a:off x="8321040" y="4800600"/>
+            <a:ext cx="731520" cy="228600"/>
+          </a:xfrm>
+          <a:prstGeom prst="rect">
+            <a:avLst/>
+          </a:prstGeom>
+          <a:noFill/>
+          <a:ln/>
+        </p:spPr>
+        <p:txBody>
+          <a:bodyPr wrap="square" lIns="0" tIns="0" rIns="0" bIns="0" rtlCol="0" anchor="ctr"/>
+          <a:lstStyle/>
+          <a:p>
+            <a:pPr algn="r" indent="0" marL="0">
+              <a:buNone/>
+            </a:pPr>
+            <a:r>
+              <a:rPr lang="en-US" sz="900" i="1" dirty="0">
+                <a:solidFill>
+                  <a:srgbClr val="6B6B6B"/>
+                </a:solidFill>
+                <a:latin typeface="Georgia" pitchFamily="34" charset="0"/>
+                <a:ea typeface="Georgia" pitchFamily="34" charset="-122"/>
+                <a:cs typeface="Georgia" pitchFamily="34" charset="-120"/>
+              </a:rPr>
+              <a:t>№ 04 / 12</a:t>
             </a:r>
             <a:endParaRPr lang="en-US" sz="900" dirty="0"/>
           </a:p>
@@ -4257,7 +6390,7 @@
     <p:bg>
       <p:bgPr>
         <a:solidFill>
-          <a:srgbClr val="0A0A0A"/>
+          <a:srgbClr val="FAFAF7"/>
         </a:solidFill>
       </p:bgPr>
     </p:bg>
@@ -4284,31 +6417,31 @@
         <p:spPr>
           <a:xfrm>
             <a:off x="457200" y="457200"/>
-            <a:ext cx="8229600" cy="274320"/>
-          </a:xfrm>
-          <a:prstGeom prst="rect">
-            <a:avLst/>
-          </a:prstGeom>
-          <a:noFill/>
-          <a:ln/>
-        </p:spPr>
-        <p:txBody>
-          <a:bodyPr wrap="square" lIns="0" tIns="0" rIns="0" bIns="0" rtlCol="0" anchor="ctr"/>
-          <a:lstStyle/>
-          <a:p>
-            <a:pPr indent="0" marL="0">
-              <a:buNone/>
-            </a:pPr>
-            <a:r>
-              <a:rPr lang="en-US" sz="900" spc="500" kern="0" dirty="0">
-                <a:solidFill>
-                  <a:srgbClr val="9B9B9B"/>
+            <a:ext cx="6400800" cy="228600"/>
+          </a:xfrm>
+          <a:prstGeom prst="rect">
+            <a:avLst/>
+          </a:prstGeom>
+          <a:noFill/>
+          <a:ln/>
+        </p:spPr>
+        <p:txBody>
+          <a:bodyPr wrap="square" lIns="0" tIns="0" rIns="0" bIns="0" rtlCol="0" anchor="ctr"/>
+          <a:lstStyle/>
+          <a:p>
+            <a:pPr indent="0" marL="0">
+              <a:buNone/>
+            </a:pPr>
+            <a:r>
+              <a:rPr lang="en-US" sz="900" spc="400" kern="0" dirty="0">
+                <a:solidFill>
+                  <a:srgbClr val="6B6B6B"/>
                 </a:solidFill>
                 <a:latin typeface="Calibri" pitchFamily="34" charset="0"/>
                 <a:ea typeface="Calibri" pitchFamily="34" charset="-122"/>
                 <a:cs typeface="Calibri" pitchFamily="34" charset="-120"/>
               </a:rPr>
-              <a:t>DROP № 001  ·  MAISON LÉVRIER  ·  RÉFÉRENCE TYPE 01</a:t>
+              <a:t>PARCOURS COLLECTIONNEUR</a:t>
             </a:r>
             <a:endParaRPr lang="en-US" sz="900" dirty="0"/>
           </a:p>
@@ -4322,7 +6455,7 @@
         </p:nvSpPr>
         <p:spPr>
           <a:xfrm>
-            <a:off x="457200" y="822960"/>
+            <a:off x="457200" y="777240"/>
             <a:ext cx="8229600" cy="0"/>
           </a:xfrm>
           <a:prstGeom prst="line">
@@ -4331,7 +6464,7 @@
           <a:noFill/>
           <a:ln w="9525">
             <a:solidFill>
-              <a:srgbClr val="3A3A3A"/>
+              <a:srgbClr val="D6D2C7"/>
             </a:solidFill>
             <a:prstDash val="solid"/>
           </a:ln>
@@ -4345,34 +6478,34 @@
         </p:nvSpPr>
         <p:spPr>
           <a:xfrm>
-            <a:off x="457200" y="1051560"/>
-            <a:ext cx="8229600" cy="411480"/>
-          </a:xfrm>
-          <a:prstGeom prst="rect">
-            <a:avLst/>
-          </a:prstGeom>
-          <a:noFill/>
-          <a:ln/>
-        </p:spPr>
-        <p:txBody>
-          <a:bodyPr wrap="square" lIns="0" tIns="0" rIns="0" bIns="0" rtlCol="0" anchor="ctr"/>
-          <a:lstStyle/>
-          <a:p>
-            <a:pPr indent="0" marL="0">
-              <a:buNone/>
-            </a:pPr>
-            <a:r>
-              <a:rPr lang="en-US" sz="1800" i="1" dirty="0">
-                <a:solidFill>
-                  <a:srgbClr val="9B9B9B"/>
+            <a:off x="457200" y="1005840"/>
+            <a:ext cx="8229600" cy="502920"/>
+          </a:xfrm>
+          <a:prstGeom prst="rect">
+            <a:avLst/>
+          </a:prstGeom>
+          <a:noFill/>
+          <a:ln/>
+        </p:spPr>
+        <p:txBody>
+          <a:bodyPr wrap="square" lIns="0" tIns="0" rIns="0" bIns="0" rtlCol="0" anchor="ctr"/>
+          <a:lstStyle/>
+          <a:p>
+            <a:pPr indent="0" marL="0">
+              <a:buNone/>
+            </a:pPr>
+            <a:r>
+              <a:rPr lang="en-US" sz="2600" i="1" dirty="0">
+                <a:solidFill>
+                  <a:srgbClr val="0A0A0A"/>
                 </a:solidFill>
                 <a:latin typeface="Georgia" pitchFamily="34" charset="0"/>
                 <a:ea typeface="Georgia" pitchFamily="34" charset="-122"/>
                 <a:cs typeface="Georgia" pitchFamily="34" charset="-120"/>
               </a:rPr>
-              <a:t>Vous attendiez 4 500 €.</a:t>
-            </a:r>
-            <a:endParaRPr lang="en-US" sz="1800" dirty="0"/>
+              <a:t>Du clic à la pièce livrée, huit étapes.</a:t>
+            </a:r>
+            <a:endParaRPr lang="en-US" sz="2600" dirty="0"/>
           </a:p>
         </p:txBody>
       </p:sp>
@@ -4384,94 +6517,183 @@
         </p:nvSpPr>
         <p:spPr>
           <a:xfrm>
-            <a:off x="457200" y="1600200"/>
-            <a:ext cx="8229600" cy="2103120"/>
-          </a:xfrm>
-          <a:prstGeom prst="rect">
-            <a:avLst/>
-          </a:prstGeom>
-          <a:noFill/>
-          <a:ln/>
-        </p:spPr>
-        <p:txBody>
-          <a:bodyPr wrap="square" lIns="0" tIns="0" rIns="0" bIns="0" rtlCol="0" anchor="ctr"/>
-          <a:lstStyle/>
-          <a:p>
-            <a:pPr indent="0" marL="0">
-              <a:buNone/>
-            </a:pPr>
-            <a:r>
-              <a:rPr lang="en-US" sz="13000" i="1" spc="-200" kern="0" dirty="0">
-                <a:solidFill>
-                  <a:srgbClr val="FAFAF7"/>
+            <a:off x="457200" y="1554480"/>
+            <a:ext cx="8229600" cy="274320"/>
+          </a:xfrm>
+          <a:prstGeom prst="rect">
+            <a:avLst/>
+          </a:prstGeom>
+          <a:noFill/>
+          <a:ln/>
+        </p:spPr>
+        <p:txBody>
+          <a:bodyPr wrap="square" lIns="0" tIns="0" rIns="0" bIns="0" rtlCol="0" anchor="ctr"/>
+          <a:lstStyle/>
+          <a:p>
+            <a:pPr indent="0" marL="0">
+              <a:buNone/>
+            </a:pPr>
+            <a:r>
+              <a:rPr lang="en-US" sz="1100" i="1" dirty="0">
+                <a:solidFill>
+                  <a:srgbClr val="6B6B6B"/>
+                </a:solidFill>
+                <a:latin typeface="Calibri" pitchFamily="34" charset="0"/>
+                <a:ea typeface="Calibri" pitchFamily="34" charset="-122"/>
+                <a:cs typeface="Calibri" pitchFamily="34" charset="-120"/>
+              </a:rPr>
+              <a:t>Le collectionneur que vous touchez : KYC validé, carte vérifiée, profil horloger.</a:t>
+            </a:r>
+            <a:endParaRPr lang="en-US" sz="1100" dirty="0"/>
+          </a:p>
+        </p:txBody>
+      </p:sp>
+      <p:sp>
+        <p:nvSpPr>
+          <p:cNvPr id="6" name="Shape 4"/>
+          <p:cNvSpPr/>
+          <p:nvPr/>
+        </p:nvSpPr>
+        <p:spPr>
+          <a:xfrm>
+            <a:off x="971550" y="3108960"/>
+            <a:ext cx="7200900" cy="0"/>
+          </a:xfrm>
+          <a:prstGeom prst="line">
+            <a:avLst/>
+          </a:prstGeom>
+          <a:noFill/>
+          <a:ln w="12700">
+            <a:solidFill>
+              <a:srgbClr val="D6D2C7"/>
+            </a:solidFill>
+            <a:prstDash val="solid"/>
+          </a:ln>
+        </p:spPr>
+      </p:sp>
+      <p:sp>
+        <p:nvSpPr>
+          <p:cNvPr id="7" name="Shape 5"/>
+          <p:cNvSpPr/>
+          <p:nvPr/>
+        </p:nvSpPr>
+        <p:spPr>
+          <a:xfrm>
+            <a:off x="907542" y="3044952"/>
+            <a:ext cx="128016" cy="128016"/>
+          </a:xfrm>
+          <a:prstGeom prst="ellipse">
+            <a:avLst/>
+          </a:prstGeom>
+          <a:solidFill>
+            <a:srgbClr val="C9A96E"/>
+          </a:solidFill>
+          <a:ln w="12700">
+            <a:solidFill>
+              <a:srgbClr val="C9A96E"/>
+            </a:solidFill>
+            <a:prstDash val="solid"/>
+          </a:ln>
+        </p:spPr>
+      </p:sp>
+      <p:sp>
+        <p:nvSpPr>
+          <p:cNvPr id="8" name="Text 6"/>
+          <p:cNvSpPr/>
+          <p:nvPr/>
+        </p:nvSpPr>
+        <p:spPr>
+          <a:xfrm>
+            <a:off x="457200" y="2331720"/>
+            <a:ext cx="1028700" cy="320040"/>
+          </a:xfrm>
+          <a:prstGeom prst="rect">
+            <a:avLst/>
+          </a:prstGeom>
+          <a:noFill/>
+          <a:ln/>
+        </p:spPr>
+        <p:txBody>
+          <a:bodyPr wrap="square" lIns="0" tIns="0" rIns="0" bIns="0" rtlCol="0" anchor="ctr"/>
+          <a:lstStyle/>
+          <a:p>
+            <a:pPr algn="ctr" indent="0" marL="0">
+              <a:buNone/>
+            </a:pPr>
+            <a:r>
+              <a:rPr lang="en-US" sz="1300" i="1" dirty="0">
+                <a:solidFill>
+                  <a:srgbClr val="6B6B6B"/>
                 </a:solidFill>
                 <a:latin typeface="Georgia" pitchFamily="34" charset="0"/>
                 <a:ea typeface="Georgia" pitchFamily="34" charset="-122"/>
                 <a:cs typeface="Georgia" pitchFamily="34" charset="-120"/>
               </a:rPr>
-              <a:t>6 240 €</a:t>
-            </a:r>
-            <a:endParaRPr lang="en-US" sz="13000" dirty="0"/>
-          </a:p>
-        </p:txBody>
-      </p:sp>
-      <p:sp>
-        <p:nvSpPr>
-          <p:cNvPr id="6" name="Text 4"/>
-          <p:cNvSpPr/>
-          <p:nvPr/>
-        </p:nvSpPr>
-        <p:spPr>
-          <a:xfrm>
-            <a:off x="457200" y="3840480"/>
-            <a:ext cx="8229600" cy="274320"/>
-          </a:xfrm>
-          <a:prstGeom prst="rect">
-            <a:avLst/>
-          </a:prstGeom>
-          <a:noFill/>
-          <a:ln/>
-        </p:spPr>
-        <p:txBody>
-          <a:bodyPr wrap="square" lIns="0" tIns="0" rIns="0" bIns="0" rtlCol="0" anchor="ctr"/>
-          <a:lstStyle/>
-          <a:p>
-            <a:pPr indent="0" marL="0">
-              <a:buNone/>
-            </a:pPr>
-            <a:r>
-              <a:rPr lang="en-US" sz="1400" i="1" dirty="0">
-                <a:solidFill>
-                  <a:srgbClr val="F2EFE7"/>
+              <a:t>Découverte</a:t>
+            </a:r>
+            <a:endParaRPr lang="en-US" sz="1300" dirty="0"/>
+          </a:p>
+        </p:txBody>
+      </p:sp>
+      <p:sp>
+        <p:nvSpPr>
+          <p:cNvPr id="9" name="Text 7"/>
+          <p:cNvSpPr/>
+          <p:nvPr/>
+        </p:nvSpPr>
+        <p:spPr>
+          <a:xfrm>
+            <a:off x="457200" y="3291840"/>
+            <a:ext cx="1028700" cy="365760"/>
+          </a:xfrm>
+          <a:prstGeom prst="rect">
+            <a:avLst/>
+          </a:prstGeom>
+          <a:noFill/>
+          <a:ln/>
+        </p:spPr>
+        <p:txBody>
+          <a:bodyPr wrap="square" lIns="0" tIns="0" rIns="0" bIns="0" rtlCol="0" anchor="ctr"/>
+          <a:lstStyle/>
+          <a:p>
+            <a:pPr algn="ctr" indent="0" marL="0">
+              <a:buNone/>
+            </a:pPr>
+            <a:r>
+              <a:rPr lang="en-US" sz="1100" b="1" dirty="0">
+                <a:solidFill>
+                  <a:srgbClr val="0A0A0A"/>
                 </a:solidFill>
                 <a:latin typeface="Calibri" pitchFamily="34" charset="0"/>
                 <a:ea typeface="Calibri" pitchFamily="34" charset="-122"/>
                 <a:cs typeface="Calibri" pitchFamily="34" charset="-120"/>
               </a:rPr>
-              <a:t>Ce que le marché a dit, en 5 jours.</a:t>
-            </a:r>
-            <a:endParaRPr lang="en-US" sz="1400" dirty="0"/>
-          </a:p>
-        </p:txBody>
-      </p:sp>
-      <p:sp>
-        <p:nvSpPr>
-          <p:cNvPr id="7" name="Shape 5"/>
-          <p:cNvSpPr/>
-          <p:nvPr/>
-        </p:nvSpPr>
-        <p:spPr>
-          <a:xfrm>
-            <a:off x="457200" y="4160520"/>
-            <a:ext cx="8229600" cy="0"/>
-          </a:xfrm>
-          <a:prstGeom prst="line">
-            <a:avLst/>
-          </a:prstGeom>
-          <a:noFill/>
-          <a:ln w="9525">
+              <a:t>Newsletter</a:t>
+            </a:r>
+            <a:endParaRPr lang="en-US" sz="1100" dirty="0"/>
+          </a:p>
+        </p:txBody>
+      </p:sp>
+      <p:sp>
+        <p:nvSpPr>
+          <p:cNvPr id="10" name="Shape 8"/>
+          <p:cNvSpPr/>
+          <p:nvPr/>
+        </p:nvSpPr>
+        <p:spPr>
+          <a:xfrm>
+            <a:off x="1936242" y="3044952"/>
+            <a:ext cx="128016" cy="128016"/>
+          </a:xfrm>
+          <a:prstGeom prst="ellipse">
+            <a:avLst/>
+          </a:prstGeom>
+          <a:solidFill>
+            <a:srgbClr val="C9A96E"/>
+          </a:solidFill>
+          <a:ln w="12700">
             <a:solidFill>
-              <a:srgbClr val="3A3A3A"/>
+              <a:srgbClr val="C9A96E"/>
             </a:solidFill>
             <a:prstDash val="solid"/>
           </a:ln>
@@ -4479,77 +6701,180 @@
       </p:sp>
       <p:sp>
         <p:nvSpPr>
-          <p:cNvPr id="8" name="Text 6"/>
-          <p:cNvSpPr/>
-          <p:nvPr/>
-        </p:nvSpPr>
-        <p:spPr>
-          <a:xfrm>
-            <a:off x="457200" y="4297680"/>
-            <a:ext cx="8229600" cy="274320"/>
-          </a:xfrm>
-          <a:prstGeom prst="rect">
-            <a:avLst/>
-          </a:prstGeom>
-          <a:noFill/>
-          <a:ln/>
-        </p:spPr>
-        <p:txBody>
-          <a:bodyPr wrap="square" lIns="0" tIns="0" rIns="0" bIns="0" rtlCol="0" anchor="ctr"/>
-          <a:lstStyle/>
-          <a:p>
-            <a:pPr indent="0" marL="0">
-              <a:buNone/>
-            </a:pPr>
-            <a:r>
-              <a:rPr lang="en-US" sz="1400" i="1" dirty="0">
-                <a:solidFill>
-                  <a:srgbClr val="C9A96E"/>
+          <p:cNvPr id="11" name="Text 9"/>
+          <p:cNvSpPr/>
+          <p:nvPr/>
+        </p:nvSpPr>
+        <p:spPr>
+          <a:xfrm>
+            <a:off x="1485900" y="2331720"/>
+            <a:ext cx="1028700" cy="320040"/>
+          </a:xfrm>
+          <a:prstGeom prst="rect">
+            <a:avLst/>
+          </a:prstGeom>
+          <a:noFill/>
+          <a:ln/>
+        </p:spPr>
+        <p:txBody>
+          <a:bodyPr wrap="square" lIns="0" tIns="0" rIns="0" bIns="0" rtlCol="0" anchor="ctr"/>
+          <a:lstStyle/>
+          <a:p>
+            <a:pPr algn="ctr" indent="0" marL="0">
+              <a:buNone/>
+            </a:pPr>
+            <a:r>
+              <a:rPr lang="en-US" sz="1300" i="1" dirty="0">
+                <a:solidFill>
+                  <a:srgbClr val="6B6B6B"/>
                 </a:solidFill>
                 <a:latin typeface="Georgia" pitchFamily="34" charset="0"/>
                 <a:ea typeface="Georgia" pitchFamily="34" charset="-122"/>
                 <a:cs typeface="Georgia" pitchFamily="34" charset="-120"/>
               </a:rPr>
-              <a:t>+ 1 740 € par pièce  ·  + 13 920 € sur l’édition  ·  + 38,7 %</a:t>
-            </a:r>
-            <a:endParaRPr lang="en-US" sz="1400" dirty="0"/>
-          </a:p>
-        </p:txBody>
-      </p:sp>
-      <p:sp>
-        <p:nvSpPr>
-          <p:cNvPr id="9" name="Text 7"/>
-          <p:cNvSpPr/>
-          <p:nvPr/>
-        </p:nvSpPr>
-        <p:spPr>
-          <a:xfrm>
-            <a:off x="457200" y="4800600"/>
-            <a:ext cx="1371600" cy="274320"/>
-          </a:xfrm>
-          <a:prstGeom prst="rect">
-            <a:avLst/>
-          </a:prstGeom>
-          <a:noFill/>
-          <a:ln/>
-        </p:spPr>
-        <p:txBody>
-          <a:bodyPr wrap="square" lIns="0" tIns="0" rIns="0" bIns="0" rtlCol="0" anchor="ctr"/>
-          <a:lstStyle/>
-          <a:p>
-            <a:pPr indent="0" marL="0">
-              <a:buNone/>
-            </a:pPr>
-            <a:r>
-              <a:rPr lang="en-US" sz="1100" i="1" dirty="0">
-                <a:solidFill>
-                  <a:srgbClr val="FAFAF7"/>
+              <a:t>Inscription</a:t>
+            </a:r>
+            <a:endParaRPr lang="en-US" sz="1300" dirty="0"/>
+          </a:p>
+        </p:txBody>
+      </p:sp>
+      <p:sp>
+        <p:nvSpPr>
+          <p:cNvPr id="12" name="Text 10"/>
+          <p:cNvSpPr/>
+          <p:nvPr/>
+        </p:nvSpPr>
+        <p:spPr>
+          <a:xfrm>
+            <a:off x="1485900" y="3291840"/>
+            <a:ext cx="1028700" cy="365760"/>
+          </a:xfrm>
+          <a:prstGeom prst="rect">
+            <a:avLst/>
+          </a:prstGeom>
+          <a:noFill/>
+          <a:ln/>
+        </p:spPr>
+        <p:txBody>
+          <a:bodyPr wrap="square" lIns="0" tIns="0" rIns="0" bIns="0" rtlCol="0" anchor="ctr"/>
+          <a:lstStyle/>
+          <a:p>
+            <a:pPr algn="ctr" indent="0" marL="0">
+              <a:buNone/>
+            </a:pPr>
+            <a:r>
+              <a:rPr lang="en-US" sz="1100" b="1" dirty="0">
+                <a:solidFill>
+                  <a:srgbClr val="0A0A0A"/>
+                </a:solidFill>
+                <a:latin typeface="Calibri" pitchFamily="34" charset="0"/>
+                <a:ea typeface="Calibri" pitchFamily="34" charset="-122"/>
+                <a:cs typeface="Calibri" pitchFamily="34" charset="-120"/>
+              </a:rPr>
+              <a:t>Compte + KYC</a:t>
+            </a:r>
+            <a:endParaRPr lang="en-US" sz="1100" dirty="0"/>
+          </a:p>
+        </p:txBody>
+      </p:sp>
+      <p:sp>
+        <p:nvSpPr>
+          <p:cNvPr id="13" name="Shape 11"/>
+          <p:cNvSpPr/>
+          <p:nvPr/>
+        </p:nvSpPr>
+        <p:spPr>
+          <a:xfrm>
+            <a:off x="2964942" y="3044952"/>
+            <a:ext cx="128016" cy="128016"/>
+          </a:xfrm>
+          <a:prstGeom prst="ellipse">
+            <a:avLst/>
+          </a:prstGeom>
+          <a:solidFill>
+            <a:srgbClr val="C9A96E"/>
+          </a:solidFill>
+          <a:ln w="12700">
+            <a:solidFill>
+              <a:srgbClr val="C9A96E"/>
+            </a:solidFill>
+            <a:prstDash val="solid"/>
+          </a:ln>
+        </p:spPr>
+      </p:sp>
+      <p:sp>
+        <p:nvSpPr>
+          <p:cNvPr id="14" name="Text 12"/>
+          <p:cNvSpPr/>
+          <p:nvPr/>
+        </p:nvSpPr>
+        <p:spPr>
+          <a:xfrm>
+            <a:off x="2514600" y="2331720"/>
+            <a:ext cx="1028700" cy="320040"/>
+          </a:xfrm>
+          <a:prstGeom prst="rect">
+            <a:avLst/>
+          </a:prstGeom>
+          <a:noFill/>
+          <a:ln/>
+        </p:spPr>
+        <p:txBody>
+          <a:bodyPr wrap="square" lIns="0" tIns="0" rIns="0" bIns="0" rtlCol="0" anchor="ctr"/>
+          <a:lstStyle/>
+          <a:p>
+            <a:pPr algn="ctr" indent="0" marL="0">
+              <a:buNone/>
+            </a:pPr>
+            <a:r>
+              <a:rPr lang="en-US" sz="1300" i="1" dirty="0">
+                <a:solidFill>
+                  <a:srgbClr val="6B6B6B"/>
                 </a:solidFill>
                 <a:latin typeface="Georgia" pitchFamily="34" charset="0"/>
                 <a:ea typeface="Georgia" pitchFamily="34" charset="-122"/>
                 <a:cs typeface="Georgia" pitchFamily="34" charset="-120"/>
               </a:rPr>
-              <a:t>Drop №</a:t>
+              <a:t>Suivi</a:t>
+            </a:r>
+            <a:endParaRPr lang="en-US" sz="1300" dirty="0"/>
+          </a:p>
+        </p:txBody>
+      </p:sp>
+      <p:sp>
+        <p:nvSpPr>
+          <p:cNvPr id="15" name="Text 13"/>
+          <p:cNvSpPr/>
+          <p:nvPr/>
+        </p:nvSpPr>
+        <p:spPr>
+          <a:xfrm>
+            <a:off x="2514600" y="3291840"/>
+            <a:ext cx="1028700" cy="365760"/>
+          </a:xfrm>
+          <a:prstGeom prst="rect">
+            <a:avLst/>
+          </a:prstGeom>
+          <a:noFill/>
+          <a:ln/>
+        </p:spPr>
+        <p:txBody>
+          <a:bodyPr wrap="square" lIns="0" tIns="0" rIns="0" bIns="0" rtlCol="0" anchor="ctr"/>
+          <a:lstStyle/>
+          <a:p>
+            <a:pPr algn="ctr" indent="0" marL="0">
+              <a:buNone/>
+            </a:pPr>
+            <a:r>
+              <a:rPr lang="en-US" sz="1100" b="1" dirty="0">
+                <a:solidFill>
+                  <a:srgbClr val="0A0A0A"/>
+                </a:solidFill>
+                <a:latin typeface="Calibri" pitchFamily="34" charset="0"/>
+                <a:ea typeface="Calibri" pitchFamily="34" charset="-122"/>
+                <a:cs typeface="Calibri" pitchFamily="34" charset="-120"/>
+              </a:rPr>
+              <a:t>Veille du drop</a:t>
             </a:r>
             <a:endParaRPr lang="en-US" sz="1100" dirty="0"/>
           </a:p>
@@ -4557,38 +6882,592 @@
       </p:sp>
       <p:sp>
         <p:nvSpPr>
-          <p:cNvPr id="10" name="Text 8"/>
-          <p:cNvSpPr/>
-          <p:nvPr/>
-        </p:nvSpPr>
-        <p:spPr>
-          <a:xfrm>
-            <a:off x="8321040" y="4800600"/>
-            <a:ext cx="731520" cy="228600"/>
-          </a:xfrm>
-          <a:prstGeom prst="rect">
-            <a:avLst/>
-          </a:prstGeom>
-          <a:noFill/>
-          <a:ln/>
-        </p:spPr>
-        <p:txBody>
-          <a:bodyPr wrap="square" lIns="0" tIns="0" rIns="0" bIns="0" rtlCol="0" anchor="ctr"/>
-          <a:lstStyle/>
-          <a:p>
-            <a:pPr algn="r" indent="0" marL="0">
-              <a:buNone/>
-            </a:pPr>
-            <a:r>
-              <a:rPr lang="en-US" sz="900" i="1" dirty="0">
-                <a:solidFill>
-                  <a:srgbClr val="9B9B9B"/>
+          <p:cNvPr id="16" name="Shape 14"/>
+          <p:cNvSpPr/>
+          <p:nvPr/>
+        </p:nvSpPr>
+        <p:spPr>
+          <a:xfrm>
+            <a:off x="3993642" y="3044952"/>
+            <a:ext cx="128016" cy="128016"/>
+          </a:xfrm>
+          <a:prstGeom prst="ellipse">
+            <a:avLst/>
+          </a:prstGeom>
+          <a:solidFill>
+            <a:srgbClr val="C9A96E"/>
+          </a:solidFill>
+          <a:ln w="12700">
+            <a:solidFill>
+              <a:srgbClr val="C9A96E"/>
+            </a:solidFill>
+            <a:prstDash val="solid"/>
+          </a:ln>
+        </p:spPr>
+      </p:sp>
+      <p:sp>
+        <p:nvSpPr>
+          <p:cNvPr id="17" name="Text 15"/>
+          <p:cNvSpPr/>
+          <p:nvPr/>
+        </p:nvSpPr>
+        <p:spPr>
+          <a:xfrm>
+            <a:off x="3543300" y="2331720"/>
+            <a:ext cx="1028700" cy="320040"/>
+          </a:xfrm>
+          <a:prstGeom prst="rect">
+            <a:avLst/>
+          </a:prstGeom>
+          <a:noFill/>
+          <a:ln/>
+        </p:spPr>
+        <p:txBody>
+          <a:bodyPr wrap="square" lIns="0" tIns="0" rIns="0" bIns="0" rtlCol="0" anchor="ctr"/>
+          <a:lstStyle/>
+          <a:p>
+            <a:pPr algn="ctr" indent="0" marL="0">
+              <a:buNone/>
+            </a:pPr>
+            <a:r>
+              <a:rPr lang="en-US" sz="1300" i="1" dirty="0">
+                <a:solidFill>
+                  <a:srgbClr val="6B6B6B"/>
                 </a:solidFill>
                 <a:latin typeface="Georgia" pitchFamily="34" charset="0"/>
                 <a:ea typeface="Georgia" pitchFamily="34" charset="-122"/>
                 <a:cs typeface="Georgia" pitchFamily="34" charset="-120"/>
               </a:rPr>
-              <a:t>№ 05 / 10</a:t>
+              <a:t>J 0</a:t>
+            </a:r>
+            <a:endParaRPr lang="en-US" sz="1300" dirty="0"/>
+          </a:p>
+        </p:txBody>
+      </p:sp>
+      <p:sp>
+        <p:nvSpPr>
+          <p:cNvPr id="18" name="Text 16"/>
+          <p:cNvSpPr/>
+          <p:nvPr/>
+        </p:nvSpPr>
+        <p:spPr>
+          <a:xfrm>
+            <a:off x="3543300" y="3291840"/>
+            <a:ext cx="1028700" cy="365760"/>
+          </a:xfrm>
+          <a:prstGeom prst="rect">
+            <a:avLst/>
+          </a:prstGeom>
+          <a:noFill/>
+          <a:ln/>
+        </p:spPr>
+        <p:txBody>
+          <a:bodyPr wrap="square" lIns="0" tIns="0" rIns="0" bIns="0" rtlCol="0" anchor="ctr"/>
+          <a:lstStyle/>
+          <a:p>
+            <a:pPr algn="ctr" indent="0" marL="0">
+              <a:buNone/>
+            </a:pPr>
+            <a:r>
+              <a:rPr lang="en-US" sz="1100" b="1" dirty="0">
+                <a:solidFill>
+                  <a:srgbClr val="0A0A0A"/>
+                </a:solidFill>
+                <a:latin typeface="Calibri" pitchFamily="34" charset="0"/>
+                <a:ea typeface="Calibri" pitchFamily="34" charset="-122"/>
+                <a:cs typeface="Calibri" pitchFamily="34" charset="-120"/>
+              </a:rPr>
+              <a:t>Première offre</a:t>
+            </a:r>
+            <a:endParaRPr lang="en-US" sz="1100" dirty="0"/>
+          </a:p>
+        </p:txBody>
+      </p:sp>
+      <p:sp>
+        <p:nvSpPr>
+          <p:cNvPr id="19" name="Shape 17"/>
+          <p:cNvSpPr/>
+          <p:nvPr/>
+        </p:nvSpPr>
+        <p:spPr>
+          <a:xfrm>
+            <a:off x="5022342" y="3044952"/>
+            <a:ext cx="128016" cy="128016"/>
+          </a:xfrm>
+          <a:prstGeom prst="ellipse">
+            <a:avLst/>
+          </a:prstGeom>
+          <a:solidFill>
+            <a:srgbClr val="C9A96E"/>
+          </a:solidFill>
+          <a:ln w="12700">
+            <a:solidFill>
+              <a:srgbClr val="C9A96E"/>
+            </a:solidFill>
+            <a:prstDash val="solid"/>
+          </a:ln>
+        </p:spPr>
+      </p:sp>
+      <p:sp>
+        <p:nvSpPr>
+          <p:cNvPr id="20" name="Text 18"/>
+          <p:cNvSpPr/>
+          <p:nvPr/>
+        </p:nvSpPr>
+        <p:spPr>
+          <a:xfrm>
+            <a:off x="4572000" y="2331720"/>
+            <a:ext cx="1028700" cy="320040"/>
+          </a:xfrm>
+          <a:prstGeom prst="rect">
+            <a:avLst/>
+          </a:prstGeom>
+          <a:noFill/>
+          <a:ln/>
+        </p:spPr>
+        <p:txBody>
+          <a:bodyPr wrap="square" lIns="0" tIns="0" rIns="0" bIns="0" rtlCol="0" anchor="ctr"/>
+          <a:lstStyle/>
+          <a:p>
+            <a:pPr algn="ctr" indent="0" marL="0">
+              <a:buNone/>
+            </a:pPr>
+            <a:r>
+              <a:rPr lang="en-US" sz="1300" i="1" dirty="0">
+                <a:solidFill>
+                  <a:srgbClr val="6B6B6B"/>
+                </a:solidFill>
+                <a:latin typeface="Georgia" pitchFamily="34" charset="0"/>
+                <a:ea typeface="Georgia" pitchFamily="34" charset="-122"/>
+                <a:cs typeface="Georgia" pitchFamily="34" charset="-120"/>
+              </a:rPr>
+              <a:t>5 jours</a:t>
+            </a:r>
+            <a:endParaRPr lang="en-US" sz="1300" dirty="0"/>
+          </a:p>
+        </p:txBody>
+      </p:sp>
+      <p:sp>
+        <p:nvSpPr>
+          <p:cNvPr id="21" name="Text 19"/>
+          <p:cNvSpPr/>
+          <p:nvPr/>
+        </p:nvSpPr>
+        <p:spPr>
+          <a:xfrm>
+            <a:off x="4572000" y="3291840"/>
+            <a:ext cx="1028700" cy="365760"/>
+          </a:xfrm>
+          <a:prstGeom prst="rect">
+            <a:avLst/>
+          </a:prstGeom>
+          <a:noFill/>
+          <a:ln/>
+        </p:spPr>
+        <p:txBody>
+          <a:bodyPr wrap="square" lIns="0" tIns="0" rIns="0" bIns="0" rtlCol="0" anchor="ctr"/>
+          <a:lstStyle/>
+          <a:p>
+            <a:pPr algn="ctr" indent="0" marL="0">
+              <a:buNone/>
+            </a:pPr>
+            <a:r>
+              <a:rPr lang="en-US" sz="1100" b="1" dirty="0">
+                <a:solidFill>
+                  <a:srgbClr val="0A0A0A"/>
+                </a:solidFill>
+                <a:latin typeface="Calibri" pitchFamily="34" charset="0"/>
+                <a:ea typeface="Calibri" pitchFamily="34" charset="-122"/>
+                <a:cs typeface="Calibri" pitchFamily="34" charset="-120"/>
+              </a:rPr>
+              <a:t>Modification</a:t>
+            </a:r>
+            <a:endParaRPr lang="en-US" sz="1100" dirty="0"/>
+          </a:p>
+        </p:txBody>
+      </p:sp>
+      <p:sp>
+        <p:nvSpPr>
+          <p:cNvPr id="22" name="Shape 20"/>
+          <p:cNvSpPr/>
+          <p:nvPr/>
+        </p:nvSpPr>
+        <p:spPr>
+          <a:xfrm>
+            <a:off x="6051042" y="3044952"/>
+            <a:ext cx="128016" cy="128016"/>
+          </a:xfrm>
+          <a:prstGeom prst="ellipse">
+            <a:avLst/>
+          </a:prstGeom>
+          <a:solidFill>
+            <a:srgbClr val="C9A96E"/>
+          </a:solidFill>
+          <a:ln w="12700">
+            <a:solidFill>
+              <a:srgbClr val="C9A96E"/>
+            </a:solidFill>
+            <a:prstDash val="solid"/>
+          </a:ln>
+        </p:spPr>
+      </p:sp>
+      <p:sp>
+        <p:nvSpPr>
+          <p:cNvPr id="23" name="Text 21"/>
+          <p:cNvSpPr/>
+          <p:nvPr/>
+        </p:nvSpPr>
+        <p:spPr>
+          <a:xfrm>
+            <a:off x="5600700" y="2331720"/>
+            <a:ext cx="1028700" cy="320040"/>
+          </a:xfrm>
+          <a:prstGeom prst="rect">
+            <a:avLst/>
+          </a:prstGeom>
+          <a:noFill/>
+          <a:ln/>
+        </p:spPr>
+        <p:txBody>
+          <a:bodyPr wrap="square" lIns="0" tIns="0" rIns="0" bIns="0" rtlCol="0" anchor="ctr"/>
+          <a:lstStyle/>
+          <a:p>
+            <a:pPr algn="ctr" indent="0" marL="0">
+              <a:buNone/>
+            </a:pPr>
+            <a:r>
+              <a:rPr lang="en-US" sz="1300" i="1" dirty="0">
+                <a:solidFill>
+                  <a:srgbClr val="6B6B6B"/>
+                </a:solidFill>
+                <a:latin typeface="Georgia" pitchFamily="34" charset="0"/>
+                <a:ea typeface="Georgia" pitchFamily="34" charset="-122"/>
+                <a:cs typeface="Georgia" pitchFamily="34" charset="-120"/>
+              </a:rPr>
+              <a:t>J + 5</a:t>
+            </a:r>
+            <a:endParaRPr lang="en-US" sz="1300" dirty="0"/>
+          </a:p>
+        </p:txBody>
+      </p:sp>
+      <p:sp>
+        <p:nvSpPr>
+          <p:cNvPr id="24" name="Text 22"/>
+          <p:cNvSpPr/>
+          <p:nvPr/>
+        </p:nvSpPr>
+        <p:spPr>
+          <a:xfrm>
+            <a:off x="5600700" y="3291840"/>
+            <a:ext cx="1028700" cy="365760"/>
+          </a:xfrm>
+          <a:prstGeom prst="rect">
+            <a:avLst/>
+          </a:prstGeom>
+          <a:noFill/>
+          <a:ln/>
+        </p:spPr>
+        <p:txBody>
+          <a:bodyPr wrap="square" lIns="0" tIns="0" rIns="0" bIns="0" rtlCol="0" anchor="ctr"/>
+          <a:lstStyle/>
+          <a:p>
+            <a:pPr algn="ctr" indent="0" marL="0">
+              <a:buNone/>
+            </a:pPr>
+            <a:r>
+              <a:rPr lang="en-US" sz="1100" b="1" dirty="0">
+                <a:solidFill>
+                  <a:srgbClr val="0A0A0A"/>
+                </a:solidFill>
+                <a:latin typeface="Calibri" pitchFamily="34" charset="0"/>
+                <a:ea typeface="Calibri" pitchFamily="34" charset="-122"/>
+                <a:cs typeface="Calibri" pitchFamily="34" charset="-120"/>
+              </a:rPr>
+              <a:t>Révélation</a:t>
+            </a:r>
+            <a:endParaRPr lang="en-US" sz="1100" dirty="0"/>
+          </a:p>
+        </p:txBody>
+      </p:sp>
+      <p:sp>
+        <p:nvSpPr>
+          <p:cNvPr id="25" name="Shape 23"/>
+          <p:cNvSpPr/>
+          <p:nvPr/>
+        </p:nvSpPr>
+        <p:spPr>
+          <a:xfrm>
+            <a:off x="7079742" y="3044952"/>
+            <a:ext cx="128016" cy="128016"/>
+          </a:xfrm>
+          <a:prstGeom prst="ellipse">
+            <a:avLst/>
+          </a:prstGeom>
+          <a:solidFill>
+            <a:srgbClr val="C9A96E"/>
+          </a:solidFill>
+          <a:ln w="12700">
+            <a:solidFill>
+              <a:srgbClr val="C9A96E"/>
+            </a:solidFill>
+            <a:prstDash val="solid"/>
+          </a:ln>
+        </p:spPr>
+      </p:sp>
+      <p:sp>
+        <p:nvSpPr>
+          <p:cNvPr id="26" name="Text 24"/>
+          <p:cNvSpPr/>
+          <p:nvPr/>
+        </p:nvSpPr>
+        <p:spPr>
+          <a:xfrm>
+            <a:off x="6629400" y="2331720"/>
+            <a:ext cx="1028700" cy="320040"/>
+          </a:xfrm>
+          <a:prstGeom prst="rect">
+            <a:avLst/>
+          </a:prstGeom>
+          <a:noFill/>
+          <a:ln/>
+        </p:spPr>
+        <p:txBody>
+          <a:bodyPr wrap="square" lIns="0" tIns="0" rIns="0" bIns="0" rtlCol="0" anchor="ctr"/>
+          <a:lstStyle/>
+          <a:p>
+            <a:pPr algn="ctr" indent="0" marL="0">
+              <a:buNone/>
+            </a:pPr>
+            <a:r>
+              <a:rPr lang="en-US" sz="1300" i="1" dirty="0">
+                <a:solidFill>
+                  <a:srgbClr val="6B6B6B"/>
+                </a:solidFill>
+                <a:latin typeface="Georgia" pitchFamily="34" charset="0"/>
+                <a:ea typeface="Georgia" pitchFamily="34" charset="-122"/>
+                <a:cs typeface="Georgia" pitchFamily="34" charset="-120"/>
+              </a:rPr>
+              <a:t>J + 5 → 10</a:t>
+            </a:r>
+            <a:endParaRPr lang="en-US" sz="1300" dirty="0"/>
+          </a:p>
+        </p:txBody>
+      </p:sp>
+      <p:sp>
+        <p:nvSpPr>
+          <p:cNvPr id="27" name="Text 25"/>
+          <p:cNvSpPr/>
+          <p:nvPr/>
+        </p:nvSpPr>
+        <p:spPr>
+          <a:xfrm>
+            <a:off x="6629400" y="3291840"/>
+            <a:ext cx="1028700" cy="365760"/>
+          </a:xfrm>
+          <a:prstGeom prst="rect">
+            <a:avLst/>
+          </a:prstGeom>
+          <a:noFill/>
+          <a:ln/>
+        </p:spPr>
+        <p:txBody>
+          <a:bodyPr wrap="square" lIns="0" tIns="0" rIns="0" bIns="0" rtlCol="0" anchor="ctr"/>
+          <a:lstStyle/>
+          <a:p>
+            <a:pPr algn="ctr" indent="0" marL="0">
+              <a:buNone/>
+            </a:pPr>
+            <a:r>
+              <a:rPr lang="en-US" sz="1100" b="1" dirty="0">
+                <a:solidFill>
+                  <a:srgbClr val="0A0A0A"/>
+                </a:solidFill>
+                <a:latin typeface="Calibri" pitchFamily="34" charset="0"/>
+                <a:ea typeface="Calibri" pitchFamily="34" charset="-122"/>
+                <a:cs typeface="Calibri" pitchFamily="34" charset="-120"/>
+              </a:rPr>
+              <a:t>Livraison</a:t>
+            </a:r>
+            <a:endParaRPr lang="en-US" sz="1100" dirty="0"/>
+          </a:p>
+        </p:txBody>
+      </p:sp>
+      <p:sp>
+        <p:nvSpPr>
+          <p:cNvPr id="28" name="Shape 26"/>
+          <p:cNvSpPr/>
+          <p:nvPr/>
+        </p:nvSpPr>
+        <p:spPr>
+          <a:xfrm>
+            <a:off x="8108442" y="3044952"/>
+            <a:ext cx="128016" cy="128016"/>
+          </a:xfrm>
+          <a:prstGeom prst="ellipse">
+            <a:avLst/>
+          </a:prstGeom>
+          <a:solidFill>
+            <a:srgbClr val="C9A96E"/>
+          </a:solidFill>
+          <a:ln w="12700">
+            <a:solidFill>
+              <a:srgbClr val="C9A96E"/>
+            </a:solidFill>
+            <a:prstDash val="solid"/>
+          </a:ln>
+        </p:spPr>
+      </p:sp>
+      <p:sp>
+        <p:nvSpPr>
+          <p:cNvPr id="29" name="Text 27"/>
+          <p:cNvSpPr/>
+          <p:nvPr/>
+        </p:nvSpPr>
+        <p:spPr>
+          <a:xfrm>
+            <a:off x="7658100" y="2331720"/>
+            <a:ext cx="1028700" cy="320040"/>
+          </a:xfrm>
+          <a:prstGeom prst="rect">
+            <a:avLst/>
+          </a:prstGeom>
+          <a:noFill/>
+          <a:ln/>
+        </p:spPr>
+        <p:txBody>
+          <a:bodyPr wrap="square" lIns="0" tIns="0" rIns="0" bIns="0" rtlCol="0" anchor="ctr"/>
+          <a:lstStyle/>
+          <a:p>
+            <a:pPr algn="ctr" indent="0" marL="0">
+              <a:buNone/>
+            </a:pPr>
+            <a:r>
+              <a:rPr lang="en-US" sz="1300" i="1" dirty="0">
+                <a:solidFill>
+                  <a:srgbClr val="6B6B6B"/>
+                </a:solidFill>
+                <a:latin typeface="Georgia" pitchFamily="34" charset="0"/>
+                <a:ea typeface="Georgia" pitchFamily="34" charset="-122"/>
+                <a:cs typeface="Georgia" pitchFamily="34" charset="-120"/>
+              </a:rPr>
+              <a:t>J + 14</a:t>
+            </a:r>
+            <a:endParaRPr lang="en-US" sz="1300" dirty="0"/>
+          </a:p>
+        </p:txBody>
+      </p:sp>
+      <p:sp>
+        <p:nvSpPr>
+          <p:cNvPr id="30" name="Text 28"/>
+          <p:cNvSpPr/>
+          <p:nvPr/>
+        </p:nvSpPr>
+        <p:spPr>
+          <a:xfrm>
+            <a:off x="7658100" y="3291840"/>
+            <a:ext cx="1028700" cy="365760"/>
+          </a:xfrm>
+          <a:prstGeom prst="rect">
+            <a:avLst/>
+          </a:prstGeom>
+          <a:noFill/>
+          <a:ln/>
+        </p:spPr>
+        <p:txBody>
+          <a:bodyPr wrap="square" lIns="0" tIns="0" rIns="0" bIns="0" rtlCol="0" anchor="ctr"/>
+          <a:lstStyle/>
+          <a:p>
+            <a:pPr algn="ctr" indent="0" marL="0">
+              <a:buNone/>
+            </a:pPr>
+            <a:r>
+              <a:rPr lang="en-US" sz="1100" b="1" dirty="0">
+                <a:solidFill>
+                  <a:srgbClr val="0A0A0A"/>
+                </a:solidFill>
+                <a:latin typeface="Calibri" pitchFamily="34" charset="0"/>
+                <a:ea typeface="Calibri" pitchFamily="34" charset="-122"/>
+                <a:cs typeface="Calibri" pitchFamily="34" charset="-120"/>
+              </a:rPr>
+              <a:t>Rétractation</a:t>
+            </a:r>
+            <a:endParaRPr lang="en-US" sz="1100" dirty="0"/>
+          </a:p>
+        </p:txBody>
+      </p:sp>
+      <p:sp>
+        <p:nvSpPr>
+          <p:cNvPr id="31" name="Text 29"/>
+          <p:cNvSpPr/>
+          <p:nvPr/>
+        </p:nvSpPr>
+        <p:spPr>
+          <a:xfrm>
+            <a:off x="457200" y="4800600"/>
+            <a:ext cx="1371600" cy="274320"/>
+          </a:xfrm>
+          <a:prstGeom prst="rect">
+            <a:avLst/>
+          </a:prstGeom>
+          <a:noFill/>
+          <a:ln/>
+        </p:spPr>
+        <p:txBody>
+          <a:bodyPr wrap="square" lIns="0" tIns="0" rIns="0" bIns="0" rtlCol="0" anchor="ctr"/>
+          <a:lstStyle/>
+          <a:p>
+            <a:pPr indent="0" marL="0">
+              <a:buNone/>
+            </a:pPr>
+            <a:r>
+              <a:rPr lang="en-US" sz="1100" i="1" dirty="0">
+                <a:solidFill>
+                  <a:srgbClr val="0A0A0A"/>
+                </a:solidFill>
+                <a:latin typeface="Georgia" pitchFamily="34" charset="0"/>
+                <a:ea typeface="Georgia" pitchFamily="34" charset="-122"/>
+                <a:cs typeface="Georgia" pitchFamily="34" charset="-120"/>
+              </a:rPr>
+              <a:t>Drop №</a:t>
+            </a:r>
+            <a:endParaRPr lang="en-US" sz="1100" dirty="0"/>
+          </a:p>
+        </p:txBody>
+      </p:sp>
+      <p:sp>
+        <p:nvSpPr>
+          <p:cNvPr id="32" name="Text 30"/>
+          <p:cNvSpPr/>
+          <p:nvPr/>
+        </p:nvSpPr>
+        <p:spPr>
+          <a:xfrm>
+            <a:off x="8321040" y="4800600"/>
+            <a:ext cx="731520" cy="228600"/>
+          </a:xfrm>
+          <a:prstGeom prst="rect">
+            <a:avLst/>
+          </a:prstGeom>
+          <a:noFill/>
+          <a:ln/>
+        </p:spPr>
+        <p:txBody>
+          <a:bodyPr wrap="square" lIns="0" tIns="0" rIns="0" bIns="0" rtlCol="0" anchor="ctr"/>
+          <a:lstStyle/>
+          <a:p>
+            <a:pPr algn="r" indent="0" marL="0">
+              <a:buNone/>
+            </a:pPr>
+            <a:r>
+              <a:rPr lang="en-US" sz="900" i="1" dirty="0">
+                <a:solidFill>
+                  <a:srgbClr val="6B6B6B"/>
+                </a:solidFill>
+                <a:latin typeface="Georgia" pitchFamily="34" charset="0"/>
+                <a:ea typeface="Georgia" pitchFamily="34" charset="-122"/>
+                <a:cs typeface="Georgia" pitchFamily="34" charset="-120"/>
+              </a:rPr>
+              <a:t>№ 05 / 12</a:t>
             </a:r>
             <a:endParaRPr lang="en-US" sz="900" dirty="0"/>
           </a:p>
@@ -4635,7 +7514,7 @@
         <p:spPr>
           <a:xfrm>
             <a:off x="457200" y="457200"/>
-            <a:ext cx="5486400" cy="228600"/>
+            <a:ext cx="6400800" cy="228600"/>
           </a:xfrm>
           <a:prstGeom prst="rect">
             <a:avLst/>
@@ -4659,7 +7538,7 @@
                 <a:ea typeface="Calibri" pitchFamily="34" charset="-122"/>
                 <a:cs typeface="Calibri" pitchFamily="34" charset="-120"/>
               </a:rPr>
-              <a:t>LE TEST SANS LE RISQUE</a:t>
+              <a:t>LOGISTIQUE &amp; EXEMPLAIRES</a:t>
             </a:r>
             <a:endParaRPr lang="en-US" sz="900" dirty="0"/>
           </a:p>
@@ -4721,7 +7600,7 @@
                 <a:ea typeface="Georgia" pitchFamily="34" charset="-122"/>
                 <a:cs typeface="Georgia" pitchFamily="34" charset="-120"/>
               </a:rPr>
-              <a:t>Trois garde-fous, pour tester sans casser.</a:t>
+              <a:t>Chaque pièce numérotée, chaque livraison assurée.</a:t>
             </a:r>
             <a:endParaRPr lang="en-US" sz="2600" dirty="0"/>
           </a:p>
@@ -4735,24 +7614,616 @@
         </p:nvSpPr>
         <p:spPr>
           <a:xfrm>
-            <a:off x="457200" y="1965960"/>
-            <a:ext cx="8229600" cy="320040"/>
-          </a:xfrm>
-          <a:prstGeom prst="rect">
-            <a:avLst/>
-          </a:prstGeom>
-          <a:noFill/>
-          <a:ln/>
-        </p:spPr>
-        <p:txBody>
-          <a:bodyPr wrap="square" lIns="0" tIns="0" rIns="0" bIns="0" rtlCol="0" anchor="ctr"/>
-          <a:lstStyle/>
-          <a:p>
-            <a:pPr indent="0" marL="0">
-              <a:buNone/>
-            </a:pPr>
-            <a:r>
-              <a:rPr lang="en-US" sz="1900" i="1" dirty="0">
+            <a:off x="457200" y="1828800"/>
+            <a:ext cx="4023360" cy="274320"/>
+          </a:xfrm>
+          <a:prstGeom prst="rect">
+            <a:avLst/>
+          </a:prstGeom>
+          <a:noFill/>
+          <a:ln/>
+        </p:spPr>
+        <p:txBody>
+          <a:bodyPr wrap="square" lIns="0" tIns="0" rIns="0" bIns="0" rtlCol="0" anchor="ctr"/>
+          <a:lstStyle/>
+          <a:p>
+            <a:pPr indent="0" marL="0">
+              <a:buNone/>
+            </a:pPr>
+            <a:r>
+              <a:rPr lang="en-US" sz="1000" b="1" spc="300" kern="0" dirty="0">
+                <a:solidFill>
+                  <a:srgbClr val="C9A96E"/>
+                </a:solidFill>
+                <a:latin typeface="Calibri" pitchFamily="34" charset="0"/>
+                <a:ea typeface="Calibri" pitchFamily="34" charset="-122"/>
+                <a:cs typeface="Calibri" pitchFamily="34" charset="-120"/>
+              </a:rPr>
+              <a:t>LA PIÈCE</a:t>
+            </a:r>
+            <a:endParaRPr lang="en-US" sz="1000" dirty="0"/>
+          </a:p>
+        </p:txBody>
+      </p:sp>
+      <p:sp>
+        <p:nvSpPr>
+          <p:cNvPr id="6" name="Shape 4"/>
+          <p:cNvSpPr/>
+          <p:nvPr/>
+        </p:nvSpPr>
+        <p:spPr>
+          <a:xfrm>
+            <a:off x="457200" y="2148840"/>
+            <a:ext cx="4023360" cy="0"/>
+          </a:xfrm>
+          <a:prstGeom prst="line">
+            <a:avLst/>
+          </a:prstGeom>
+          <a:noFill/>
+          <a:ln w="9525">
+            <a:solidFill>
+              <a:srgbClr val="C9A96E"/>
+            </a:solidFill>
+            <a:prstDash val="solid"/>
+          </a:ln>
+        </p:spPr>
+      </p:sp>
+      <p:sp>
+        <p:nvSpPr>
+          <p:cNvPr id="7" name="Text 5"/>
+          <p:cNvSpPr/>
+          <p:nvPr/>
+        </p:nvSpPr>
+        <p:spPr>
+          <a:xfrm>
+            <a:off x="457200" y="2331720"/>
+            <a:ext cx="4023360" cy="274320"/>
+          </a:xfrm>
+          <a:prstGeom prst="rect">
+            <a:avLst/>
+          </a:prstGeom>
+          <a:noFill/>
+          <a:ln/>
+        </p:spPr>
+        <p:txBody>
+          <a:bodyPr wrap="square" lIns="0" tIns="0" rIns="0" bIns="0" rtlCol="0" anchor="ctr"/>
+          <a:lstStyle/>
+          <a:p>
+            <a:pPr indent="0" marL="0">
+              <a:buNone/>
+            </a:pPr>
+            <a:r>
+              <a:rPr lang="en-US" sz="1200" b="1" dirty="0">
+                <a:solidFill>
+                  <a:srgbClr val="0A0A0A"/>
+                </a:solidFill>
+                <a:latin typeface="Calibri" pitchFamily="34" charset="0"/>
+                <a:ea typeface="Calibri" pitchFamily="34" charset="-122"/>
+                <a:cs typeface="Calibri" pitchFamily="34" charset="-120"/>
+              </a:rPr>
+              <a:t>Numérotation 1 / N</a:t>
+            </a:r>
+            <a:endParaRPr lang="en-US" sz="1200" dirty="0"/>
+          </a:p>
+        </p:txBody>
+      </p:sp>
+      <p:sp>
+        <p:nvSpPr>
+          <p:cNvPr id="8" name="Text 6"/>
+          <p:cNvSpPr/>
+          <p:nvPr/>
+        </p:nvSpPr>
+        <p:spPr>
+          <a:xfrm>
+            <a:off x="457200" y="2624328"/>
+            <a:ext cx="4023360" cy="457200"/>
+          </a:xfrm>
+          <a:prstGeom prst="rect">
+            <a:avLst/>
+          </a:prstGeom>
+          <a:noFill/>
+          <a:ln/>
+        </p:spPr>
+        <p:txBody>
+          <a:bodyPr wrap="square" lIns="0" tIns="0" rIns="0" bIns="0" rtlCol="0" anchor="ctr"/>
+          <a:lstStyle/>
+          <a:p>
+            <a:pPr indent="0" marL="0">
+              <a:buNone/>
+            </a:pPr>
+            <a:r>
+              <a:rPr lang="en-US" sz="1100" dirty="0">
+                <a:solidFill>
+                  <a:srgbClr val="6B6B6B"/>
+                </a:solidFill>
+                <a:latin typeface="Calibri" pitchFamily="34" charset="0"/>
+                <a:ea typeface="Calibri" pitchFamily="34" charset="-122"/>
+                <a:cs typeface="Calibri" pitchFamily="34" charset="-120"/>
+              </a:rPr>
+              <a:t>Gravée sur la masse oscillante et le fond, visible à travers le saphir.</a:t>
+            </a:r>
+            <a:endParaRPr lang="en-US" sz="1100" dirty="0"/>
+          </a:p>
+        </p:txBody>
+      </p:sp>
+      <p:sp>
+        <p:nvSpPr>
+          <p:cNvPr id="9" name="Text 7"/>
+          <p:cNvSpPr/>
+          <p:nvPr/>
+        </p:nvSpPr>
+        <p:spPr>
+          <a:xfrm>
+            <a:off x="457200" y="3108960"/>
+            <a:ext cx="4023360" cy="274320"/>
+          </a:xfrm>
+          <a:prstGeom prst="rect">
+            <a:avLst/>
+          </a:prstGeom>
+          <a:noFill/>
+          <a:ln/>
+        </p:spPr>
+        <p:txBody>
+          <a:bodyPr wrap="square" lIns="0" tIns="0" rIns="0" bIns="0" rtlCol="0" anchor="ctr"/>
+          <a:lstStyle/>
+          <a:p>
+            <a:pPr indent="0" marL="0">
+              <a:buNone/>
+            </a:pPr>
+            <a:r>
+              <a:rPr lang="en-US" sz="1200" b="1" dirty="0">
+                <a:solidFill>
+                  <a:srgbClr val="0A0A0A"/>
+                </a:solidFill>
+                <a:latin typeface="Calibri" pitchFamily="34" charset="0"/>
+                <a:ea typeface="Calibri" pitchFamily="34" charset="-122"/>
+                <a:cs typeface="Calibri" pitchFamily="34" charset="-120"/>
+              </a:rPr>
+              <a:t>Certificat signé maison</a:t>
+            </a:r>
+            <a:endParaRPr lang="en-US" sz="1200" dirty="0"/>
+          </a:p>
+        </p:txBody>
+      </p:sp>
+      <p:sp>
+        <p:nvSpPr>
+          <p:cNvPr id="10" name="Text 8"/>
+          <p:cNvSpPr/>
+          <p:nvPr/>
+        </p:nvSpPr>
+        <p:spPr>
+          <a:xfrm>
+            <a:off x="457200" y="3401568"/>
+            <a:ext cx="4023360" cy="457200"/>
+          </a:xfrm>
+          <a:prstGeom prst="rect">
+            <a:avLst/>
+          </a:prstGeom>
+          <a:noFill/>
+          <a:ln/>
+        </p:spPr>
+        <p:txBody>
+          <a:bodyPr wrap="square" lIns="0" tIns="0" rIns="0" bIns="0" rtlCol="0" anchor="ctr"/>
+          <a:lstStyle/>
+          <a:p>
+            <a:pPr indent="0" marL="0">
+              <a:buNone/>
+            </a:pPr>
+            <a:r>
+              <a:rPr lang="en-US" sz="1100" dirty="0">
+                <a:solidFill>
+                  <a:srgbClr val="6B6B6B"/>
+                </a:solidFill>
+                <a:latin typeface="Calibri" pitchFamily="34" charset="0"/>
+                <a:ea typeface="Calibri" pitchFamily="34" charset="-122"/>
+                <a:cs typeface="Calibri" pitchFamily="34" charset="-120"/>
+              </a:rPr>
+              <a:t>Document d’authenticité émis et signé par votre atelier, livré avec la pièce.</a:t>
+            </a:r>
+            <a:endParaRPr lang="en-US" sz="1100" dirty="0"/>
+          </a:p>
+        </p:txBody>
+      </p:sp>
+      <p:sp>
+        <p:nvSpPr>
+          <p:cNvPr id="11" name="Text 9"/>
+          <p:cNvSpPr/>
+          <p:nvPr/>
+        </p:nvSpPr>
+        <p:spPr>
+          <a:xfrm>
+            <a:off x="457200" y="3886200"/>
+            <a:ext cx="4023360" cy="274320"/>
+          </a:xfrm>
+          <a:prstGeom prst="rect">
+            <a:avLst/>
+          </a:prstGeom>
+          <a:noFill/>
+          <a:ln/>
+        </p:spPr>
+        <p:txBody>
+          <a:bodyPr wrap="square" lIns="0" tIns="0" rIns="0" bIns="0" rtlCol="0" anchor="ctr"/>
+          <a:lstStyle/>
+          <a:p>
+            <a:pPr indent="0" marL="0">
+              <a:buNone/>
+            </a:pPr>
+            <a:r>
+              <a:rPr lang="en-US" sz="1200" b="1" dirty="0">
+                <a:solidFill>
+                  <a:srgbClr val="0A0A0A"/>
+                </a:solidFill>
+                <a:latin typeface="Calibri" pitchFamily="34" charset="0"/>
+                <a:ea typeface="Calibri" pitchFamily="34" charset="-122"/>
+                <a:cs typeface="Calibri" pitchFamily="34" charset="-120"/>
+              </a:rPr>
+              <a:t>Packaging d’origine</a:t>
+            </a:r>
+            <a:endParaRPr lang="en-US" sz="1200" dirty="0"/>
+          </a:p>
+        </p:txBody>
+      </p:sp>
+      <p:sp>
+        <p:nvSpPr>
+          <p:cNvPr id="12" name="Text 10"/>
+          <p:cNvSpPr/>
+          <p:nvPr/>
+        </p:nvSpPr>
+        <p:spPr>
+          <a:xfrm>
+            <a:off x="457200" y="4178808"/>
+            <a:ext cx="4023360" cy="457200"/>
+          </a:xfrm>
+          <a:prstGeom prst="rect">
+            <a:avLst/>
+          </a:prstGeom>
+          <a:noFill/>
+          <a:ln/>
+        </p:spPr>
+        <p:txBody>
+          <a:bodyPr wrap="square" lIns="0" tIns="0" rIns="0" bIns="0" rtlCol="0" anchor="ctr"/>
+          <a:lstStyle/>
+          <a:p>
+            <a:pPr indent="0" marL="0">
+              <a:buNone/>
+            </a:pPr>
+            <a:r>
+              <a:rPr lang="en-US" sz="1100" dirty="0">
+                <a:solidFill>
+                  <a:srgbClr val="6B6B6B"/>
+                </a:solidFill>
+                <a:latin typeface="Calibri" pitchFamily="34" charset="0"/>
+                <a:ea typeface="Calibri" pitchFamily="34" charset="-122"/>
+                <a:cs typeface="Calibri" pitchFamily="34" charset="-120"/>
+              </a:rPr>
+              <a:t>Votre coffret habituel, dossier d’histoire imprimé, étui de transport renforcé.</a:t>
+            </a:r>
+            <a:endParaRPr lang="en-US" sz="1100" dirty="0"/>
+          </a:p>
+        </p:txBody>
+      </p:sp>
+      <p:sp>
+        <p:nvSpPr>
+          <p:cNvPr id="13" name="Text 11"/>
+          <p:cNvSpPr/>
+          <p:nvPr/>
+        </p:nvSpPr>
+        <p:spPr>
+          <a:xfrm>
+            <a:off x="4663440" y="1828800"/>
+            <a:ext cx="4023360" cy="274320"/>
+          </a:xfrm>
+          <a:prstGeom prst="rect">
+            <a:avLst/>
+          </a:prstGeom>
+          <a:noFill/>
+          <a:ln/>
+        </p:spPr>
+        <p:txBody>
+          <a:bodyPr wrap="square" lIns="0" tIns="0" rIns="0" bIns="0" rtlCol="0" anchor="ctr"/>
+          <a:lstStyle/>
+          <a:p>
+            <a:pPr indent="0" marL="0">
+              <a:buNone/>
+            </a:pPr>
+            <a:r>
+              <a:rPr lang="en-US" sz="1000" b="1" spc="300" kern="0" dirty="0">
+                <a:solidFill>
+                  <a:srgbClr val="0A0A0A"/>
+                </a:solidFill>
+                <a:latin typeface="Calibri" pitchFamily="34" charset="0"/>
+                <a:ea typeface="Calibri" pitchFamily="34" charset="-122"/>
+                <a:cs typeface="Calibri" pitchFamily="34" charset="-120"/>
+              </a:rPr>
+              <a:t>LA LIVRAISON</a:t>
+            </a:r>
+            <a:endParaRPr lang="en-US" sz="1000" dirty="0"/>
+          </a:p>
+        </p:txBody>
+      </p:sp>
+      <p:sp>
+        <p:nvSpPr>
+          <p:cNvPr id="14" name="Shape 12"/>
+          <p:cNvSpPr/>
+          <p:nvPr/>
+        </p:nvSpPr>
+        <p:spPr>
+          <a:xfrm>
+            <a:off x="4663440" y="2148840"/>
+            <a:ext cx="4023360" cy="0"/>
+          </a:xfrm>
+          <a:prstGeom prst="line">
+            <a:avLst/>
+          </a:prstGeom>
+          <a:noFill/>
+          <a:ln w="9525">
+            <a:solidFill>
+              <a:srgbClr val="0A0A0A"/>
+            </a:solidFill>
+            <a:prstDash val="solid"/>
+          </a:ln>
+        </p:spPr>
+      </p:sp>
+      <p:sp>
+        <p:nvSpPr>
+          <p:cNvPr id="15" name="Text 13"/>
+          <p:cNvSpPr/>
+          <p:nvPr/>
+        </p:nvSpPr>
+        <p:spPr>
+          <a:xfrm>
+            <a:off x="4663440" y="2331720"/>
+            <a:ext cx="4023360" cy="274320"/>
+          </a:xfrm>
+          <a:prstGeom prst="rect">
+            <a:avLst/>
+          </a:prstGeom>
+          <a:noFill/>
+          <a:ln/>
+        </p:spPr>
+        <p:txBody>
+          <a:bodyPr wrap="square" lIns="0" tIns="0" rIns="0" bIns="0" rtlCol="0" anchor="ctr"/>
+          <a:lstStyle/>
+          <a:p>
+            <a:pPr indent="0" marL="0">
+              <a:buNone/>
+            </a:pPr>
+            <a:r>
+              <a:rPr lang="en-US" sz="1200" b="1" dirty="0">
+                <a:solidFill>
+                  <a:srgbClr val="0A0A0A"/>
+                </a:solidFill>
+                <a:latin typeface="Calibri" pitchFamily="34" charset="0"/>
+                <a:ea typeface="Calibri" pitchFamily="34" charset="-122"/>
+                <a:cs typeface="Calibri" pitchFamily="34" charset="-120"/>
+              </a:rPr>
+              <a:t>DHL Express assuré</a:t>
+            </a:r>
+            <a:endParaRPr lang="en-US" sz="1200" dirty="0"/>
+          </a:p>
+        </p:txBody>
+      </p:sp>
+      <p:sp>
+        <p:nvSpPr>
+          <p:cNvPr id="16" name="Text 14"/>
+          <p:cNvSpPr/>
+          <p:nvPr/>
+        </p:nvSpPr>
+        <p:spPr>
+          <a:xfrm>
+            <a:off x="4663440" y="2624328"/>
+            <a:ext cx="4023360" cy="502920"/>
+          </a:xfrm>
+          <a:prstGeom prst="rect">
+            <a:avLst/>
+          </a:prstGeom>
+          <a:noFill/>
+          <a:ln/>
+        </p:spPr>
+        <p:txBody>
+          <a:bodyPr wrap="square" lIns="0" tIns="0" rIns="0" bIns="0" rtlCol="0" anchor="ctr"/>
+          <a:lstStyle/>
+          <a:p>
+            <a:pPr indent="0" marL="0">
+              <a:buNone/>
+            </a:pPr>
+            <a:r>
+              <a:rPr lang="en-US" sz="1100" dirty="0">
+                <a:solidFill>
+                  <a:srgbClr val="6B6B6B"/>
+                </a:solidFill>
+                <a:latin typeface="Calibri" pitchFamily="34" charset="0"/>
+                <a:ea typeface="Calibri" pitchFamily="34" charset="-122"/>
+                <a:cs typeface="Calibri" pitchFamily="34" charset="-120"/>
+              </a:rPr>
+              <a:t>Pour les pièces entre 3 000 et 10 000 €. Livraison 48-72h, assurance valeur pleine, tracking temps réel.</a:t>
+            </a:r>
+            <a:endParaRPr lang="en-US" sz="1100" dirty="0"/>
+          </a:p>
+        </p:txBody>
+      </p:sp>
+      <p:sp>
+        <p:nvSpPr>
+          <p:cNvPr id="17" name="Text 15"/>
+          <p:cNvSpPr/>
+          <p:nvPr/>
+        </p:nvSpPr>
+        <p:spPr>
+          <a:xfrm>
+            <a:off x="4663440" y="3200400"/>
+            <a:ext cx="4023360" cy="274320"/>
+          </a:xfrm>
+          <a:prstGeom prst="rect">
+            <a:avLst/>
+          </a:prstGeom>
+          <a:noFill/>
+          <a:ln/>
+        </p:spPr>
+        <p:txBody>
+          <a:bodyPr wrap="square" lIns="0" tIns="0" rIns="0" bIns="0" rtlCol="0" anchor="ctr"/>
+          <a:lstStyle/>
+          <a:p>
+            <a:pPr indent="0" marL="0">
+              <a:buNone/>
+            </a:pPr>
+            <a:r>
+              <a:rPr lang="en-US" sz="1200" b="1" dirty="0">
+                <a:solidFill>
+                  <a:srgbClr val="0A0A0A"/>
+                </a:solidFill>
+                <a:latin typeface="Calibri" pitchFamily="34" charset="0"/>
+                <a:ea typeface="Calibri" pitchFamily="34" charset="-122"/>
+                <a:cs typeface="Calibri" pitchFamily="34" charset="-120"/>
+              </a:rPr>
+              <a:t>Concierge main propre</a:t>
+            </a:r>
+            <a:endParaRPr lang="en-US" sz="1200" dirty="0"/>
+          </a:p>
+        </p:txBody>
+      </p:sp>
+      <p:sp>
+        <p:nvSpPr>
+          <p:cNvPr id="18" name="Text 16"/>
+          <p:cNvSpPr/>
+          <p:nvPr/>
+        </p:nvSpPr>
+        <p:spPr>
+          <a:xfrm>
+            <a:off x="4663440" y="3493008"/>
+            <a:ext cx="4023360" cy="502920"/>
+          </a:xfrm>
+          <a:prstGeom prst="rect">
+            <a:avLst/>
+          </a:prstGeom>
+          <a:noFill/>
+          <a:ln/>
+        </p:spPr>
+        <p:txBody>
+          <a:bodyPr wrap="square" lIns="0" tIns="0" rIns="0" bIns="0" rtlCol="0" anchor="ctr"/>
+          <a:lstStyle/>
+          <a:p>
+            <a:pPr indent="0" marL="0">
+              <a:buNone/>
+            </a:pPr>
+            <a:r>
+              <a:rPr lang="en-US" sz="1100" dirty="0">
+                <a:solidFill>
+                  <a:srgbClr val="6B6B6B"/>
+                </a:solidFill>
+                <a:latin typeface="Calibri" pitchFamily="34" charset="0"/>
+                <a:ea typeface="Calibri" pitchFamily="34" charset="-122"/>
+                <a:cs typeface="Calibri" pitchFamily="34" charset="-120"/>
+              </a:rPr>
+              <a:t>Pour les pièces au-dessus de 10 000 €. Malca-Amit ou Brinks, remise contre signature.</a:t>
+            </a:r>
+            <a:endParaRPr lang="en-US" sz="1100" dirty="0"/>
+          </a:p>
+        </p:txBody>
+      </p:sp>
+      <p:sp>
+        <p:nvSpPr>
+          <p:cNvPr id="19" name="Text 17"/>
+          <p:cNvSpPr/>
+          <p:nvPr/>
+        </p:nvSpPr>
+        <p:spPr>
+          <a:xfrm>
+            <a:off x="4663440" y="4069080"/>
+            <a:ext cx="4023360" cy="274320"/>
+          </a:xfrm>
+          <a:prstGeom prst="rect">
+            <a:avLst/>
+          </a:prstGeom>
+          <a:noFill/>
+          <a:ln/>
+        </p:spPr>
+        <p:txBody>
+          <a:bodyPr wrap="square" lIns="0" tIns="0" rIns="0" bIns="0" rtlCol="0" anchor="ctr"/>
+          <a:lstStyle/>
+          <a:p>
+            <a:pPr indent="0" marL="0">
+              <a:buNone/>
+            </a:pPr>
+            <a:r>
+              <a:rPr lang="en-US" sz="1200" b="1" dirty="0">
+                <a:solidFill>
+                  <a:srgbClr val="0A0A0A"/>
+                </a:solidFill>
+                <a:latin typeface="Calibri" pitchFamily="34" charset="0"/>
+                <a:ea typeface="Calibri" pitchFamily="34" charset="-122"/>
+                <a:cs typeface="Calibri" pitchFamily="34" charset="-120"/>
+              </a:rPr>
+              <a:t>Fenêtre 5 à 10 jours</a:t>
+            </a:r>
+            <a:endParaRPr lang="en-US" sz="1200" dirty="0"/>
+          </a:p>
+        </p:txBody>
+      </p:sp>
+      <p:sp>
+        <p:nvSpPr>
+          <p:cNvPr id="20" name="Text 18"/>
+          <p:cNvSpPr/>
+          <p:nvPr/>
+        </p:nvSpPr>
+        <p:spPr>
+          <a:xfrm>
+            <a:off x="4663440" y="4361688"/>
+            <a:ext cx="4023360" cy="502920"/>
+          </a:xfrm>
+          <a:prstGeom prst="rect">
+            <a:avLst/>
+          </a:prstGeom>
+          <a:noFill/>
+          <a:ln/>
+        </p:spPr>
+        <p:txBody>
+          <a:bodyPr wrap="square" lIns="0" tIns="0" rIns="0" bIns="0" rtlCol="0" anchor="ctr"/>
+          <a:lstStyle/>
+          <a:p>
+            <a:pPr indent="0" marL="0">
+              <a:buNone/>
+            </a:pPr>
+            <a:r>
+              <a:rPr lang="en-US" sz="1100" dirty="0">
+                <a:solidFill>
+                  <a:srgbClr val="6B6B6B"/>
+                </a:solidFill>
+                <a:latin typeface="Calibri" pitchFamily="34" charset="0"/>
+                <a:ea typeface="Calibri" pitchFamily="34" charset="-122"/>
+                <a:cs typeface="Calibri" pitchFamily="34" charset="-120"/>
+              </a:rPr>
+              <a:t>À compter de la révélation. Vous expédiez à Drop No., nous coordonnons la livraison finale.</a:t>
+            </a:r>
+            <a:endParaRPr lang="en-US" sz="1100" dirty="0"/>
+          </a:p>
+        </p:txBody>
+      </p:sp>
+      <p:sp>
+        <p:nvSpPr>
+          <p:cNvPr id="21" name="Text 19"/>
+          <p:cNvSpPr/>
+          <p:nvPr/>
+        </p:nvSpPr>
+        <p:spPr>
+          <a:xfrm>
+            <a:off x="457200" y="4800600"/>
+            <a:ext cx="1371600" cy="274320"/>
+          </a:xfrm>
+          <a:prstGeom prst="rect">
+            <a:avLst/>
+          </a:prstGeom>
+          <a:noFill/>
+          <a:ln/>
+        </p:spPr>
+        <p:txBody>
+          <a:bodyPr wrap="square" lIns="0" tIns="0" rIns="0" bIns="0" rtlCol="0" anchor="ctr"/>
+          <a:lstStyle/>
+          <a:p>
+            <a:pPr indent="0" marL="0">
+              <a:buNone/>
+            </a:pPr>
+            <a:r>
+              <a:rPr lang="en-US" sz="1100" i="1" dirty="0">
                 <a:solidFill>
                   <a:srgbClr val="0A0A0A"/>
                 </a:solidFill>
@@ -4760,326 +8231,46 @@
                 <a:ea typeface="Georgia" pitchFamily="34" charset="-122"/>
                 <a:cs typeface="Georgia" pitchFamily="34" charset="-120"/>
               </a:rPr>
-              <a:t>Le prix plancher est le vôtre</a:t>
-            </a:r>
-            <a:endParaRPr lang="en-US" sz="1900" dirty="0"/>
-          </a:p>
-        </p:txBody>
-      </p:sp>
-      <p:sp>
-        <p:nvSpPr>
-          <p:cNvPr id="6" name="Text 4"/>
-          <p:cNvSpPr/>
-          <p:nvPr/>
-        </p:nvSpPr>
-        <p:spPr>
-          <a:xfrm>
-            <a:off x="457200" y="2304288"/>
-            <a:ext cx="8229600" cy="457200"/>
-          </a:xfrm>
-          <a:prstGeom prst="rect">
-            <a:avLst/>
-          </a:prstGeom>
-          <a:noFill/>
-          <a:ln/>
-        </p:spPr>
-        <p:txBody>
-          <a:bodyPr wrap="square" lIns="0" tIns="0" rIns="0" bIns="0" rtlCol="0" anchor="ctr"/>
-          <a:lstStyle/>
-          <a:p>
-            <a:pPr indent="0" marL="0">
-              <a:buNone/>
-            </a:pPr>
-            <a:r>
-              <a:rPr lang="en-US" sz="1200" dirty="0">
+              <a:t>Drop №</a:t>
+            </a:r>
+            <a:endParaRPr lang="en-US" sz="1100" dirty="0"/>
+          </a:p>
+        </p:txBody>
+      </p:sp>
+      <p:sp>
+        <p:nvSpPr>
+          <p:cNvPr id="22" name="Text 20"/>
+          <p:cNvSpPr/>
+          <p:nvPr/>
+        </p:nvSpPr>
+        <p:spPr>
+          <a:xfrm>
+            <a:off x="8321040" y="4800600"/>
+            <a:ext cx="731520" cy="228600"/>
+          </a:xfrm>
+          <a:prstGeom prst="rect">
+            <a:avLst/>
+          </a:prstGeom>
+          <a:noFill/>
+          <a:ln/>
+        </p:spPr>
+        <p:txBody>
+          <a:bodyPr wrap="square" lIns="0" tIns="0" rIns="0" bIns="0" rtlCol="0" anchor="ctr"/>
+          <a:lstStyle/>
+          <a:p>
+            <a:pPr algn="r" indent="0" marL="0">
+              <a:buNone/>
+            </a:pPr>
+            <a:r>
+              <a:rPr lang="en-US" sz="900" i="1" dirty="0">
                 <a:solidFill>
                   <a:srgbClr val="6B6B6B"/>
-                </a:solidFill>
-                <a:latin typeface="Calibri" pitchFamily="34" charset="0"/>
-                <a:ea typeface="Calibri" pitchFamily="34" charset="-122"/>
-                <a:cs typeface="Calibri" pitchFamily="34" charset="-120"/>
-              </a:rPr>
-              <a:t>Si la demande est en dessous, le drop est annulé. Aucune vente sous votre seuil. Aucune perte d’image.</a:t>
-            </a:r>
-            <a:endParaRPr lang="en-US" sz="1200" dirty="0"/>
-          </a:p>
-        </p:txBody>
-      </p:sp>
-      <p:sp>
-        <p:nvSpPr>
-          <p:cNvPr id="7" name="Shape 5"/>
-          <p:cNvSpPr/>
-          <p:nvPr/>
-        </p:nvSpPr>
-        <p:spPr>
-          <a:xfrm>
-            <a:off x="457200" y="2743200"/>
-            <a:ext cx="8229600" cy="0"/>
-          </a:xfrm>
-          <a:prstGeom prst="line">
-            <a:avLst/>
-          </a:prstGeom>
-          <a:noFill/>
-          <a:ln w="9525">
-            <a:solidFill>
-              <a:srgbClr val="D6D2C7"/>
-            </a:solidFill>
-            <a:prstDash val="solid"/>
-          </a:ln>
-        </p:spPr>
-      </p:sp>
-      <p:sp>
-        <p:nvSpPr>
-          <p:cNvPr id="8" name="Text 6"/>
-          <p:cNvSpPr/>
-          <p:nvPr/>
-        </p:nvSpPr>
-        <p:spPr>
-          <a:xfrm>
-            <a:off x="457200" y="2834640"/>
-            <a:ext cx="8229600" cy="320040"/>
-          </a:xfrm>
-          <a:prstGeom prst="rect">
-            <a:avLst/>
-          </a:prstGeom>
-          <a:noFill/>
-          <a:ln/>
-        </p:spPr>
-        <p:txBody>
-          <a:bodyPr wrap="square" lIns="0" tIns="0" rIns="0" bIns="0" rtlCol="0" anchor="ctr"/>
-          <a:lstStyle/>
-          <a:p>
-            <a:pPr indent="0" marL="0">
-              <a:buNone/>
-            </a:pPr>
-            <a:r>
-              <a:rPr lang="en-US" sz="1900" i="1" dirty="0">
-                <a:solidFill>
-                  <a:srgbClr val="0A0A0A"/>
                 </a:solidFill>
                 <a:latin typeface="Georgia" pitchFamily="34" charset="0"/>
                 <a:ea typeface="Georgia" pitchFamily="34" charset="-122"/>
                 <a:cs typeface="Georgia" pitchFamily="34" charset="-120"/>
               </a:rPr>
-              <a:t>Drop annulé, zéro frais</a:t>
-            </a:r>
-            <a:endParaRPr lang="en-US" sz="1900" dirty="0"/>
-          </a:p>
-        </p:txBody>
-      </p:sp>
-      <p:sp>
-        <p:nvSpPr>
-          <p:cNvPr id="9" name="Text 7"/>
-          <p:cNvSpPr/>
-          <p:nvPr/>
-        </p:nvSpPr>
-        <p:spPr>
-          <a:xfrm>
-            <a:off x="457200" y="3172968"/>
-            <a:ext cx="8229600" cy="457200"/>
-          </a:xfrm>
-          <a:prstGeom prst="rect">
-            <a:avLst/>
-          </a:prstGeom>
-          <a:noFill/>
-          <a:ln/>
-        </p:spPr>
-        <p:txBody>
-          <a:bodyPr wrap="square" lIns="0" tIns="0" rIns="0" bIns="0" rtlCol="0" anchor="ctr"/>
-          <a:lstStyle/>
-          <a:p>
-            <a:pPr indent="0" marL="0">
-              <a:buNone/>
-            </a:pPr>
-            <a:r>
-              <a:rPr lang="en-US" sz="1200" dirty="0">
-                <a:solidFill>
-                  <a:srgbClr val="6B6B6B"/>
-                </a:solidFill>
-                <a:latin typeface="Calibri" pitchFamily="34" charset="0"/>
-                <a:ea typeface="Calibri" pitchFamily="34" charset="-122"/>
-                <a:cs typeface="Calibri" pitchFamily="34" charset="-120"/>
-              </a:rPr>
-              <a:t>Pas de fee si rien ne part. Drop No. ne gagne que si vous gagnez. Notre intérêt est aligné sur le vôtre.</a:t>
-            </a:r>
-            <a:endParaRPr lang="en-US" sz="1200" dirty="0"/>
-          </a:p>
-        </p:txBody>
-      </p:sp>
-      <p:sp>
-        <p:nvSpPr>
-          <p:cNvPr id="10" name="Shape 8"/>
-          <p:cNvSpPr/>
-          <p:nvPr/>
-        </p:nvSpPr>
-        <p:spPr>
-          <a:xfrm>
-            <a:off x="457200" y="3611880"/>
-            <a:ext cx="8229600" cy="0"/>
-          </a:xfrm>
-          <a:prstGeom prst="line">
-            <a:avLst/>
-          </a:prstGeom>
-          <a:noFill/>
-          <a:ln w="9525">
-            <a:solidFill>
-              <a:srgbClr val="D6D2C7"/>
-            </a:solidFill>
-            <a:prstDash val="solid"/>
-          </a:ln>
-        </p:spPr>
-      </p:sp>
-      <p:sp>
-        <p:nvSpPr>
-          <p:cNvPr id="11" name="Text 9"/>
-          <p:cNvSpPr/>
-          <p:nvPr/>
-        </p:nvSpPr>
-        <p:spPr>
-          <a:xfrm>
-            <a:off x="457200" y="3703320"/>
-            <a:ext cx="8229600" cy="320040"/>
-          </a:xfrm>
-          <a:prstGeom prst="rect">
-            <a:avLst/>
-          </a:prstGeom>
-          <a:noFill/>
-          <a:ln/>
-        </p:spPr>
-        <p:txBody>
-          <a:bodyPr wrap="square" lIns="0" tIns="0" rIns="0" bIns="0" rtlCol="0" anchor="ctr"/>
-          <a:lstStyle/>
-          <a:p>
-            <a:pPr indent="0" marL="0">
-              <a:buNone/>
-            </a:pPr>
-            <a:r>
-              <a:rPr lang="en-US" sz="1900" i="1" dirty="0">
-                <a:solidFill>
-                  <a:srgbClr val="0A0A0A"/>
-                </a:solidFill>
-                <a:latin typeface="Georgia" pitchFamily="34" charset="0"/>
-                <a:ea typeface="Georgia" pitchFamily="34" charset="-122"/>
-                <a:cs typeface="Georgia" pitchFamily="34" charset="-120"/>
-              </a:rPr>
-              <a:t>Vous gardez la maîtrise du calendrier</a:t>
-            </a:r>
-            <a:endParaRPr lang="en-US" sz="1900" dirty="0"/>
-          </a:p>
-        </p:txBody>
-      </p:sp>
-      <p:sp>
-        <p:nvSpPr>
-          <p:cNvPr id="12" name="Text 10"/>
-          <p:cNvSpPr/>
-          <p:nvPr/>
-        </p:nvSpPr>
-        <p:spPr>
-          <a:xfrm>
-            <a:off x="457200" y="4041648"/>
-            <a:ext cx="8229600" cy="457200"/>
-          </a:xfrm>
-          <a:prstGeom prst="rect">
-            <a:avLst/>
-          </a:prstGeom>
-          <a:noFill/>
-          <a:ln/>
-        </p:spPr>
-        <p:txBody>
-          <a:bodyPr wrap="square" lIns="0" tIns="0" rIns="0" bIns="0" rtlCol="0" anchor="ctr"/>
-          <a:lstStyle/>
-          <a:p>
-            <a:pPr indent="0" marL="0">
-              <a:buNone/>
-            </a:pPr>
-            <a:r>
-              <a:rPr lang="en-US" sz="1200" dirty="0">
-                <a:solidFill>
-                  <a:srgbClr val="6B6B6B"/>
-                </a:solidFill>
-                <a:latin typeface="Calibri" pitchFamily="34" charset="0"/>
-                <a:ea typeface="Calibri" pitchFamily="34" charset="-122"/>
-                <a:cs typeface="Calibri" pitchFamily="34" charset="-120"/>
-              </a:rPr>
-              <a:t>Date d’ouverture, durée, communication. Une révélation par drop, jamais en parallèle avec votre boutique propre.</a:t>
-            </a:r>
-            <a:endParaRPr lang="en-US" sz="1200" dirty="0"/>
-          </a:p>
-        </p:txBody>
-      </p:sp>
-      <p:sp>
-        <p:nvSpPr>
-          <p:cNvPr id="13" name="Text 11"/>
-          <p:cNvSpPr/>
-          <p:nvPr/>
-        </p:nvSpPr>
-        <p:spPr>
-          <a:xfrm>
-            <a:off x="457200" y="4800600"/>
-            <a:ext cx="1371600" cy="274320"/>
-          </a:xfrm>
-          <a:prstGeom prst="rect">
-            <a:avLst/>
-          </a:prstGeom>
-          <a:noFill/>
-          <a:ln/>
-        </p:spPr>
-        <p:txBody>
-          <a:bodyPr wrap="square" lIns="0" tIns="0" rIns="0" bIns="0" rtlCol="0" anchor="ctr"/>
-          <a:lstStyle/>
-          <a:p>
-            <a:pPr indent="0" marL="0">
-              <a:buNone/>
-            </a:pPr>
-            <a:r>
-              <a:rPr lang="en-US" sz="1100" i="1" dirty="0">
-                <a:solidFill>
-                  <a:srgbClr val="0A0A0A"/>
-                </a:solidFill>
-                <a:latin typeface="Georgia" pitchFamily="34" charset="0"/>
-                <a:ea typeface="Georgia" pitchFamily="34" charset="-122"/>
-                <a:cs typeface="Georgia" pitchFamily="34" charset="-120"/>
-              </a:rPr>
-              <a:t>Drop №</a:t>
-            </a:r>
-            <a:endParaRPr lang="en-US" sz="1100" dirty="0"/>
-          </a:p>
-        </p:txBody>
-      </p:sp>
-      <p:sp>
-        <p:nvSpPr>
-          <p:cNvPr id="14" name="Text 12"/>
-          <p:cNvSpPr/>
-          <p:nvPr/>
-        </p:nvSpPr>
-        <p:spPr>
-          <a:xfrm>
-            <a:off x="8321040" y="4800600"/>
-            <a:ext cx="731520" cy="228600"/>
-          </a:xfrm>
-          <a:prstGeom prst="rect">
-            <a:avLst/>
-          </a:prstGeom>
-          <a:noFill/>
-          <a:ln/>
-        </p:spPr>
-        <p:txBody>
-          <a:bodyPr wrap="square" lIns="0" tIns="0" rIns="0" bIns="0" rtlCol="0" anchor="ctr"/>
-          <a:lstStyle/>
-          <a:p>
-            <a:pPr algn="r" indent="0" marL="0">
-              <a:buNone/>
-            </a:pPr>
-            <a:r>
-              <a:rPr lang="en-US" sz="900" i="1" dirty="0">
-                <a:solidFill>
-                  <a:srgbClr val="6B6B6B"/>
-                </a:solidFill>
-                <a:latin typeface="Georgia" pitchFamily="34" charset="0"/>
-                <a:ea typeface="Georgia" pitchFamily="34" charset="-122"/>
-                <a:cs typeface="Georgia" pitchFamily="34" charset="-120"/>
-              </a:rPr>
-              <a:t>№ 06 / 10</a:t>
+              <a:t>№ 06 / 12</a:t>
             </a:r>
             <a:endParaRPr lang="en-US" sz="900" dirty="0"/>
           </a:p>
@@ -5126,7 +8317,7 @@
         <p:spPr>
           <a:xfrm>
             <a:off x="457200" y="457200"/>
-            <a:ext cx="5486400" cy="228600"/>
+            <a:ext cx="6400800" cy="228600"/>
           </a:xfrm>
           <a:prstGeom prst="rect">
             <a:avLst/>
@@ -5150,7 +8341,7 @@
                 <a:ea typeface="Calibri" pitchFamily="34" charset="-122"/>
                 <a:cs typeface="Calibri" pitchFamily="34" charset="-120"/>
               </a:rPr>
-              <a:t>UN DROP, DE A À Z</a:t>
+              <a:t>CE QUE VOUS APPRENEZ</a:t>
             </a:r>
             <a:endParaRPr lang="en-US" sz="900" dirty="0"/>
           </a:p>
@@ -5212,7 +8403,7 @@
                 <a:ea typeface="Georgia" pitchFamily="34" charset="-122"/>
                 <a:cs typeface="Georgia" pitchFamily="34" charset="-120"/>
               </a:rPr>
-              <a:t>Du contrat à la révélation, en six étapes.</a:t>
+              <a:t>Trois données qu’aucune étude ne vous donnera.</a:t>
             </a:r>
             <a:endParaRPr lang="en-US" sz="2600" dirty="0"/>
           </a:p>
@@ -5226,24 +8417,24 @@
         </p:nvSpPr>
         <p:spPr>
           <a:xfrm>
-            <a:off x="457200" y="1874520"/>
-            <a:ext cx="1097280" cy="420624"/>
-          </a:xfrm>
-          <a:prstGeom prst="rect">
-            <a:avLst/>
-          </a:prstGeom>
-          <a:noFill/>
-          <a:ln/>
-        </p:spPr>
-        <p:txBody>
-          <a:bodyPr wrap="square" lIns="0" tIns="0" rIns="0" bIns="0" rtlCol="0" anchor="ctr"/>
-          <a:lstStyle/>
-          <a:p>
-            <a:pPr indent="0" marL="0">
-              <a:buNone/>
-            </a:pPr>
-            <a:r>
-              <a:rPr lang="en-US" sz="1600" i="1" dirty="0">
+            <a:off x="457200" y="1920240"/>
+            <a:ext cx="731520" cy="868680"/>
+          </a:xfrm>
+          <a:prstGeom prst="rect">
+            <a:avLst/>
+          </a:prstGeom>
+          <a:noFill/>
+          <a:ln/>
+        </p:spPr>
+        <p:txBody>
+          <a:bodyPr wrap="square" lIns="0" tIns="0" rIns="0" bIns="0" rtlCol="0" anchor="ctr"/>
+          <a:lstStyle/>
+          <a:p>
+            <a:pPr indent="0" marL="0">
+              <a:buNone/>
+            </a:pPr>
+            <a:r>
+              <a:rPr lang="en-US" sz="3200" i="1" dirty="0">
                 <a:solidFill>
                   <a:srgbClr val="C9A96E"/>
                 </a:solidFill>
@@ -5251,9 +8442,9 @@
                 <a:ea typeface="Georgia" pitchFamily="34" charset="-122"/>
                 <a:cs typeface="Georgia" pitchFamily="34" charset="-120"/>
               </a:rPr>
-              <a:t>J-30</a:t>
-            </a:r>
-            <a:endParaRPr lang="en-US" sz="1600" dirty="0"/>
+              <a:t>01</a:t>
+            </a:r>
+            <a:endParaRPr lang="en-US" sz="3200" dirty="0"/>
           </a:p>
         </p:txBody>
       </p:sp>
@@ -5265,24 +8456,24 @@
         </p:nvSpPr>
         <p:spPr>
           <a:xfrm>
-            <a:off x="1554480" y="1874520"/>
-            <a:ext cx="7132320" cy="420624"/>
-          </a:xfrm>
-          <a:prstGeom prst="rect">
-            <a:avLst/>
-          </a:prstGeom>
-          <a:noFill/>
-          <a:ln/>
-        </p:spPr>
-        <p:txBody>
-          <a:bodyPr wrap="square" lIns="0" tIns="0" rIns="0" bIns="0" rtlCol="0" anchor="ctr"/>
-          <a:lstStyle/>
-          <a:p>
-            <a:pPr indent="0" marL="0">
-              <a:buNone/>
-            </a:pPr>
-            <a:r>
-              <a:rPr lang="en-US" sz="1300" dirty="0">
+            <a:off x="1280160" y="1993392"/>
+            <a:ext cx="7406640" cy="320040"/>
+          </a:xfrm>
+          <a:prstGeom prst="rect">
+            <a:avLst/>
+          </a:prstGeom>
+          <a:noFill/>
+          <a:ln/>
+        </p:spPr>
+        <p:txBody>
+          <a:bodyPr wrap="square" lIns="0" tIns="0" rIns="0" bIns="0" rtlCol="0" anchor="ctr"/>
+          <a:lstStyle/>
+          <a:p>
+            <a:pPr indent="0" marL="0">
+              <a:buNone/>
+            </a:pPr>
+            <a:r>
+              <a:rPr lang="en-US" sz="1300" b="1" spc="200" kern="0" dirty="0">
                 <a:solidFill>
                   <a:srgbClr val="0A0A0A"/>
                 </a:solidFill>
@@ -5290,7 +8481,7 @@
                 <a:ea typeface="Calibri" pitchFamily="34" charset="-122"/>
                 <a:cs typeface="Calibri" pitchFamily="34" charset="-120"/>
               </a:rPr>
-              <a:t>Contrat-cadre  +  brief produit  +  onboarding marque</a:t>
+              <a:t>Le prix de marché vrai</a:t>
             </a:r>
             <a:endParaRPr lang="en-US" sz="1300" dirty="0"/>
           </a:p>
@@ -5298,13 +8489,52 @@
       </p:sp>
       <p:sp>
         <p:nvSpPr>
-          <p:cNvPr id="7" name="Shape 5"/>
-          <p:cNvSpPr/>
-          <p:nvPr/>
-        </p:nvSpPr>
-        <p:spPr>
-          <a:xfrm>
-            <a:off x="457200" y="2276856"/>
+          <p:cNvPr id="7" name="Text 5"/>
+          <p:cNvSpPr/>
+          <p:nvPr/>
+        </p:nvSpPr>
+        <p:spPr>
+          <a:xfrm>
+            <a:off x="1280160" y="2304288"/>
+            <a:ext cx="7406640" cy="457200"/>
+          </a:xfrm>
+          <a:prstGeom prst="rect">
+            <a:avLst/>
+          </a:prstGeom>
+          <a:noFill/>
+          <a:ln/>
+        </p:spPr>
+        <p:txBody>
+          <a:bodyPr wrap="square" lIns="0" tIns="0" rIns="0" bIns="0" rtlCol="0" anchor="ctr"/>
+          <a:lstStyle/>
+          <a:p>
+            <a:pPr indent="0" marL="0">
+              <a:buNone/>
+            </a:pPr>
+            <a:r>
+              <a:rPr lang="en-US" sz="1100" dirty="0">
+                <a:solidFill>
+                  <a:srgbClr val="6B6B6B"/>
+                </a:solidFill>
+                <a:latin typeface="Calibri" pitchFamily="34" charset="0"/>
+                <a:ea typeface="Calibri" pitchFamily="34" charset="-122"/>
+                <a:cs typeface="Calibri" pitchFamily="34" charset="-120"/>
+              </a:rPr>
+              <a:t>Ce que les N collectionneurs les plus motivés sont prêts à payer aujourd’hui. Pas une moyenne, pas un sondage. Un chiffre.</a:t>
+            </a:r>
+            <a:endParaRPr lang="en-US" sz="1100" dirty="0"/>
+          </a:p>
+        </p:txBody>
+      </p:sp>
+      <p:sp>
+        <p:nvSpPr>
+          <p:cNvPr id="8" name="Shape 6"/>
+          <p:cNvSpPr/>
+          <p:nvPr/>
+        </p:nvSpPr>
+        <p:spPr>
+          <a:xfrm>
+            <a:off x="457200" y="2743200"/>
             <a:ext cx="8229600" cy="0"/>
           </a:xfrm>
           <a:prstGeom prst="line">
@@ -5321,30 +8551,30 @@
       </p:sp>
       <p:sp>
         <p:nvSpPr>
-          <p:cNvPr id="8" name="Text 6"/>
-          <p:cNvSpPr/>
-          <p:nvPr/>
-        </p:nvSpPr>
-        <p:spPr>
-          <a:xfrm>
-            <a:off x="457200" y="2295144"/>
-            <a:ext cx="1097280" cy="420624"/>
-          </a:xfrm>
-          <a:prstGeom prst="rect">
-            <a:avLst/>
-          </a:prstGeom>
-          <a:noFill/>
-          <a:ln/>
-        </p:spPr>
-        <p:txBody>
-          <a:bodyPr wrap="square" lIns="0" tIns="0" rIns="0" bIns="0" rtlCol="0" anchor="ctr"/>
-          <a:lstStyle/>
-          <a:p>
-            <a:pPr indent="0" marL="0">
-              <a:buNone/>
-            </a:pPr>
-            <a:r>
-              <a:rPr lang="en-US" sz="1600" i="1" dirty="0">
+          <p:cNvPr id="9" name="Text 7"/>
+          <p:cNvSpPr/>
+          <p:nvPr/>
+        </p:nvSpPr>
+        <p:spPr>
+          <a:xfrm>
+            <a:off x="457200" y="2788920"/>
+            <a:ext cx="731520" cy="868680"/>
+          </a:xfrm>
+          <a:prstGeom prst="rect">
+            <a:avLst/>
+          </a:prstGeom>
+          <a:noFill/>
+          <a:ln/>
+        </p:spPr>
+        <p:txBody>
+          <a:bodyPr wrap="square" lIns="0" tIns="0" rIns="0" bIns="0" rtlCol="0" anchor="ctr"/>
+          <a:lstStyle/>
+          <a:p>
+            <a:pPr indent="0" marL="0">
+              <a:buNone/>
+            </a:pPr>
+            <a:r>
+              <a:rPr lang="en-US" sz="3200" i="1" dirty="0">
                 <a:solidFill>
                   <a:srgbClr val="C9A96E"/>
                 </a:solidFill>
@@ -5352,38 +8582,38 @@
                 <a:ea typeface="Georgia" pitchFamily="34" charset="-122"/>
                 <a:cs typeface="Georgia" pitchFamily="34" charset="-120"/>
               </a:rPr>
-              <a:t>J-14</a:t>
-            </a:r>
-            <a:endParaRPr lang="en-US" sz="1600" dirty="0"/>
-          </a:p>
-        </p:txBody>
-      </p:sp>
-      <p:sp>
-        <p:nvSpPr>
-          <p:cNvPr id="9" name="Text 7"/>
-          <p:cNvSpPr/>
-          <p:nvPr/>
-        </p:nvSpPr>
-        <p:spPr>
-          <a:xfrm>
-            <a:off x="1554480" y="2295144"/>
-            <a:ext cx="7132320" cy="420624"/>
-          </a:xfrm>
-          <a:prstGeom prst="rect">
-            <a:avLst/>
-          </a:prstGeom>
-          <a:noFill/>
-          <a:ln/>
-        </p:spPr>
-        <p:txBody>
-          <a:bodyPr wrap="square" lIns="0" tIns="0" rIns="0" bIns="0" rtlCol="0" anchor="ctr"/>
-          <a:lstStyle/>
-          <a:p>
-            <a:pPr indent="0" marL="0">
-              <a:buNone/>
-            </a:pPr>
-            <a:r>
-              <a:rPr lang="en-US" sz="1300" dirty="0">
+              <a:t>02</a:t>
+            </a:r>
+            <a:endParaRPr lang="en-US" sz="3200" dirty="0"/>
+          </a:p>
+        </p:txBody>
+      </p:sp>
+      <p:sp>
+        <p:nvSpPr>
+          <p:cNvPr id="10" name="Text 8"/>
+          <p:cNvSpPr/>
+          <p:nvPr/>
+        </p:nvSpPr>
+        <p:spPr>
+          <a:xfrm>
+            <a:off x="1280160" y="2862072"/>
+            <a:ext cx="7406640" cy="320040"/>
+          </a:xfrm>
+          <a:prstGeom prst="rect">
+            <a:avLst/>
+          </a:prstGeom>
+          <a:noFill/>
+          <a:ln/>
+        </p:spPr>
+        <p:txBody>
+          <a:bodyPr wrap="square" lIns="0" tIns="0" rIns="0" bIns="0" rtlCol="0" anchor="ctr"/>
+          <a:lstStyle/>
+          <a:p>
+            <a:pPr indent="0" marL="0">
+              <a:buNone/>
+            </a:pPr>
+            <a:r>
+              <a:rPr lang="en-US" sz="1300" b="1" spc="200" kern="0" dirty="0">
                 <a:solidFill>
                   <a:srgbClr val="0A0A0A"/>
                 </a:solidFill>
@@ -5391,7 +8621,7 @@
                 <a:ea typeface="Calibri" pitchFamily="34" charset="-122"/>
                 <a:cs typeface="Calibri" pitchFamily="34" charset="-120"/>
               </a:rPr>
-              <a:t>Validation pièce, photographie, storytelling</a:t>
+              <a:t>La profondeur de demande</a:t>
             </a:r>
             <a:endParaRPr lang="en-US" sz="1300" dirty="0"/>
           </a:p>
@@ -5399,13 +8629,52 @@
       </p:sp>
       <p:sp>
         <p:nvSpPr>
-          <p:cNvPr id="10" name="Shape 8"/>
-          <p:cNvSpPr/>
-          <p:nvPr/>
-        </p:nvSpPr>
-        <p:spPr>
-          <a:xfrm>
-            <a:off x="457200" y="2697480"/>
+          <p:cNvPr id="11" name="Text 9"/>
+          <p:cNvSpPr/>
+          <p:nvPr/>
+        </p:nvSpPr>
+        <p:spPr>
+          <a:xfrm>
+            <a:off x="1280160" y="3172968"/>
+            <a:ext cx="7406640" cy="457200"/>
+          </a:xfrm>
+          <a:prstGeom prst="rect">
+            <a:avLst/>
+          </a:prstGeom>
+          <a:noFill/>
+          <a:ln/>
+        </p:spPr>
+        <p:txBody>
+          <a:bodyPr wrap="square" lIns="0" tIns="0" rIns="0" bIns="0" rtlCol="0" anchor="ctr"/>
+          <a:lstStyle/>
+          <a:p>
+            <a:pPr indent="0" marL="0">
+              <a:buNone/>
+            </a:pPr>
+            <a:r>
+              <a:rPr lang="en-US" sz="1100" dirty="0">
+                <a:solidFill>
+                  <a:srgbClr val="6B6B6B"/>
+                </a:solidFill>
+                <a:latin typeface="Calibri" pitchFamily="34" charset="0"/>
+                <a:ea typeface="Calibri" pitchFamily="34" charset="-122"/>
+                <a:cs typeface="Calibri" pitchFamily="34" charset="-120"/>
+              </a:rPr>
+              <a:t>Combien d’offres reçues au total, leur distribution, l’écart entre la première et la N-ième. Indicateur direct pour les prochaines références.</a:t>
+            </a:r>
+            <a:endParaRPr lang="en-US" sz="1100" dirty="0"/>
+          </a:p>
+        </p:txBody>
+      </p:sp>
+      <p:sp>
+        <p:nvSpPr>
+          <p:cNvPr id="12" name="Shape 10"/>
+          <p:cNvSpPr/>
+          <p:nvPr/>
+        </p:nvSpPr>
+        <p:spPr>
+          <a:xfrm>
+            <a:off x="457200" y="3611880"/>
             <a:ext cx="8229600" cy="0"/>
           </a:xfrm>
           <a:prstGeom prst="line">
@@ -5422,30 +8691,30 @@
       </p:sp>
       <p:sp>
         <p:nvSpPr>
-          <p:cNvPr id="11" name="Text 9"/>
-          <p:cNvSpPr/>
-          <p:nvPr/>
-        </p:nvSpPr>
-        <p:spPr>
-          <a:xfrm>
-            <a:off x="457200" y="2715768"/>
-            <a:ext cx="1097280" cy="420624"/>
-          </a:xfrm>
-          <a:prstGeom prst="rect">
-            <a:avLst/>
-          </a:prstGeom>
-          <a:noFill/>
-          <a:ln/>
-        </p:spPr>
-        <p:txBody>
-          <a:bodyPr wrap="square" lIns="0" tIns="0" rIns="0" bIns="0" rtlCol="0" anchor="ctr"/>
-          <a:lstStyle/>
-          <a:p>
-            <a:pPr indent="0" marL="0">
-              <a:buNone/>
-            </a:pPr>
-            <a:r>
-              <a:rPr lang="en-US" sz="1600" i="1" dirty="0">
+          <p:cNvPr id="13" name="Text 11"/>
+          <p:cNvSpPr/>
+          <p:nvPr/>
+        </p:nvSpPr>
+        <p:spPr>
+          <a:xfrm>
+            <a:off x="457200" y="3657600"/>
+            <a:ext cx="731520" cy="868680"/>
+          </a:xfrm>
+          <a:prstGeom prst="rect">
+            <a:avLst/>
+          </a:prstGeom>
+          <a:noFill/>
+          <a:ln/>
+        </p:spPr>
+        <p:txBody>
+          <a:bodyPr wrap="square" lIns="0" tIns="0" rIns="0" bIns="0" rtlCol="0" anchor="ctr"/>
+          <a:lstStyle/>
+          <a:p>
+            <a:pPr indent="0" marL="0">
+              <a:buNone/>
+            </a:pPr>
+            <a:r>
+              <a:rPr lang="en-US" sz="3200" i="1" dirty="0">
                 <a:solidFill>
                   <a:srgbClr val="C9A96E"/>
                 </a:solidFill>
@@ -5453,38 +8722,38 @@
                 <a:ea typeface="Georgia" pitchFamily="34" charset="-122"/>
                 <a:cs typeface="Georgia" pitchFamily="34" charset="-120"/>
               </a:rPr>
-              <a:t>J-7</a:t>
-            </a:r>
-            <a:endParaRPr lang="en-US" sz="1600" dirty="0"/>
-          </a:p>
-        </p:txBody>
-      </p:sp>
-      <p:sp>
-        <p:nvSpPr>
-          <p:cNvPr id="12" name="Text 10"/>
-          <p:cNvSpPr/>
-          <p:nvPr/>
-        </p:nvSpPr>
-        <p:spPr>
-          <a:xfrm>
-            <a:off x="1554480" y="2715768"/>
-            <a:ext cx="7132320" cy="420624"/>
-          </a:xfrm>
-          <a:prstGeom prst="rect">
-            <a:avLst/>
-          </a:prstGeom>
-          <a:noFill/>
-          <a:ln/>
-        </p:spPr>
-        <p:txBody>
-          <a:bodyPr wrap="square" lIns="0" tIns="0" rIns="0" bIns="0" rtlCol="0" anchor="ctr"/>
-          <a:lstStyle/>
-          <a:p>
-            <a:pPr indent="0" marL="0">
-              <a:buNone/>
-            </a:pPr>
-            <a:r>
-              <a:rPr lang="en-US" sz="1300" dirty="0">
+              <a:t>03</a:t>
+            </a:r>
+            <a:endParaRPr lang="en-US" sz="3200" dirty="0"/>
+          </a:p>
+        </p:txBody>
+      </p:sp>
+      <p:sp>
+        <p:nvSpPr>
+          <p:cNvPr id="14" name="Text 12"/>
+          <p:cNvSpPr/>
+          <p:nvPr/>
+        </p:nvSpPr>
+        <p:spPr>
+          <a:xfrm>
+            <a:off x="1280160" y="3730752"/>
+            <a:ext cx="7406640" cy="320040"/>
+          </a:xfrm>
+          <a:prstGeom prst="rect">
+            <a:avLst/>
+          </a:prstGeom>
+          <a:noFill/>
+          <a:ln/>
+        </p:spPr>
+        <p:txBody>
+          <a:bodyPr wrap="square" lIns="0" tIns="0" rIns="0" bIns="0" rtlCol="0" anchor="ctr"/>
+          <a:lstStyle/>
+          <a:p>
+            <a:pPr indent="0" marL="0">
+              <a:buNone/>
+            </a:pPr>
+            <a:r>
+              <a:rPr lang="en-US" sz="1300" b="1" spc="200" kern="0" dirty="0">
                 <a:solidFill>
                   <a:srgbClr val="0A0A0A"/>
                 </a:solidFill>
@@ -5492,7 +8761,7 @@
                 <a:ea typeface="Calibri" pitchFamily="34" charset="-122"/>
                 <a:cs typeface="Calibri" pitchFamily="34" charset="-120"/>
               </a:rPr>
-              <a:t>Annonce dans la newsletter (~5 000 abonnés ciblés)</a:t>
+              <a:t>Le profil acheteur</a:t>
             </a:r>
             <a:endParaRPr lang="en-US" sz="1300" dirty="0"/>
           </a:p>
@@ -5500,127 +8769,81 @@
       </p:sp>
       <p:sp>
         <p:nvSpPr>
-          <p:cNvPr id="13" name="Shape 11"/>
-          <p:cNvSpPr/>
-          <p:nvPr/>
-        </p:nvSpPr>
-        <p:spPr>
-          <a:xfrm>
-            <a:off x="457200" y="3118104"/>
-            <a:ext cx="8229600" cy="0"/>
-          </a:xfrm>
-          <a:prstGeom prst="line">
-            <a:avLst/>
-          </a:prstGeom>
-          <a:noFill/>
-          <a:ln w="9525">
-            <a:solidFill>
-              <a:srgbClr val="D6D2C7"/>
-            </a:solidFill>
-            <a:prstDash val="solid"/>
-          </a:ln>
-        </p:spPr>
-      </p:sp>
-      <p:sp>
-        <p:nvSpPr>
-          <p:cNvPr id="14" name="Text 12"/>
-          <p:cNvSpPr/>
-          <p:nvPr/>
-        </p:nvSpPr>
-        <p:spPr>
-          <a:xfrm>
-            <a:off x="457200" y="3136392"/>
-            <a:ext cx="1097280" cy="420624"/>
-          </a:xfrm>
-          <a:prstGeom prst="rect">
-            <a:avLst/>
-          </a:prstGeom>
-          <a:noFill/>
-          <a:ln/>
-        </p:spPr>
-        <p:txBody>
-          <a:bodyPr wrap="square" lIns="0" tIns="0" rIns="0" bIns="0" rtlCol="0" anchor="ctr"/>
-          <a:lstStyle/>
-          <a:p>
-            <a:pPr indent="0" marL="0">
-              <a:buNone/>
-            </a:pPr>
-            <a:r>
-              <a:rPr lang="en-US" sz="1600" i="1" dirty="0">
-                <a:solidFill>
-                  <a:srgbClr val="C9A96E"/>
+          <p:cNvPr id="15" name="Text 13"/>
+          <p:cNvSpPr/>
+          <p:nvPr/>
+        </p:nvSpPr>
+        <p:spPr>
+          <a:xfrm>
+            <a:off x="1280160" y="4041648"/>
+            <a:ext cx="7406640" cy="457200"/>
+          </a:xfrm>
+          <a:prstGeom prst="rect">
+            <a:avLst/>
+          </a:prstGeom>
+          <a:noFill/>
+          <a:ln/>
+        </p:spPr>
+        <p:txBody>
+          <a:bodyPr wrap="square" lIns="0" tIns="0" rIns="0" bIns="0" rtlCol="0" anchor="ctr"/>
+          <a:lstStyle/>
+          <a:p>
+            <a:pPr indent="0" marL="0">
+              <a:buNone/>
+            </a:pPr>
+            <a:r>
+              <a:rPr lang="en-US" sz="1100" dirty="0">
+                <a:solidFill>
+                  <a:srgbClr val="6B6B6B"/>
+                </a:solidFill>
+                <a:latin typeface="Calibri" pitchFamily="34" charset="0"/>
+                <a:ea typeface="Calibri" pitchFamily="34" charset="-122"/>
+                <a:cs typeface="Calibri" pitchFamily="34" charset="-120"/>
+              </a:rPr>
+              <a:t>Combien de collectionneurs ont KYC validé et bidé. Données enrichies (pays, segments, fidélité) sans coût d’acquisition pour vous.</a:t>
+            </a:r>
+            <a:endParaRPr lang="en-US" sz="1100" dirty="0"/>
+          </a:p>
+        </p:txBody>
+      </p:sp>
+      <p:sp>
+        <p:nvSpPr>
+          <p:cNvPr id="16" name="Text 14"/>
+          <p:cNvSpPr/>
+          <p:nvPr/>
+        </p:nvSpPr>
+        <p:spPr>
+          <a:xfrm>
+            <a:off x="457200" y="4800600"/>
+            <a:ext cx="1371600" cy="274320"/>
+          </a:xfrm>
+          <a:prstGeom prst="rect">
+            <a:avLst/>
+          </a:prstGeom>
+          <a:noFill/>
+          <a:ln/>
+        </p:spPr>
+        <p:txBody>
+          <a:bodyPr wrap="square" lIns="0" tIns="0" rIns="0" bIns="0" rtlCol="0" anchor="ctr"/>
+          <a:lstStyle/>
+          <a:p>
+            <a:pPr indent="0" marL="0">
+              <a:buNone/>
+            </a:pPr>
+            <a:r>
+              <a:rPr lang="en-US" sz="1100" i="1" dirty="0">
+                <a:solidFill>
+                  <a:srgbClr val="0A0A0A"/>
                 </a:solidFill>
                 <a:latin typeface="Georgia" pitchFamily="34" charset="0"/>
                 <a:ea typeface="Georgia" pitchFamily="34" charset="-122"/>
                 <a:cs typeface="Georgia" pitchFamily="34" charset="-120"/>
               </a:rPr>
-              <a:t>J 0</a:t>
-            </a:r>
-            <a:endParaRPr lang="en-US" sz="1600" dirty="0"/>
-          </a:p>
-        </p:txBody>
-      </p:sp>
-      <p:sp>
-        <p:nvSpPr>
-          <p:cNvPr id="15" name="Text 13"/>
-          <p:cNvSpPr/>
-          <p:nvPr/>
-        </p:nvSpPr>
-        <p:spPr>
-          <a:xfrm>
-            <a:off x="1554480" y="3136392"/>
-            <a:ext cx="7132320" cy="420624"/>
-          </a:xfrm>
-          <a:prstGeom prst="rect">
-            <a:avLst/>
-          </a:prstGeom>
-          <a:noFill/>
-          <a:ln/>
-        </p:spPr>
-        <p:txBody>
-          <a:bodyPr wrap="square" lIns="0" tIns="0" rIns="0" bIns="0" rtlCol="0" anchor="ctr"/>
-          <a:lstStyle/>
-          <a:p>
-            <a:pPr indent="0" marL="0">
-              <a:buNone/>
-            </a:pPr>
-            <a:r>
-              <a:rPr lang="en-US" sz="1300" dirty="0">
-                <a:solidFill>
-                  <a:srgbClr val="0A0A0A"/>
-                </a:solidFill>
-                <a:latin typeface="Calibri" pitchFamily="34" charset="0"/>
-                <a:ea typeface="Calibri" pitchFamily="34" charset="-122"/>
-                <a:cs typeface="Calibri" pitchFamily="34" charset="-120"/>
-              </a:rPr>
-              <a:t>Ouverture du drop  ·  jeudi 9h CET</a:t>
-            </a:r>
-            <a:endParaRPr lang="en-US" sz="1300" dirty="0"/>
-          </a:p>
-        </p:txBody>
-      </p:sp>
-      <p:sp>
-        <p:nvSpPr>
-          <p:cNvPr id="16" name="Shape 14"/>
-          <p:cNvSpPr/>
-          <p:nvPr/>
-        </p:nvSpPr>
-        <p:spPr>
-          <a:xfrm>
-            <a:off x="457200" y="3538728"/>
-            <a:ext cx="8229600" cy="0"/>
-          </a:xfrm>
-          <a:prstGeom prst="line">
-            <a:avLst/>
-          </a:prstGeom>
-          <a:noFill/>
-          <a:ln w="9525">
-            <a:solidFill>
-              <a:srgbClr val="D6D2C7"/>
-            </a:solidFill>
-            <a:prstDash val="solid"/>
-          </a:ln>
-        </p:spPr>
+              <a:t>Drop №</a:t>
+            </a:r>
+            <a:endParaRPr lang="en-US" sz="1100" dirty="0"/>
+          </a:p>
+        </p:txBody>
       </p:sp>
       <p:sp>
         <p:nvSpPr>
@@ -5630,250 +8853,32 @@
         </p:nvSpPr>
         <p:spPr>
           <a:xfrm>
-            <a:off x="457200" y="3557016"/>
-            <a:ext cx="1097280" cy="420624"/>
-          </a:xfrm>
-          <a:prstGeom prst="rect">
-            <a:avLst/>
-          </a:prstGeom>
-          <a:noFill/>
-          <a:ln/>
-        </p:spPr>
-        <p:txBody>
-          <a:bodyPr wrap="square" lIns="0" tIns="0" rIns="0" bIns="0" rtlCol="0" anchor="ctr"/>
-          <a:lstStyle/>
-          <a:p>
-            <a:pPr indent="0" marL="0">
-              <a:buNone/>
-            </a:pPr>
-            <a:r>
-              <a:rPr lang="en-US" sz="1600" i="1" dirty="0">
-                <a:solidFill>
-                  <a:srgbClr val="C9A96E"/>
+            <a:off x="8321040" y="4800600"/>
+            <a:ext cx="731520" cy="228600"/>
+          </a:xfrm>
+          <a:prstGeom prst="rect">
+            <a:avLst/>
+          </a:prstGeom>
+          <a:noFill/>
+          <a:ln/>
+        </p:spPr>
+        <p:txBody>
+          <a:bodyPr wrap="square" lIns="0" tIns="0" rIns="0" bIns="0" rtlCol="0" anchor="ctr"/>
+          <a:lstStyle/>
+          <a:p>
+            <a:pPr algn="r" indent="0" marL="0">
+              <a:buNone/>
+            </a:pPr>
+            <a:r>
+              <a:rPr lang="en-US" sz="900" i="1" dirty="0">
+                <a:solidFill>
+                  <a:srgbClr val="6B6B6B"/>
                 </a:solidFill>
                 <a:latin typeface="Georgia" pitchFamily="34" charset="0"/>
                 <a:ea typeface="Georgia" pitchFamily="34" charset="-122"/>
                 <a:cs typeface="Georgia" pitchFamily="34" charset="-120"/>
               </a:rPr>
-              <a:t>J+5</a:t>
-            </a:r>
-            <a:endParaRPr lang="en-US" sz="1600" dirty="0"/>
-          </a:p>
-        </p:txBody>
-      </p:sp>
-      <p:sp>
-        <p:nvSpPr>
-          <p:cNvPr id="18" name="Text 16"/>
-          <p:cNvSpPr/>
-          <p:nvPr/>
-        </p:nvSpPr>
-        <p:spPr>
-          <a:xfrm>
-            <a:off x="1554480" y="3557016"/>
-            <a:ext cx="7132320" cy="420624"/>
-          </a:xfrm>
-          <a:prstGeom prst="rect">
-            <a:avLst/>
-          </a:prstGeom>
-          <a:noFill/>
-          <a:ln/>
-        </p:spPr>
-        <p:txBody>
-          <a:bodyPr wrap="square" lIns="0" tIns="0" rIns="0" bIns="0" rtlCol="0" anchor="ctr"/>
-          <a:lstStyle/>
-          <a:p>
-            <a:pPr indent="0" marL="0">
-              <a:buNone/>
-            </a:pPr>
-            <a:r>
-              <a:rPr lang="en-US" sz="1300" dirty="0">
-                <a:solidFill>
-                  <a:srgbClr val="0A0A0A"/>
-                </a:solidFill>
-                <a:latin typeface="Calibri" pitchFamily="34" charset="0"/>
-                <a:ea typeface="Calibri" pitchFamily="34" charset="-122"/>
-                <a:cs typeface="Calibri" pitchFamily="34" charset="-120"/>
-              </a:rPr>
-              <a:t>Révélation  ·  jeudi 18h CET  ·  capture paiements</a:t>
-            </a:r>
-            <a:endParaRPr lang="en-US" sz="1300" dirty="0"/>
-          </a:p>
-        </p:txBody>
-      </p:sp>
-      <p:sp>
-        <p:nvSpPr>
-          <p:cNvPr id="19" name="Shape 17"/>
-          <p:cNvSpPr/>
-          <p:nvPr/>
-        </p:nvSpPr>
-        <p:spPr>
-          <a:xfrm>
-            <a:off x="457200" y="3959352"/>
-            <a:ext cx="8229600" cy="0"/>
-          </a:xfrm>
-          <a:prstGeom prst="line">
-            <a:avLst/>
-          </a:prstGeom>
-          <a:noFill/>
-          <a:ln w="9525">
-            <a:solidFill>
-              <a:srgbClr val="D6D2C7"/>
-            </a:solidFill>
-            <a:prstDash val="solid"/>
-          </a:ln>
-        </p:spPr>
-      </p:sp>
-      <p:sp>
-        <p:nvSpPr>
-          <p:cNvPr id="20" name="Text 18"/>
-          <p:cNvSpPr/>
-          <p:nvPr/>
-        </p:nvSpPr>
-        <p:spPr>
-          <a:xfrm>
-            <a:off x="457200" y="3977640"/>
-            <a:ext cx="1097280" cy="420624"/>
-          </a:xfrm>
-          <a:prstGeom prst="rect">
-            <a:avLst/>
-          </a:prstGeom>
-          <a:noFill/>
-          <a:ln/>
-        </p:spPr>
-        <p:txBody>
-          <a:bodyPr wrap="square" lIns="0" tIns="0" rIns="0" bIns="0" rtlCol="0" anchor="ctr"/>
-          <a:lstStyle/>
-          <a:p>
-            <a:pPr indent="0" marL="0">
-              <a:buNone/>
-            </a:pPr>
-            <a:r>
-              <a:rPr lang="en-US" sz="1600" i="1" dirty="0">
-                <a:solidFill>
-                  <a:srgbClr val="C9A96E"/>
-                </a:solidFill>
-                <a:latin typeface="Georgia" pitchFamily="34" charset="0"/>
-                <a:ea typeface="Georgia" pitchFamily="34" charset="-122"/>
-                <a:cs typeface="Georgia" pitchFamily="34" charset="-120"/>
-              </a:rPr>
-              <a:t>J+19</a:t>
-            </a:r>
-            <a:endParaRPr lang="en-US" sz="1600" dirty="0"/>
-          </a:p>
-        </p:txBody>
-      </p:sp>
-      <p:sp>
-        <p:nvSpPr>
-          <p:cNvPr id="21" name="Text 19"/>
-          <p:cNvSpPr/>
-          <p:nvPr/>
-        </p:nvSpPr>
-        <p:spPr>
-          <a:xfrm>
-            <a:off x="1554480" y="3977640"/>
-            <a:ext cx="7132320" cy="420624"/>
-          </a:xfrm>
-          <a:prstGeom prst="rect">
-            <a:avLst/>
-          </a:prstGeom>
-          <a:noFill/>
-          <a:ln/>
-        </p:spPr>
-        <p:txBody>
-          <a:bodyPr wrap="square" lIns="0" tIns="0" rIns="0" bIns="0" rtlCol="0" anchor="ctr"/>
-          <a:lstStyle/>
-          <a:p>
-            <a:pPr indent="0" marL="0">
-              <a:buNone/>
-            </a:pPr>
-            <a:r>
-              <a:rPr lang="en-US" sz="1300" dirty="0">
-                <a:solidFill>
-                  <a:srgbClr val="0A0A0A"/>
-                </a:solidFill>
-                <a:latin typeface="Calibri" pitchFamily="34" charset="0"/>
-                <a:ea typeface="Calibri" pitchFamily="34" charset="-122"/>
-                <a:cs typeface="Calibri" pitchFamily="34" charset="-120"/>
-              </a:rPr>
-              <a:t>Paiement à la marque (après fenêtre rétractation 14j)</a:t>
-            </a:r>
-            <a:endParaRPr lang="en-US" sz="1300" dirty="0"/>
-          </a:p>
-        </p:txBody>
-      </p:sp>
-      <p:sp>
-        <p:nvSpPr>
-          <p:cNvPr id="22" name="Text 20"/>
-          <p:cNvSpPr/>
-          <p:nvPr/>
-        </p:nvSpPr>
-        <p:spPr>
-          <a:xfrm>
-            <a:off x="457200" y="4800600"/>
-            <a:ext cx="1371600" cy="274320"/>
-          </a:xfrm>
-          <a:prstGeom prst="rect">
-            <a:avLst/>
-          </a:prstGeom>
-          <a:noFill/>
-          <a:ln/>
-        </p:spPr>
-        <p:txBody>
-          <a:bodyPr wrap="square" lIns="0" tIns="0" rIns="0" bIns="0" rtlCol="0" anchor="ctr"/>
-          <a:lstStyle/>
-          <a:p>
-            <a:pPr indent="0" marL="0">
-              <a:buNone/>
-            </a:pPr>
-            <a:r>
-              <a:rPr lang="en-US" sz="1100" i="1" dirty="0">
-                <a:solidFill>
-                  <a:srgbClr val="0A0A0A"/>
-                </a:solidFill>
-                <a:latin typeface="Georgia" pitchFamily="34" charset="0"/>
-                <a:ea typeface="Georgia" pitchFamily="34" charset="-122"/>
-                <a:cs typeface="Georgia" pitchFamily="34" charset="-120"/>
-              </a:rPr>
-              <a:t>Drop №</a:t>
-            </a:r>
-            <a:endParaRPr lang="en-US" sz="1100" dirty="0"/>
-          </a:p>
-        </p:txBody>
-      </p:sp>
-      <p:sp>
-        <p:nvSpPr>
-          <p:cNvPr id="23" name="Text 21"/>
-          <p:cNvSpPr/>
-          <p:nvPr/>
-        </p:nvSpPr>
-        <p:spPr>
-          <a:xfrm>
-            <a:off x="8321040" y="4800600"/>
-            <a:ext cx="731520" cy="228600"/>
-          </a:xfrm>
-          <a:prstGeom prst="rect">
-            <a:avLst/>
-          </a:prstGeom>
-          <a:noFill/>
-          <a:ln/>
-        </p:spPr>
-        <p:txBody>
-          <a:bodyPr wrap="square" lIns="0" tIns="0" rIns="0" bIns="0" rtlCol="0" anchor="ctr"/>
-          <a:lstStyle/>
-          <a:p>
-            <a:pPr algn="r" indent="0" marL="0">
-              <a:buNone/>
-            </a:pPr>
-            <a:r>
-              <a:rPr lang="en-US" sz="900" i="1" dirty="0">
-                <a:solidFill>
-                  <a:srgbClr val="6B6B6B"/>
-                </a:solidFill>
-                <a:latin typeface="Georgia" pitchFamily="34" charset="0"/>
-                <a:ea typeface="Georgia" pitchFamily="34" charset="-122"/>
-                <a:cs typeface="Georgia" pitchFamily="34" charset="-120"/>
-              </a:rPr>
-              <a:t>№ 07 / 10</a:t>
+              <a:t>№ 07 / 12</a:t>
             </a:r>
             <a:endParaRPr lang="en-US" sz="900" dirty="0"/>
           </a:p>
@@ -5893,7 +8898,7 @@
     <p:bg>
       <p:bgPr>
         <a:solidFill>
-          <a:srgbClr val="FAFAF7"/>
+          <a:srgbClr val="0A0A0A"/>
         </a:solidFill>
       </p:bgPr>
     </p:bg>
@@ -5920,31 +8925,31 @@
         <p:spPr>
           <a:xfrm>
             <a:off x="457200" y="457200"/>
-            <a:ext cx="5486400" cy="228600"/>
-          </a:xfrm>
-          <a:prstGeom prst="rect">
-            <a:avLst/>
-          </a:prstGeom>
-          <a:noFill/>
-          <a:ln/>
-        </p:spPr>
-        <p:txBody>
-          <a:bodyPr wrap="square" lIns="0" tIns="0" rIns="0" bIns="0" rtlCol="0" anchor="ctr"/>
-          <a:lstStyle/>
-          <a:p>
-            <a:pPr indent="0" marL="0">
-              <a:buNone/>
-            </a:pPr>
-            <a:r>
-              <a:rPr lang="en-US" sz="900" spc="400" kern="0" dirty="0">
-                <a:solidFill>
-                  <a:srgbClr val="6B6B6B"/>
+            <a:ext cx="8229600" cy="274320"/>
+          </a:xfrm>
+          <a:prstGeom prst="rect">
+            <a:avLst/>
+          </a:prstGeom>
+          <a:noFill/>
+          <a:ln/>
+        </p:spPr>
+        <p:txBody>
+          <a:bodyPr wrap="square" lIns="0" tIns="0" rIns="0" bIns="0" rtlCol="0" anchor="ctr"/>
+          <a:lstStyle/>
+          <a:p>
+            <a:pPr indent="0" marL="0">
+              <a:buNone/>
+            </a:pPr>
+            <a:r>
+              <a:rPr lang="en-US" sz="900" spc="500" kern="0" dirty="0">
+                <a:solidFill>
+                  <a:srgbClr val="9B9B9B"/>
                 </a:solidFill>
                 <a:latin typeface="Calibri" pitchFamily="34" charset="0"/>
                 <a:ea typeface="Calibri" pitchFamily="34" charset="-122"/>
                 <a:cs typeface="Calibri" pitchFamily="34" charset="-120"/>
               </a:rPr>
-              <a:t>TARIFICATION</a:t>
+              <a:t>DROP № 001  ·  MAISON LÉVRIER  ·  RÉFÉRENCE TYPE 01</a:t>
             </a:r>
             <a:endParaRPr lang="en-US" sz="900" dirty="0"/>
           </a:p>
@@ -5958,7 +8963,7 @@
         </p:nvSpPr>
         <p:spPr>
           <a:xfrm>
-            <a:off x="457200" y="777240"/>
+            <a:off x="457200" y="822960"/>
             <a:ext cx="8229600" cy="0"/>
           </a:xfrm>
           <a:prstGeom prst="line">
@@ -5967,7 +8972,7 @@
           <a:noFill/>
           <a:ln w="9525">
             <a:solidFill>
-              <a:srgbClr val="D6D2C7"/>
+              <a:srgbClr val="3A3A3A"/>
             </a:solidFill>
             <a:prstDash val="solid"/>
           </a:ln>
@@ -5981,34 +8986,34 @@
         </p:nvSpPr>
         <p:spPr>
           <a:xfrm>
-            <a:off x="457200" y="1097280"/>
-            <a:ext cx="8229600" cy="1463040"/>
-          </a:xfrm>
-          <a:prstGeom prst="rect">
-            <a:avLst/>
-          </a:prstGeom>
-          <a:noFill/>
-          <a:ln/>
-        </p:spPr>
-        <p:txBody>
-          <a:bodyPr wrap="square" lIns="0" tIns="0" rIns="0" bIns="0" rtlCol="0" anchor="ctr"/>
-          <a:lstStyle/>
-          <a:p>
-            <a:pPr indent="0" marL="0">
-              <a:buNone/>
-            </a:pPr>
-            <a:r>
-              <a:rPr lang="en-US" sz="9000" i="1" spc="-100" kern="0" dirty="0">
-                <a:solidFill>
-                  <a:srgbClr val="0A0A0A"/>
+            <a:off x="457200" y="1051560"/>
+            <a:ext cx="8229600" cy="411480"/>
+          </a:xfrm>
+          <a:prstGeom prst="rect">
+            <a:avLst/>
+          </a:prstGeom>
+          <a:noFill/>
+          <a:ln/>
+        </p:spPr>
+        <p:txBody>
+          <a:bodyPr wrap="square" lIns="0" tIns="0" rIns="0" bIns="0" rtlCol="0" anchor="ctr"/>
+          <a:lstStyle/>
+          <a:p>
+            <a:pPr indent="0" marL="0">
+              <a:buNone/>
+            </a:pPr>
+            <a:r>
+              <a:rPr lang="en-US" sz="1800" i="1" dirty="0">
+                <a:solidFill>
+                  <a:srgbClr val="9B9B9B"/>
                 </a:solidFill>
                 <a:latin typeface="Georgia" pitchFamily="34" charset="0"/>
                 <a:ea typeface="Georgia" pitchFamily="34" charset="-122"/>
                 <a:cs typeface="Georgia" pitchFamily="34" charset="-120"/>
               </a:rPr>
-              <a:t>12 %  +  5 €</a:t>
-            </a:r>
-            <a:endParaRPr lang="en-US" sz="9000" dirty="0"/>
+              <a:t>Vous attendiez 4 500 €.</a:t>
+            </a:r>
+            <a:endParaRPr lang="en-US" sz="1800" dirty="0"/>
           </a:p>
         </p:txBody>
       </p:sp>
@@ -6020,46 +9025,85 @@
         </p:nvSpPr>
         <p:spPr>
           <a:xfrm>
-            <a:off x="457200" y="2697480"/>
-            <a:ext cx="8229600" cy="457200"/>
-          </a:xfrm>
-          <a:prstGeom prst="rect">
-            <a:avLst/>
-          </a:prstGeom>
-          <a:noFill/>
-          <a:ln/>
-        </p:spPr>
-        <p:txBody>
-          <a:bodyPr wrap="square" lIns="0" tIns="0" rIns="0" bIns="0" rtlCol="0" anchor="ctr"/>
-          <a:lstStyle/>
-          <a:p>
-            <a:pPr indent="0" marL="0">
-              <a:buNone/>
-            </a:pPr>
-            <a:r>
-              <a:rPr lang="en-US" sz="2000" i="1" dirty="0">
-                <a:solidFill>
-                  <a:srgbClr val="6B6B6B"/>
+            <a:off x="457200" y="1600200"/>
+            <a:ext cx="8229600" cy="2103120"/>
+          </a:xfrm>
+          <a:prstGeom prst="rect">
+            <a:avLst/>
+          </a:prstGeom>
+          <a:noFill/>
+          <a:ln/>
+        </p:spPr>
+        <p:txBody>
+          <a:bodyPr wrap="square" lIns="0" tIns="0" rIns="0" bIns="0" rtlCol="0" anchor="ctr"/>
+          <a:lstStyle/>
+          <a:p>
+            <a:pPr indent="0" marL="0">
+              <a:buNone/>
+            </a:pPr>
+            <a:r>
+              <a:rPr lang="en-US" sz="13000" i="1" spc="-200" kern="0" dirty="0">
+                <a:solidFill>
+                  <a:srgbClr val="FAFAF7"/>
                 </a:solidFill>
                 <a:latin typeface="Georgia" pitchFamily="34" charset="0"/>
                 <a:ea typeface="Georgia" pitchFamily="34" charset="-122"/>
                 <a:cs typeface="Georgia" pitchFamily="34" charset="-120"/>
               </a:rPr>
-              <a:t>par pièce effectivement vendue.</a:t>
-            </a:r>
-            <a:endParaRPr lang="en-US" sz="2000" dirty="0"/>
-          </a:p>
-        </p:txBody>
-      </p:sp>
-      <p:sp>
-        <p:nvSpPr>
-          <p:cNvPr id="6" name="Shape 4"/>
-          <p:cNvSpPr/>
-          <p:nvPr/>
-        </p:nvSpPr>
-        <p:spPr>
-          <a:xfrm>
-            <a:off x="457200" y="3429000"/>
+              <a:t>6 240 €</a:t>
+            </a:r>
+            <a:endParaRPr lang="en-US" sz="13000" dirty="0"/>
+          </a:p>
+        </p:txBody>
+      </p:sp>
+      <p:sp>
+        <p:nvSpPr>
+          <p:cNvPr id="6" name="Text 4"/>
+          <p:cNvSpPr/>
+          <p:nvPr/>
+        </p:nvSpPr>
+        <p:spPr>
+          <a:xfrm>
+            <a:off x="457200" y="3840480"/>
+            <a:ext cx="8229600" cy="274320"/>
+          </a:xfrm>
+          <a:prstGeom prst="rect">
+            <a:avLst/>
+          </a:prstGeom>
+          <a:noFill/>
+          <a:ln/>
+        </p:spPr>
+        <p:txBody>
+          <a:bodyPr wrap="square" lIns="0" tIns="0" rIns="0" bIns="0" rtlCol="0" anchor="ctr"/>
+          <a:lstStyle/>
+          <a:p>
+            <a:pPr indent="0" marL="0">
+              <a:buNone/>
+            </a:pPr>
+            <a:r>
+              <a:rPr lang="en-US" sz="1400" i="1" dirty="0">
+                <a:solidFill>
+                  <a:srgbClr val="F2EFE7"/>
+                </a:solidFill>
+                <a:latin typeface="Calibri" pitchFamily="34" charset="0"/>
+                <a:ea typeface="Calibri" pitchFamily="34" charset="-122"/>
+                <a:cs typeface="Calibri" pitchFamily="34" charset="-120"/>
+              </a:rPr>
+              <a:t>Ce que le marché a dit, en 5 jours.</a:t>
+            </a:r>
+            <a:endParaRPr lang="en-US" sz="1400" dirty="0"/>
+          </a:p>
+        </p:txBody>
+      </p:sp>
+      <p:sp>
+        <p:nvSpPr>
+          <p:cNvPr id="7" name="Shape 5"/>
+          <p:cNvSpPr/>
+          <p:nvPr/>
+        </p:nvSpPr>
+        <p:spPr>
+          <a:xfrm>
+            <a:off x="457200" y="4160520"/>
             <a:ext cx="8229600" cy="0"/>
           </a:xfrm>
           <a:prstGeom prst="line">
@@ -6068,7 +9112,7 @@
           <a:noFill/>
           <a:ln w="9525">
             <a:solidFill>
-              <a:srgbClr val="D6D2C7"/>
+              <a:srgbClr val="3A3A3A"/>
             </a:solidFill>
             <a:prstDash val="solid"/>
           </a:ln>
@@ -6076,13 +9120,13 @@
       </p:sp>
       <p:sp>
         <p:nvSpPr>
-          <p:cNvPr id="7" name="Text 5"/>
-          <p:cNvSpPr/>
-          <p:nvPr/>
-        </p:nvSpPr>
-        <p:spPr>
-          <a:xfrm>
-            <a:off x="457200" y="3566160"/>
+          <p:cNvPr id="8" name="Text 6"/>
+          <p:cNvSpPr/>
+          <p:nvPr/>
+        </p:nvSpPr>
+        <p:spPr>
+          <a:xfrm>
+            <a:off x="457200" y="4297680"/>
             <a:ext cx="8229600" cy="274320"/>
           </a:xfrm>
           <a:prstGeom prst="rect">
@@ -6099,288 +9143,118 @@
               <a:buNone/>
             </a:pPr>
             <a:r>
-              <a:rPr lang="en-US" sz="900" b="1" spc="500" kern="0" dirty="0">
-                <a:solidFill>
-                  <a:srgbClr val="6B6B6B"/>
-                </a:solidFill>
-                <a:latin typeface="Calibri" pitchFamily="34" charset="0"/>
-                <a:ea typeface="Calibri" pitchFamily="34" charset="-122"/>
-                <a:cs typeface="Calibri" pitchFamily="34" charset="-120"/>
-              </a:rPr>
-              <a:t>INCLUS  ·  AUCUN FRAIS ADDITIONNEL</a:t>
-            </a:r>
-            <a:endParaRPr lang="en-US" sz="900" dirty="0"/>
-          </a:p>
-        </p:txBody>
-      </p:sp>
-      <p:sp>
-        <p:nvSpPr>
-          <p:cNvPr id="8" name="Text 6"/>
-          <p:cNvSpPr/>
-          <p:nvPr/>
-        </p:nvSpPr>
-        <p:spPr>
-          <a:xfrm>
-            <a:off x="457200" y="3840480"/>
-            <a:ext cx="4023360" cy="274320"/>
-          </a:xfrm>
-          <a:prstGeom prst="rect">
-            <a:avLst/>
-          </a:prstGeom>
-          <a:noFill/>
-          <a:ln/>
-        </p:spPr>
-        <p:txBody>
-          <a:bodyPr wrap="square" lIns="0" tIns="0" rIns="0" bIns="0" rtlCol="0" anchor="ctr"/>
-          <a:lstStyle/>
-          <a:p>
-            <a:pPr indent="0" marL="0">
-              <a:buNone/>
-            </a:pPr>
-            <a:r>
-              <a:rPr lang="en-US" sz="1100" dirty="0">
-                <a:solidFill>
-                  <a:srgbClr val="0A0A0A"/>
-                </a:solidFill>
-                <a:latin typeface="Calibri" pitchFamily="34" charset="0"/>
-                <a:ea typeface="Calibri" pitchFamily="34" charset="-122"/>
-                <a:cs typeface="Calibri" pitchFamily="34" charset="-120"/>
-              </a:rPr>
-              <a:t>KYC acheteurs · Stripe Identity</a:t>
-            </a:r>
-            <a:endParaRPr lang="en-US" sz="1100" dirty="0"/>
-          </a:p>
-        </p:txBody>
-      </p:sp>
-      <p:sp>
-        <p:nvSpPr>
-          <p:cNvPr id="9" name="Text 7"/>
-          <p:cNvSpPr/>
-          <p:nvPr/>
-        </p:nvSpPr>
-        <p:spPr>
-          <a:xfrm>
-            <a:off x="457200" y="4160520"/>
-            <a:ext cx="4023360" cy="274320"/>
-          </a:xfrm>
-          <a:prstGeom prst="rect">
-            <a:avLst/>
-          </a:prstGeom>
-          <a:noFill/>
-          <a:ln/>
-        </p:spPr>
-        <p:txBody>
-          <a:bodyPr wrap="square" lIns="0" tIns="0" rIns="0" bIns="0" rtlCol="0" anchor="ctr"/>
-          <a:lstStyle/>
-          <a:p>
-            <a:pPr indent="0" marL="0">
-              <a:buNone/>
-            </a:pPr>
-            <a:r>
-              <a:rPr lang="en-US" sz="1100" dirty="0">
-                <a:solidFill>
-                  <a:srgbClr val="0A0A0A"/>
-                </a:solidFill>
-                <a:latin typeface="Calibri" pitchFamily="34" charset="0"/>
-                <a:ea typeface="Calibri" pitchFamily="34" charset="-122"/>
-                <a:cs typeface="Calibri" pitchFamily="34" charset="-120"/>
-              </a:rPr>
-              <a:t>Paiement · pré-auth, capture, remboursements</a:t>
-            </a:r>
-            <a:endParaRPr lang="en-US" sz="1100" dirty="0"/>
-          </a:p>
-        </p:txBody>
-      </p:sp>
-      <p:sp>
-        <p:nvSpPr>
-          <p:cNvPr id="10" name="Text 8"/>
-          <p:cNvSpPr/>
-          <p:nvPr/>
-        </p:nvSpPr>
-        <p:spPr>
-          <a:xfrm>
-            <a:off x="457200" y="4480560"/>
-            <a:ext cx="4023360" cy="274320"/>
-          </a:xfrm>
-          <a:prstGeom prst="rect">
-            <a:avLst/>
-          </a:prstGeom>
-          <a:noFill/>
-          <a:ln/>
-        </p:spPr>
-        <p:txBody>
-          <a:bodyPr wrap="square" lIns="0" tIns="0" rIns="0" bIns="0" rtlCol="0" anchor="ctr"/>
-          <a:lstStyle/>
-          <a:p>
-            <a:pPr indent="0" marL="0">
-              <a:buNone/>
-            </a:pPr>
-            <a:r>
-              <a:rPr lang="en-US" sz="1100" dirty="0">
-                <a:solidFill>
-                  <a:srgbClr val="0A0A0A"/>
-                </a:solidFill>
-                <a:latin typeface="Calibri" pitchFamily="34" charset="0"/>
-                <a:ea typeface="Calibri" pitchFamily="34" charset="-122"/>
-                <a:cs typeface="Calibri" pitchFamily="34" charset="-120"/>
-              </a:rPr>
-              <a:t>Logistique premium · DHL Express ou Malca-Amit</a:t>
-            </a:r>
-            <a:endParaRPr lang="en-US" sz="1100" dirty="0"/>
-          </a:p>
-        </p:txBody>
-      </p:sp>
-      <p:sp>
-        <p:nvSpPr>
-          <p:cNvPr id="11" name="Text 9"/>
-          <p:cNvSpPr/>
-          <p:nvPr/>
-        </p:nvSpPr>
-        <p:spPr>
-          <a:xfrm>
-            <a:off x="4617720" y="3840480"/>
-            <a:ext cx="4023360" cy="274320"/>
-          </a:xfrm>
-          <a:prstGeom prst="rect">
-            <a:avLst/>
-          </a:prstGeom>
-          <a:noFill/>
-          <a:ln/>
-        </p:spPr>
-        <p:txBody>
-          <a:bodyPr wrap="square" lIns="0" tIns="0" rIns="0" bIns="0" rtlCol="0" anchor="ctr"/>
-          <a:lstStyle/>
-          <a:p>
-            <a:pPr indent="0" marL="0">
-              <a:buNone/>
-            </a:pPr>
-            <a:r>
-              <a:rPr lang="en-US" sz="1100" dirty="0">
-                <a:solidFill>
-                  <a:srgbClr val="0A0A0A"/>
-                </a:solidFill>
-                <a:latin typeface="Calibri" pitchFamily="34" charset="0"/>
-                <a:ea typeface="Calibri" pitchFamily="34" charset="-122"/>
-                <a:cs typeface="Calibri" pitchFamily="34" charset="-120"/>
-              </a:rPr>
-              <a:t>Support client · Crisp chat + email</a:t>
-            </a:r>
-            <a:endParaRPr lang="en-US" sz="1100" dirty="0"/>
-          </a:p>
-        </p:txBody>
-      </p:sp>
-      <p:sp>
-        <p:nvSpPr>
-          <p:cNvPr id="12" name="Text 10"/>
-          <p:cNvSpPr/>
-          <p:nvPr/>
-        </p:nvSpPr>
-        <p:spPr>
-          <a:xfrm>
-            <a:off x="4617720" y="4160520"/>
-            <a:ext cx="4023360" cy="274320"/>
-          </a:xfrm>
-          <a:prstGeom prst="rect">
-            <a:avLst/>
-          </a:prstGeom>
-          <a:noFill/>
-          <a:ln/>
-        </p:spPr>
-        <p:txBody>
-          <a:bodyPr wrap="square" lIns="0" tIns="0" rIns="0" bIns="0" rtlCol="0" anchor="ctr"/>
-          <a:lstStyle/>
-          <a:p>
-            <a:pPr indent="0" marL="0">
-              <a:buNone/>
-            </a:pPr>
-            <a:r>
-              <a:rPr lang="en-US" sz="1100" dirty="0">
-                <a:solidFill>
-                  <a:srgbClr val="0A0A0A"/>
-                </a:solidFill>
-                <a:latin typeface="Calibri" pitchFamily="34" charset="0"/>
-                <a:ea typeface="Calibri" pitchFamily="34" charset="-122"/>
-                <a:cs typeface="Calibri" pitchFamily="34" charset="-120"/>
-              </a:rPr>
-              <a:t>Communication · newsletter, PR, réseaux</a:t>
-            </a:r>
-            <a:endParaRPr lang="en-US" sz="1100" dirty="0"/>
-          </a:p>
-        </p:txBody>
-      </p:sp>
-      <p:sp>
-        <p:nvSpPr>
-          <p:cNvPr id="13" name="Text 11"/>
-          <p:cNvSpPr/>
-          <p:nvPr/>
-        </p:nvSpPr>
-        <p:spPr>
-          <a:xfrm>
-            <a:off x="457200" y="4800600"/>
-            <a:ext cx="1371600" cy="274320"/>
-          </a:xfrm>
-          <a:prstGeom prst="rect">
-            <a:avLst/>
-          </a:prstGeom>
-          <a:noFill/>
-          <a:ln/>
-        </p:spPr>
-        <p:txBody>
-          <a:bodyPr wrap="square" lIns="0" tIns="0" rIns="0" bIns="0" rtlCol="0" anchor="ctr"/>
-          <a:lstStyle/>
-          <a:p>
-            <a:pPr indent="0" marL="0">
-              <a:buNone/>
-            </a:pPr>
-            <a:r>
-              <a:rPr lang="en-US" sz="1100" i="1" dirty="0">
-                <a:solidFill>
-                  <a:srgbClr val="0A0A0A"/>
+              <a:rPr lang="en-US" sz="1400" i="1" dirty="0">
+                <a:solidFill>
+                  <a:srgbClr val="C9A96E"/>
                 </a:solidFill>
                 <a:latin typeface="Georgia" pitchFamily="34" charset="0"/>
                 <a:ea typeface="Georgia" pitchFamily="34" charset="-122"/>
                 <a:cs typeface="Georgia" pitchFamily="34" charset="-120"/>
               </a:rPr>
-              <a:t>Drop №</a:t>
-            </a:r>
-            <a:endParaRPr lang="en-US" sz="1100" dirty="0"/>
-          </a:p>
-        </p:txBody>
-      </p:sp>
-      <p:sp>
-        <p:nvSpPr>
-          <p:cNvPr id="14" name="Text 12"/>
-          <p:cNvSpPr/>
-          <p:nvPr/>
-        </p:nvSpPr>
-        <p:spPr>
-          <a:xfrm>
-            <a:off x="8321040" y="4800600"/>
-            <a:ext cx="731520" cy="228600"/>
-          </a:xfrm>
-          <a:prstGeom prst="rect">
-            <a:avLst/>
-          </a:prstGeom>
-          <a:noFill/>
-          <a:ln/>
-        </p:spPr>
-        <p:txBody>
-          <a:bodyPr wrap="square" lIns="0" tIns="0" rIns="0" bIns="0" rtlCol="0" anchor="ctr"/>
-          <a:lstStyle/>
-          <a:p>
-            <a:pPr algn="r" indent="0" marL="0">
-              <a:buNone/>
-            </a:pPr>
-            <a:r>
-              <a:rPr lang="en-US" sz="900" i="1" dirty="0">
-                <a:solidFill>
-                  <a:srgbClr val="6B6B6B"/>
+              <a:t>+ 1 740 € par pièce  ·  + 13 920 € sur l’édition  ·  + 38,7 %</a:t>
+            </a:r>
+            <a:endParaRPr lang="en-US" sz="1400" dirty="0"/>
+          </a:p>
+        </p:txBody>
+      </p:sp>
+      <p:sp>
+        <p:nvSpPr>
+          <p:cNvPr id="9" name="Shape 7"/>
+          <p:cNvSpPr/>
+          <p:nvPr/>
+        </p:nvSpPr>
+        <p:spPr>
+          <a:xfrm>
+            <a:off x="8549640" y="502920"/>
+            <a:ext cx="73152" cy="73152"/>
+          </a:xfrm>
+          <a:prstGeom prst="ellipse">
+            <a:avLst/>
+          </a:prstGeom>
+          <a:solidFill>
+            <a:srgbClr val="C9A96E"/>
+          </a:solidFill>
+          <a:ln w="12700">
+            <a:solidFill>
+              <a:srgbClr val="C9A96E"/>
+            </a:solidFill>
+            <a:prstDash val="solid"/>
+          </a:ln>
+        </p:spPr>
+      </p:sp>
+      <p:sp>
+        <p:nvSpPr>
+          <p:cNvPr id="10" name="Text 8"/>
+          <p:cNvSpPr/>
+          <p:nvPr/>
+        </p:nvSpPr>
+        <p:spPr>
+          <a:xfrm>
+            <a:off x="457200" y="4800600"/>
+            <a:ext cx="1371600" cy="274320"/>
+          </a:xfrm>
+          <a:prstGeom prst="rect">
+            <a:avLst/>
+          </a:prstGeom>
+          <a:noFill/>
+          <a:ln/>
+        </p:spPr>
+        <p:txBody>
+          <a:bodyPr wrap="square" lIns="0" tIns="0" rIns="0" bIns="0" rtlCol="0" anchor="ctr"/>
+          <a:lstStyle/>
+          <a:p>
+            <a:pPr indent="0" marL="0">
+              <a:buNone/>
+            </a:pPr>
+            <a:r>
+              <a:rPr lang="en-US" sz="1100" i="1" dirty="0">
+                <a:solidFill>
+                  <a:srgbClr val="FAFAF7"/>
                 </a:solidFill>
                 <a:latin typeface="Georgia" pitchFamily="34" charset="0"/>
                 <a:ea typeface="Georgia" pitchFamily="34" charset="-122"/>
                 <a:cs typeface="Georgia" pitchFamily="34" charset="-120"/>
               </a:rPr>
-              <a:t>№ 08 / 10</a:t>
+              <a:t>Drop №</a:t>
+            </a:r>
+            <a:endParaRPr lang="en-US" sz="1100" dirty="0"/>
+          </a:p>
+        </p:txBody>
+      </p:sp>
+      <p:sp>
+        <p:nvSpPr>
+          <p:cNvPr id="11" name="Text 9"/>
+          <p:cNvSpPr/>
+          <p:nvPr/>
+        </p:nvSpPr>
+        <p:spPr>
+          <a:xfrm>
+            <a:off x="8321040" y="4800600"/>
+            <a:ext cx="731520" cy="228600"/>
+          </a:xfrm>
+          <a:prstGeom prst="rect">
+            <a:avLst/>
+          </a:prstGeom>
+          <a:noFill/>
+          <a:ln/>
+        </p:spPr>
+        <p:txBody>
+          <a:bodyPr wrap="square" lIns="0" tIns="0" rIns="0" bIns="0" rtlCol="0" anchor="ctr"/>
+          <a:lstStyle/>
+          <a:p>
+            <a:pPr algn="r" indent="0" marL="0">
+              <a:buNone/>
+            </a:pPr>
+            <a:r>
+              <a:rPr lang="en-US" sz="900" i="1" dirty="0">
+                <a:solidFill>
+                  <a:srgbClr val="9B9B9B"/>
+                </a:solidFill>
+                <a:latin typeface="Georgia" pitchFamily="34" charset="0"/>
+                <a:ea typeface="Georgia" pitchFamily="34" charset="-122"/>
+                <a:cs typeface="Georgia" pitchFamily="34" charset="-120"/>
+              </a:rPr>
+              <a:t>№ 08 / 12</a:t>
             </a:r>
             <a:endParaRPr lang="en-US" sz="900" dirty="0"/>
           </a:p>
@@ -6427,7 +9301,7 @@
         <p:spPr>
           <a:xfrm>
             <a:off x="457200" y="457200"/>
-            <a:ext cx="5486400" cy="228600"/>
+            <a:ext cx="6400800" cy="228600"/>
           </a:xfrm>
           <a:prstGeom prst="rect">
             <a:avLst/>
@@ -6451,7 +9325,7 @@
                 <a:ea typeface="Calibri" pitchFamily="34" charset="-122"/>
                 <a:cs typeface="Calibri" pitchFamily="34" charset="-120"/>
               </a:rPr>
-              <a:t>POSITIONNEMENT</a:t>
+              <a:t>LE TEST SANS LE RISQUE</a:t>
             </a:r>
             <a:endParaRPr lang="en-US" sz="900" dirty="0"/>
           </a:p>
@@ -6489,23 +9363,23 @@
         <p:spPr>
           <a:xfrm>
             <a:off x="457200" y="1005840"/>
-            <a:ext cx="8229600" cy="640080"/>
-          </a:xfrm>
-          <a:prstGeom prst="rect">
-            <a:avLst/>
-          </a:prstGeom>
-          <a:noFill/>
-          <a:ln/>
-        </p:spPr>
-        <p:txBody>
-          <a:bodyPr wrap="square" lIns="0" tIns="0" rIns="0" bIns="0" rtlCol="0" anchor="ctr"/>
-          <a:lstStyle/>
-          <a:p>
-            <a:pPr indent="0" marL="0">
-              <a:buNone/>
-            </a:pPr>
-            <a:r>
-              <a:rPr lang="en-US" sz="2800" i="1" dirty="0">
+            <a:ext cx="8229600" cy="548640"/>
+          </a:xfrm>
+          <a:prstGeom prst="rect">
+            <a:avLst/>
+          </a:prstGeom>
+          <a:noFill/>
+          <a:ln/>
+        </p:spPr>
+        <p:txBody>
+          <a:bodyPr wrap="square" lIns="0" tIns="0" rIns="0" bIns="0" rtlCol="0" anchor="ctr"/>
+          <a:lstStyle/>
+          <a:p>
+            <a:pPr indent="0" marL="0">
+              <a:buNone/>
+            </a:pPr>
+            <a:r>
+              <a:rPr lang="en-US" sz="2600" i="1" dirty="0">
                 <a:solidFill>
                   <a:srgbClr val="0A0A0A"/>
                 </a:solidFill>
@@ -6513,9 +9387,9 @@
                 <a:ea typeface="Georgia" pitchFamily="34" charset="-122"/>
                 <a:cs typeface="Georgia" pitchFamily="34" charset="-120"/>
               </a:rPr>
-              <a:t>Pour les pièces qu’on n’a pas encore vues.</a:t>
-            </a:r>
-            <a:endParaRPr lang="en-US" sz="2800" dirty="0"/>
+              <a:t>Trois garde-fous, pour tester sans casser.</a:t>
+            </a:r>
+            <a:endParaRPr lang="en-US" sz="2600" dirty="0"/>
           </a:p>
         </p:txBody>
       </p:sp>
@@ -6527,24 +9401,63 @@
         </p:nvSpPr>
         <p:spPr>
           <a:xfrm>
-            <a:off x="457200" y="1691640"/>
-            <a:ext cx="8229600" cy="502920"/>
-          </a:xfrm>
-          <a:prstGeom prst="rect">
-            <a:avLst/>
-          </a:prstGeom>
-          <a:noFill/>
-          <a:ln/>
-        </p:spPr>
-        <p:txBody>
-          <a:bodyPr wrap="square" lIns="0" tIns="0" rIns="0" bIns="0" rtlCol="0" anchor="ctr"/>
-          <a:lstStyle/>
-          <a:p>
-            <a:pPr indent="0" marL="0">
-              <a:buNone/>
-            </a:pPr>
-            <a:r>
-              <a:rPr lang="en-US" sz="1300" i="1" dirty="0">
+            <a:off x="457200" y="1965960"/>
+            <a:ext cx="8229600" cy="320040"/>
+          </a:xfrm>
+          <a:prstGeom prst="rect">
+            <a:avLst/>
+          </a:prstGeom>
+          <a:noFill/>
+          <a:ln/>
+        </p:spPr>
+        <p:txBody>
+          <a:bodyPr wrap="square" lIns="0" tIns="0" rIns="0" bIns="0" rtlCol="0" anchor="ctr"/>
+          <a:lstStyle/>
+          <a:p>
+            <a:pPr indent="0" marL="0">
+              <a:buNone/>
+            </a:pPr>
+            <a:r>
+              <a:rPr lang="en-US" sz="1900" i="1" dirty="0">
+                <a:solidFill>
+                  <a:srgbClr val="0A0A0A"/>
+                </a:solidFill>
+                <a:latin typeface="Georgia" pitchFamily="34" charset="0"/>
+                <a:ea typeface="Georgia" pitchFamily="34" charset="-122"/>
+                <a:cs typeface="Georgia" pitchFamily="34" charset="-120"/>
+              </a:rPr>
+              <a:t>Le prix plancher est le vôtre</a:t>
+            </a:r>
+            <a:endParaRPr lang="en-US" sz="1900" dirty="0"/>
+          </a:p>
+        </p:txBody>
+      </p:sp>
+      <p:sp>
+        <p:nvSpPr>
+          <p:cNvPr id="6" name="Text 4"/>
+          <p:cNvSpPr/>
+          <p:nvPr/>
+        </p:nvSpPr>
+        <p:spPr>
+          <a:xfrm>
+            <a:off x="457200" y="2304288"/>
+            <a:ext cx="8229600" cy="457200"/>
+          </a:xfrm>
+          <a:prstGeom prst="rect">
+            <a:avLst/>
+          </a:prstGeom>
+          <a:noFill/>
+          <a:ln/>
+        </p:spPr>
+        <p:txBody>
+          <a:bodyPr wrap="square" lIns="0" tIns="0" rIns="0" bIns="0" rtlCol="0" anchor="ctr"/>
+          <a:lstStyle/>
+          <a:p>
+            <a:pPr indent="0" marL="0">
+              <a:buNone/>
+            </a:pPr>
+            <a:r>
+              <a:rPr lang="en-US" sz="1200" dirty="0">
                 <a:solidFill>
                   <a:srgbClr val="6B6B6B"/>
                 </a:solidFill>
@@ -6552,61 +9465,123 @@
                 <a:ea typeface="Calibri" pitchFamily="34" charset="-122"/>
                 <a:cs typeface="Calibri" pitchFamily="34" charset="-120"/>
               </a:rPr>
-              <a:t>Les références émergentes, les éditions limitées, les premières sorties. Quand le marché ne sait pas encore quoi en penser.</a:t>
-            </a:r>
-            <a:endParaRPr lang="en-US" sz="1300" dirty="0"/>
-          </a:p>
-        </p:txBody>
-      </p:sp>
-      <p:sp>
-        <p:nvSpPr>
-          <p:cNvPr id="6" name="Text 4"/>
-          <p:cNvSpPr/>
-          <p:nvPr/>
-        </p:nvSpPr>
-        <p:spPr>
-          <a:xfrm>
-            <a:off x="457200" y="2468880"/>
-            <a:ext cx="4023360" cy="274320"/>
-          </a:xfrm>
-          <a:prstGeom prst="rect">
-            <a:avLst/>
-          </a:prstGeom>
-          <a:noFill/>
-          <a:ln/>
-        </p:spPr>
-        <p:txBody>
-          <a:bodyPr wrap="square" lIns="0" tIns="0" rIns="0" bIns="0" rtlCol="0" anchor="ctr"/>
-          <a:lstStyle/>
-          <a:p>
-            <a:pPr indent="0" marL="0">
-              <a:buNone/>
-            </a:pPr>
-            <a:r>
-              <a:rPr lang="en-US" sz="1000" b="1" spc="300" kern="0" dirty="0">
-                <a:solidFill>
-                  <a:srgbClr val="C9A96E"/>
+              <a:t>Si la demande est en dessous, le drop est annulé. Aucune vente sous votre seuil. Aucune perte d’image.</a:t>
+            </a:r>
+            <a:endParaRPr lang="en-US" sz="1200" dirty="0"/>
+          </a:p>
+        </p:txBody>
+      </p:sp>
+      <p:sp>
+        <p:nvSpPr>
+          <p:cNvPr id="7" name="Shape 5"/>
+          <p:cNvSpPr/>
+          <p:nvPr/>
+        </p:nvSpPr>
+        <p:spPr>
+          <a:xfrm>
+            <a:off x="457200" y="2743200"/>
+            <a:ext cx="8229600" cy="0"/>
+          </a:xfrm>
+          <a:prstGeom prst="line">
+            <a:avLst/>
+          </a:prstGeom>
+          <a:noFill/>
+          <a:ln w="9525">
+            <a:solidFill>
+              <a:srgbClr val="D6D2C7"/>
+            </a:solidFill>
+            <a:prstDash val="solid"/>
+          </a:ln>
+        </p:spPr>
+      </p:sp>
+      <p:sp>
+        <p:nvSpPr>
+          <p:cNvPr id="8" name="Text 6"/>
+          <p:cNvSpPr/>
+          <p:nvPr/>
+        </p:nvSpPr>
+        <p:spPr>
+          <a:xfrm>
+            <a:off x="457200" y="2834640"/>
+            <a:ext cx="8229600" cy="320040"/>
+          </a:xfrm>
+          <a:prstGeom prst="rect">
+            <a:avLst/>
+          </a:prstGeom>
+          <a:noFill/>
+          <a:ln/>
+        </p:spPr>
+        <p:txBody>
+          <a:bodyPr wrap="square" lIns="0" tIns="0" rIns="0" bIns="0" rtlCol="0" anchor="ctr"/>
+          <a:lstStyle/>
+          <a:p>
+            <a:pPr indent="0" marL="0">
+              <a:buNone/>
+            </a:pPr>
+            <a:r>
+              <a:rPr lang="en-US" sz="1900" i="1" dirty="0">
+                <a:solidFill>
+                  <a:srgbClr val="0A0A0A"/>
+                </a:solidFill>
+                <a:latin typeface="Georgia" pitchFamily="34" charset="0"/>
+                <a:ea typeface="Georgia" pitchFamily="34" charset="-122"/>
+                <a:cs typeface="Georgia" pitchFamily="34" charset="-120"/>
+              </a:rPr>
+              <a:t>Drop annulé, zéro frais</a:t>
+            </a:r>
+            <a:endParaRPr lang="en-US" sz="1900" dirty="0"/>
+          </a:p>
+        </p:txBody>
+      </p:sp>
+      <p:sp>
+        <p:nvSpPr>
+          <p:cNvPr id="9" name="Text 7"/>
+          <p:cNvSpPr/>
+          <p:nvPr/>
+        </p:nvSpPr>
+        <p:spPr>
+          <a:xfrm>
+            <a:off x="457200" y="3172968"/>
+            <a:ext cx="8229600" cy="457200"/>
+          </a:xfrm>
+          <a:prstGeom prst="rect">
+            <a:avLst/>
+          </a:prstGeom>
+          <a:noFill/>
+          <a:ln/>
+        </p:spPr>
+        <p:txBody>
+          <a:bodyPr wrap="square" lIns="0" tIns="0" rIns="0" bIns="0" rtlCol="0" anchor="ctr"/>
+          <a:lstStyle/>
+          <a:p>
+            <a:pPr indent="0" marL="0">
+              <a:buNone/>
+            </a:pPr>
+            <a:r>
+              <a:rPr lang="en-US" sz="1200" dirty="0">
+                <a:solidFill>
+                  <a:srgbClr val="6B6B6B"/>
                 </a:solidFill>
                 <a:latin typeface="Calibri" pitchFamily="34" charset="0"/>
                 <a:ea typeface="Calibri" pitchFamily="34" charset="-122"/>
                 <a:cs typeface="Calibri" pitchFamily="34" charset="-120"/>
               </a:rPr>
-              <a:t>IDÉAL POUR</a:t>
-            </a:r>
-            <a:endParaRPr lang="en-US" sz="1000" dirty="0"/>
-          </a:p>
-        </p:txBody>
-      </p:sp>
-      <p:sp>
-        <p:nvSpPr>
-          <p:cNvPr id="7" name="Shape 5"/>
-          <p:cNvSpPr/>
-          <p:nvPr/>
-        </p:nvSpPr>
-        <p:spPr>
-          <a:xfrm>
-            <a:off x="457200" y="2788920"/>
-            <a:ext cx="4023360" cy="0"/>
+              <a:t>Pas de fee si rien ne part. Drop No. ne gagne que si vous gagnez. Notre intérêt est aligné sur le vôtre.</a:t>
+            </a:r>
+            <a:endParaRPr lang="en-US" sz="1200" dirty="0"/>
+          </a:p>
+        </p:txBody>
+      </p:sp>
+      <p:sp>
+        <p:nvSpPr>
+          <p:cNvPr id="10" name="Shape 8"/>
+          <p:cNvSpPr/>
+          <p:nvPr/>
+        </p:nvSpPr>
+        <p:spPr>
+          <a:xfrm>
+            <a:off x="457200" y="3611880"/>
+            <a:ext cx="8229600" cy="0"/>
           </a:xfrm>
           <a:prstGeom prst="line">
             <a:avLst/>
@@ -6614,7 +9589,7 @@
           <a:noFill/>
           <a:ln w="9525">
             <a:solidFill>
-              <a:srgbClr val="C9A96E"/>
+              <a:srgbClr val="D6D2C7"/>
             </a:solidFill>
             <a:prstDash val="solid"/>
           </a:ln>
@@ -6622,14 +9597,53 @@
       </p:sp>
       <p:sp>
         <p:nvSpPr>
-          <p:cNvPr id="8" name="Text 6"/>
-          <p:cNvSpPr/>
-          <p:nvPr/>
-        </p:nvSpPr>
-        <p:spPr>
-          <a:xfrm>
-            <a:off x="457200" y="2971800"/>
-            <a:ext cx="4023360" cy="365760"/>
+          <p:cNvPr id="11" name="Text 9"/>
+          <p:cNvSpPr/>
+          <p:nvPr/>
+        </p:nvSpPr>
+        <p:spPr>
+          <a:xfrm>
+            <a:off x="457200" y="3703320"/>
+            <a:ext cx="8229600" cy="320040"/>
+          </a:xfrm>
+          <a:prstGeom prst="rect">
+            <a:avLst/>
+          </a:prstGeom>
+          <a:noFill/>
+          <a:ln/>
+        </p:spPr>
+        <p:txBody>
+          <a:bodyPr wrap="square" lIns="0" tIns="0" rIns="0" bIns="0" rtlCol="0" anchor="ctr"/>
+          <a:lstStyle/>
+          <a:p>
+            <a:pPr indent="0" marL="0">
+              <a:buNone/>
+            </a:pPr>
+            <a:r>
+              <a:rPr lang="en-US" sz="1900" i="1" dirty="0">
+                <a:solidFill>
+                  <a:srgbClr val="0A0A0A"/>
+                </a:solidFill>
+                <a:latin typeface="Georgia" pitchFamily="34" charset="0"/>
+                <a:ea typeface="Georgia" pitchFamily="34" charset="-122"/>
+                <a:cs typeface="Georgia" pitchFamily="34" charset="-120"/>
+              </a:rPr>
+              <a:t>Vous gardez la maîtrise du calendrier</a:t>
+            </a:r>
+            <a:endParaRPr lang="en-US" sz="1900" dirty="0"/>
+          </a:p>
+        </p:txBody>
+      </p:sp>
+      <p:sp>
+        <p:nvSpPr>
+          <p:cNvPr id="12" name="Text 10"/>
+          <p:cNvSpPr/>
+          <p:nvPr/>
+        </p:nvSpPr>
+        <p:spPr>
+          <a:xfrm>
+            <a:off x="457200" y="4041648"/>
+            <a:ext cx="8229600" cy="457200"/>
           </a:xfrm>
           <a:prstGeom prst="rect">
             <a:avLst/>
@@ -6647,13 +9661,13 @@
             <a:r>
               <a:rPr lang="en-US" sz="1200" dirty="0">
                 <a:solidFill>
-                  <a:srgbClr val="0A0A0A"/>
+                  <a:srgbClr val="6B6B6B"/>
                 </a:solidFill>
                 <a:latin typeface="Calibri" pitchFamily="34" charset="0"/>
                 <a:ea typeface="Calibri" pitchFamily="34" charset="-122"/>
                 <a:cs typeface="Calibri" pitchFamily="34" charset="-120"/>
               </a:rPr>
-              <a:t>Nouvelles références indé, jamais commercialisées</a:t>
+              <a:t>Date d’ouverture, durée, communication. Une révélation par drop, jamais en parallèle avec votre boutique propre.</a:t>
             </a:r>
             <a:endParaRPr lang="en-US" sz="1200" dirty="0"/>
           </a:p>
@@ -6661,342 +9675,7 @@
       </p:sp>
       <p:sp>
         <p:nvSpPr>
-          <p:cNvPr id="9" name="Text 7"/>
-          <p:cNvSpPr/>
-          <p:nvPr/>
-        </p:nvSpPr>
-        <p:spPr>
-          <a:xfrm>
-            <a:off x="457200" y="3355848"/>
-            <a:ext cx="4023360" cy="365760"/>
-          </a:xfrm>
-          <a:prstGeom prst="rect">
-            <a:avLst/>
-          </a:prstGeom>
-          <a:noFill/>
-          <a:ln/>
-        </p:spPr>
-        <p:txBody>
-          <a:bodyPr wrap="square" lIns="0" tIns="0" rIns="0" bIns="0" rtlCol="0" anchor="ctr"/>
-          <a:lstStyle/>
-          <a:p>
-            <a:pPr indent="0" marL="0">
-              <a:buNone/>
-            </a:pPr>
-            <a:r>
-              <a:rPr lang="en-US" sz="1200" dirty="0">
-                <a:solidFill>
-                  <a:srgbClr val="0A0A0A"/>
-                </a:solidFill>
-                <a:latin typeface="Calibri" pitchFamily="34" charset="0"/>
-                <a:ea typeface="Calibri" pitchFamily="34" charset="-122"/>
-                <a:cs typeface="Calibri" pitchFamily="34" charset="-120"/>
-              </a:rPr>
-              <a:t>Prototypes prêts à industrialiser, à valider en demande</a:t>
-            </a:r>
-            <a:endParaRPr lang="en-US" sz="1200" dirty="0"/>
-          </a:p>
-        </p:txBody>
-      </p:sp>
-      <p:sp>
-        <p:nvSpPr>
-          <p:cNvPr id="10" name="Text 8"/>
-          <p:cNvSpPr/>
-          <p:nvPr/>
-        </p:nvSpPr>
-        <p:spPr>
-          <a:xfrm>
-            <a:off x="457200" y="3739896"/>
-            <a:ext cx="4023360" cy="365760"/>
-          </a:xfrm>
-          <a:prstGeom prst="rect">
-            <a:avLst/>
-          </a:prstGeom>
-          <a:noFill/>
-          <a:ln/>
-        </p:spPr>
-        <p:txBody>
-          <a:bodyPr wrap="square" lIns="0" tIns="0" rIns="0" bIns="0" rtlCol="0" anchor="ctr"/>
-          <a:lstStyle/>
-          <a:p>
-            <a:pPr indent="0" marL="0">
-              <a:buNone/>
-            </a:pPr>
-            <a:r>
-              <a:rPr lang="en-US" sz="1200" dirty="0">
-                <a:solidFill>
-                  <a:srgbClr val="0A0A0A"/>
-                </a:solidFill>
-                <a:latin typeface="Calibri" pitchFamily="34" charset="0"/>
-                <a:ea typeface="Calibri" pitchFamily="34" charset="-122"/>
-                <a:cs typeface="Calibri" pitchFamily="34" charset="-120"/>
-              </a:rPr>
-              <a:t>Éditions anniversaire, capsules, collaborations</a:t>
-            </a:r>
-            <a:endParaRPr lang="en-US" sz="1200" dirty="0"/>
-          </a:p>
-        </p:txBody>
-      </p:sp>
-      <p:sp>
-        <p:nvSpPr>
-          <p:cNvPr id="11" name="Text 9"/>
-          <p:cNvSpPr/>
-          <p:nvPr/>
-        </p:nvSpPr>
-        <p:spPr>
-          <a:xfrm>
-            <a:off x="457200" y="4123944"/>
-            <a:ext cx="4023360" cy="365760"/>
-          </a:xfrm>
-          <a:prstGeom prst="rect">
-            <a:avLst/>
-          </a:prstGeom>
-          <a:noFill/>
-          <a:ln/>
-        </p:spPr>
-        <p:txBody>
-          <a:bodyPr wrap="square" lIns="0" tIns="0" rIns="0" bIns="0" rtlCol="0" anchor="ctr"/>
-          <a:lstStyle/>
-          <a:p>
-            <a:pPr indent="0" marL="0">
-              <a:buNone/>
-            </a:pPr>
-            <a:r>
-              <a:rPr lang="en-US" sz="1200" dirty="0">
-                <a:solidFill>
-                  <a:srgbClr val="0A0A0A"/>
-                </a:solidFill>
-                <a:latin typeface="Calibri" pitchFamily="34" charset="0"/>
-                <a:ea typeface="Calibri" pitchFamily="34" charset="-122"/>
-                <a:cs typeface="Calibri" pitchFamily="34" charset="-120"/>
-              </a:rPr>
-              <a:t>Productions ≤ 50 pièces, prix unitaire ≥ 3 000 €</a:t>
-            </a:r>
-            <a:endParaRPr lang="en-US" sz="1200" dirty="0"/>
-          </a:p>
-        </p:txBody>
-      </p:sp>
-      <p:sp>
-        <p:nvSpPr>
-          <p:cNvPr id="12" name="Text 10"/>
-          <p:cNvSpPr/>
-          <p:nvPr/>
-        </p:nvSpPr>
-        <p:spPr>
-          <a:xfrm>
-            <a:off x="4663440" y="2468880"/>
-            <a:ext cx="4023360" cy="274320"/>
-          </a:xfrm>
-          <a:prstGeom prst="rect">
-            <a:avLst/>
-          </a:prstGeom>
-          <a:noFill/>
-          <a:ln/>
-        </p:spPr>
-        <p:txBody>
-          <a:bodyPr wrap="square" lIns="0" tIns="0" rIns="0" bIns="0" rtlCol="0" anchor="ctr"/>
-          <a:lstStyle/>
-          <a:p>
-            <a:pPr indent="0" marL="0">
-              <a:buNone/>
-            </a:pPr>
-            <a:r>
-              <a:rPr lang="en-US" sz="1000" b="1" spc="300" kern="0" dirty="0">
-                <a:solidFill>
-                  <a:srgbClr val="6B6B6B"/>
-                </a:solidFill>
-                <a:latin typeface="Calibri" pitchFamily="34" charset="0"/>
-                <a:ea typeface="Calibri" pitchFamily="34" charset="-122"/>
-                <a:cs typeface="Calibri" pitchFamily="34" charset="-120"/>
-              </a:rPr>
-              <a:t>HORS SCOPE</a:t>
-            </a:r>
-            <a:endParaRPr lang="en-US" sz="1000" dirty="0"/>
-          </a:p>
-        </p:txBody>
-      </p:sp>
-      <p:sp>
-        <p:nvSpPr>
-          <p:cNvPr id="13" name="Shape 11"/>
-          <p:cNvSpPr/>
-          <p:nvPr/>
-        </p:nvSpPr>
-        <p:spPr>
-          <a:xfrm>
-            <a:off x="4663440" y="2788920"/>
-            <a:ext cx="4023360" cy="0"/>
-          </a:xfrm>
-          <a:prstGeom prst="line">
-            <a:avLst/>
-          </a:prstGeom>
-          <a:noFill/>
-          <a:ln w="9525">
-            <a:solidFill>
-              <a:srgbClr val="6B6B6B"/>
-            </a:solidFill>
-            <a:prstDash val="solid"/>
-          </a:ln>
-        </p:spPr>
-      </p:sp>
-      <p:sp>
-        <p:nvSpPr>
-          <p:cNvPr id="14" name="Text 12"/>
-          <p:cNvSpPr/>
-          <p:nvPr/>
-        </p:nvSpPr>
-        <p:spPr>
-          <a:xfrm>
-            <a:off x="4663440" y="2971800"/>
-            <a:ext cx="4023360" cy="365760"/>
-          </a:xfrm>
-          <a:prstGeom prst="rect">
-            <a:avLst/>
-          </a:prstGeom>
-          <a:noFill/>
-          <a:ln/>
-        </p:spPr>
-        <p:txBody>
-          <a:bodyPr wrap="square" lIns="0" tIns="0" rIns="0" bIns="0" rtlCol="0" anchor="ctr"/>
-          <a:lstStyle/>
-          <a:p>
-            <a:pPr indent="0" marL="0">
-              <a:buNone/>
-            </a:pPr>
-            <a:r>
-              <a:rPr lang="en-US" sz="1200" dirty="0">
-                <a:solidFill>
-                  <a:srgbClr val="0A0A0A"/>
-                </a:solidFill>
-                <a:latin typeface="Calibri" pitchFamily="34" charset="0"/>
-                <a:ea typeface="Calibri" pitchFamily="34" charset="-122"/>
-                <a:cs typeface="Calibri" pitchFamily="34" charset="-120"/>
-              </a:rPr>
-              <a:t>Catalogue récurrent à prix déjà établi</a:t>
-            </a:r>
-            <a:endParaRPr lang="en-US" sz="1200" dirty="0"/>
-          </a:p>
-        </p:txBody>
-      </p:sp>
-      <p:sp>
-        <p:nvSpPr>
-          <p:cNvPr id="15" name="Text 13"/>
-          <p:cNvSpPr/>
-          <p:nvPr/>
-        </p:nvSpPr>
-        <p:spPr>
-          <a:xfrm>
-            <a:off x="4663440" y="3355848"/>
-            <a:ext cx="4023360" cy="365760"/>
-          </a:xfrm>
-          <a:prstGeom prst="rect">
-            <a:avLst/>
-          </a:prstGeom>
-          <a:noFill/>
-          <a:ln/>
-        </p:spPr>
-        <p:txBody>
-          <a:bodyPr wrap="square" lIns="0" tIns="0" rIns="0" bIns="0" rtlCol="0" anchor="ctr"/>
-          <a:lstStyle/>
-          <a:p>
-            <a:pPr indent="0" marL="0">
-              <a:buNone/>
-            </a:pPr>
-            <a:r>
-              <a:rPr lang="en-US" sz="1200" dirty="0">
-                <a:solidFill>
-                  <a:srgbClr val="0A0A0A"/>
-                </a:solidFill>
-                <a:latin typeface="Calibri" pitchFamily="34" charset="0"/>
-                <a:ea typeface="Calibri" pitchFamily="34" charset="-122"/>
-                <a:cs typeface="Calibri" pitchFamily="34" charset="-120"/>
-              </a:rPr>
-              <a:t>Pièces sous 3 000 € (économie de la livraison tendue)</a:t>
-            </a:r>
-            <a:endParaRPr lang="en-US" sz="1200" dirty="0"/>
-          </a:p>
-        </p:txBody>
-      </p:sp>
-      <p:sp>
-        <p:nvSpPr>
-          <p:cNvPr id="16" name="Text 14"/>
-          <p:cNvSpPr/>
-          <p:nvPr/>
-        </p:nvSpPr>
-        <p:spPr>
-          <a:xfrm>
-            <a:off x="4663440" y="3739896"/>
-            <a:ext cx="4023360" cy="365760"/>
-          </a:xfrm>
-          <a:prstGeom prst="rect">
-            <a:avLst/>
-          </a:prstGeom>
-          <a:noFill/>
-          <a:ln/>
-        </p:spPr>
-        <p:txBody>
-          <a:bodyPr wrap="square" lIns="0" tIns="0" rIns="0" bIns="0" rtlCol="0" anchor="ctr"/>
-          <a:lstStyle/>
-          <a:p>
-            <a:pPr indent="0" marL="0">
-              <a:buNone/>
-            </a:pPr>
-            <a:r>
-              <a:rPr lang="en-US" sz="1200" dirty="0">
-                <a:solidFill>
-                  <a:srgbClr val="0A0A0A"/>
-                </a:solidFill>
-                <a:latin typeface="Calibri" pitchFamily="34" charset="0"/>
-                <a:ea typeface="Calibri" pitchFamily="34" charset="-122"/>
-                <a:cs typeface="Calibri" pitchFamily="34" charset="-120"/>
-              </a:rPr>
-              <a:t>Marché secondaire de revente (brand-direct only)</a:t>
-            </a:r>
-            <a:endParaRPr lang="en-US" sz="1200" dirty="0"/>
-          </a:p>
-        </p:txBody>
-      </p:sp>
-      <p:sp>
-        <p:nvSpPr>
-          <p:cNvPr id="17" name="Text 15"/>
-          <p:cNvSpPr/>
-          <p:nvPr/>
-        </p:nvSpPr>
-        <p:spPr>
-          <a:xfrm>
-            <a:off x="4663440" y="4123944"/>
-            <a:ext cx="4023360" cy="365760"/>
-          </a:xfrm>
-          <a:prstGeom prst="rect">
-            <a:avLst/>
-          </a:prstGeom>
-          <a:noFill/>
-          <a:ln/>
-        </p:spPr>
-        <p:txBody>
-          <a:bodyPr wrap="square" lIns="0" tIns="0" rIns="0" bIns="0" rtlCol="0" anchor="ctr"/>
-          <a:lstStyle/>
-          <a:p>
-            <a:pPr indent="0" marL="0">
-              <a:buNone/>
-            </a:pPr>
-            <a:r>
-              <a:rPr lang="en-US" sz="1200" dirty="0">
-                <a:solidFill>
-                  <a:srgbClr val="0A0A0A"/>
-                </a:solidFill>
-                <a:latin typeface="Calibri" pitchFamily="34" charset="0"/>
-                <a:ea typeface="Calibri" pitchFamily="34" charset="-122"/>
-                <a:cs typeface="Calibri" pitchFamily="34" charset="-120"/>
-              </a:rPr>
-              <a:t>Catégories non-horlogères (bijoux et art en v2)</a:t>
-            </a:r>
-            <a:endParaRPr lang="en-US" sz="1200" dirty="0"/>
-          </a:p>
-        </p:txBody>
-      </p:sp>
-      <p:sp>
-        <p:nvSpPr>
-          <p:cNvPr id="18" name="Text 16"/>
+          <p:cNvPr id="13" name="Text 11"/>
           <p:cNvSpPr/>
           <p:nvPr/>
         </p:nvSpPr>
@@ -7035,7 +9714,7 @@
       </p:sp>
       <p:sp>
         <p:nvSpPr>
-          <p:cNvPr id="19" name="Text 17"/>
+          <p:cNvPr id="14" name="Text 12"/>
           <p:cNvSpPr/>
           <p:nvPr/>
         </p:nvSpPr>
@@ -7066,7 +9745,7 @@
                 <a:ea typeface="Georgia" pitchFamily="34" charset="-122"/>
                 <a:cs typeface="Georgia" pitchFamily="34" charset="-120"/>
               </a:rPr>
-              <a:t>№ 09 / 10</a:t>
+              <a:t>№ 09 / 12</a:t>
             </a:r>
             <a:endParaRPr lang="en-US" sz="900" dirty="0"/>
           </a:p>
